--- a/LOLEX_포트폴리오.pptx
+++ b/LOLEX_포트폴리오.pptx
@@ -5473,7 +5473,7 @@
         </p:nvSpPr>
         <p:spPr>
           <a:xfrm>
-            <a:off x="792000" y="1879200"/>
+            <a:off x="792000" y="1951200"/>
             <a:ext cx="198000" cy="32400"/>
           </a:xfrm>
           <a:prstGeom prst="rect">
@@ -5517,7 +5517,7 @@
         </p:nvSpPr>
         <p:spPr>
           <a:xfrm>
-            <a:off x="1152000" y="1771200"/>
+            <a:off x="1152000" y="1843200"/>
             <a:ext cx="10248120" cy="288000"/>
           </a:xfrm>
           <a:prstGeom prst="rect">
@@ -5559,23 +5559,23 @@
         </p:nvSpPr>
         <p:spPr>
           <a:xfrm>
-            <a:off x="1152000" y="2095199"/>
-            <a:ext cx="10248120" cy="648000"/>
-          </a:xfrm>
-          <a:prstGeom prst="rect">
-            <a:avLst/>
-          </a:prstGeom>
-          <a:noFill/>
-        </p:spPr>
-        <p:txBody>
-          <a:bodyPr wrap="square" anchor="t" lIns="0" rIns="0" tIns="0" bIns="0">
-            <a:spAutoFit/>
-          </a:bodyPr>
-          <a:lstStyle/>
-          <a:p>
-            <a:pPr algn="l">
-              <a:lnSpc>
-                <a:spcPct val="140000"/>
+            <a:off x="1152000" y="2178000"/>
+            <a:ext cx="10248120" cy="684000"/>
+          </a:xfrm>
+          <a:prstGeom prst="rect">
+            <a:avLst/>
+          </a:prstGeom>
+          <a:noFill/>
+        </p:spPr>
+        <p:txBody>
+          <a:bodyPr wrap="square" anchor="t" lIns="0" rIns="0" tIns="0" bIns="0">
+            <a:spAutoFit/>
+          </a:bodyPr>
+          <a:lstStyle/>
+          <a:p>
+            <a:pPr algn="l">
+              <a:lnSpc>
+                <a:spcPct val="145000"/>
               </a:lnSpc>
               <a:spcAft>
                 <a:spcPts val="400"/>
@@ -5601,7 +5601,7 @@
         </p:nvSpPr>
         <p:spPr>
           <a:xfrm>
-            <a:off x="792000" y="3157199"/>
+            <a:off x="792000" y="3409199"/>
             <a:ext cx="198000" cy="32400"/>
           </a:xfrm>
           <a:prstGeom prst="rect">
@@ -5645,7 +5645,7 @@
         </p:nvSpPr>
         <p:spPr>
           <a:xfrm>
-            <a:off x="1152000" y="3049199"/>
+            <a:off x="1152000" y="3301200"/>
             <a:ext cx="10248120" cy="288000"/>
           </a:xfrm>
           <a:prstGeom prst="rect">
@@ -5687,23 +5687,23 @@
         </p:nvSpPr>
         <p:spPr>
           <a:xfrm>
-            <a:off x="1152000" y="3373199"/>
-            <a:ext cx="10248120" cy="648000"/>
-          </a:xfrm>
-          <a:prstGeom prst="rect">
-            <a:avLst/>
-          </a:prstGeom>
-          <a:noFill/>
-        </p:spPr>
-        <p:txBody>
-          <a:bodyPr wrap="square" anchor="t" lIns="0" rIns="0" tIns="0" bIns="0">
-            <a:spAutoFit/>
-          </a:bodyPr>
-          <a:lstStyle/>
-          <a:p>
-            <a:pPr algn="l">
-              <a:lnSpc>
-                <a:spcPct val="140000"/>
+            <a:off x="1152000" y="3636000"/>
+            <a:ext cx="10248120" cy="684000"/>
+          </a:xfrm>
+          <a:prstGeom prst="rect">
+            <a:avLst/>
+          </a:prstGeom>
+          <a:noFill/>
+        </p:spPr>
+        <p:txBody>
+          <a:bodyPr wrap="square" anchor="t" lIns="0" rIns="0" tIns="0" bIns="0">
+            <a:spAutoFit/>
+          </a:bodyPr>
+          <a:lstStyle/>
+          <a:p>
+            <a:pPr algn="l">
+              <a:lnSpc>
+                <a:spcPct val="145000"/>
               </a:lnSpc>
               <a:spcAft>
                 <a:spcPts val="400"/>
@@ -5729,7 +5729,7 @@
         </p:nvSpPr>
         <p:spPr>
           <a:xfrm>
-            <a:off x="792000" y="4435199"/>
+            <a:off x="792000" y="4867199"/>
             <a:ext cx="198000" cy="32400"/>
           </a:xfrm>
           <a:prstGeom prst="rect">
@@ -5773,7 +5773,7 @@
         </p:nvSpPr>
         <p:spPr>
           <a:xfrm>
-            <a:off x="1152000" y="4327200"/>
+            <a:off x="1152000" y="4759200"/>
             <a:ext cx="10248120" cy="288000"/>
           </a:xfrm>
           <a:prstGeom prst="rect">
@@ -5815,23 +5815,23 @@
         </p:nvSpPr>
         <p:spPr>
           <a:xfrm>
-            <a:off x="1152000" y="4651200"/>
-            <a:ext cx="10248120" cy="648000"/>
-          </a:xfrm>
-          <a:prstGeom prst="rect">
-            <a:avLst/>
-          </a:prstGeom>
-          <a:noFill/>
-        </p:spPr>
-        <p:txBody>
-          <a:bodyPr wrap="square" anchor="t" lIns="0" rIns="0" tIns="0" bIns="0">
-            <a:spAutoFit/>
-          </a:bodyPr>
-          <a:lstStyle/>
-          <a:p>
-            <a:pPr algn="l">
-              <a:lnSpc>
-                <a:spcPct val="140000"/>
+            <a:off x="1152000" y="5093999"/>
+            <a:ext cx="10248120" cy="684000"/>
+          </a:xfrm>
+          <a:prstGeom prst="rect">
+            <a:avLst/>
+          </a:prstGeom>
+          <a:noFill/>
+        </p:spPr>
+        <p:txBody>
+          <a:bodyPr wrap="square" anchor="t" lIns="0" rIns="0" tIns="0" bIns="0">
+            <a:spAutoFit/>
+          </a:bodyPr>
+          <a:lstStyle/>
+          <a:p>
+            <a:pPr algn="l">
+              <a:lnSpc>
+                <a:spcPct val="145000"/>
               </a:lnSpc>
               <a:spcAft>
                 <a:spcPts val="400"/>
@@ -10601,8 +10601,8 @@
         </p:nvSpPr>
         <p:spPr>
           <a:xfrm>
-            <a:off x="748800" y="1594800"/>
-            <a:ext cx="3840000" cy="3398400"/>
+            <a:off x="748800" y="1558800"/>
+            <a:ext cx="4533600" cy="4010400"/>
           </a:xfrm>
           <a:prstGeom prst="roundRect">
             <a:avLst>
@@ -10657,8 +10657,8 @@
         </p:blipFill>
         <p:spPr>
           <a:xfrm>
-            <a:off x="792000" y="1638000"/>
-            <a:ext cx="3753599" cy="3311999"/>
+            <a:off x="792000" y="1602000"/>
+            <a:ext cx="4447200" cy="3924000"/>
           </a:xfrm>
           <a:prstGeom prst="rect">
             <a:avLst/>
@@ -10673,8 +10673,8 @@
         </p:nvSpPr>
         <p:spPr>
           <a:xfrm>
-            <a:off x="4977599" y="1764000"/>
-            <a:ext cx="6422520" cy="3096000"/>
+            <a:off x="5671200" y="1764000"/>
+            <a:ext cx="5728919" cy="3096000"/>
           </a:xfrm>
           <a:prstGeom prst="rect">
             <a:avLst/>

--- a/LOLEX_포트폴리오.pptx
+++ b/LOLEX_포트폴리오.pptx
@@ -10797,6 +10797,81 @@
                 <a:latin typeface="맑은 고딕"/>
               </a:rPr>
               <a:t> 만 떨어졌습니다. 골드가 특별했던 게 아니라 다른 지표가 같은 정보를 들고 있던 것입니다.</a:t>
+            </a:r>
+          </a:p>
+          <a:p>
+            <a:pPr algn="l">
+              <a:lnSpc>
+                <a:spcPct val="132000"/>
+              </a:lnSpc>
+              <a:spcAft>
+                <a:spcPts val="700"/>
+              </a:spcAft>
+            </a:pPr>
+            <a:r>
+              <a:rPr sz="1200" b="0">
+                <a:solidFill>
+                  <a:srgbClr val="1A202C"/>
+                </a:solidFill>
+                <a:latin typeface="맑은 고딕"/>
+              </a:rPr>
+              <a:t/>
+            </a:r>
+          </a:p>
+          <a:p>
+            <a:pPr algn="l">
+              <a:lnSpc>
+                <a:spcPct val="132000"/>
+              </a:lnSpc>
+              <a:spcAft>
+                <a:spcPts val="700"/>
+              </a:spcAft>
+            </a:pPr>
+            <a:r>
+              <a:rPr sz="1300" b="1">
+                <a:solidFill>
+                  <a:srgbClr val="1A202C"/>
+                </a:solidFill>
+                <a:latin typeface="맑은 고딕"/>
+              </a:rPr>
+              <a:t>PCA 로도 재확인 — 정보는 사실상 축 하나</a:t>
+            </a:r>
+          </a:p>
+          <a:p>
+            <a:pPr algn="l">
+              <a:lnSpc>
+                <a:spcPct val="132000"/>
+              </a:lnSpc>
+              <a:spcAft>
+                <a:spcPts val="700"/>
+              </a:spcAft>
+            </a:pPr>
+            <a:r>
+              <a:rPr sz="1200" b="0">
+                <a:solidFill>
+                  <a:srgbClr val="667085"/>
+                </a:solidFill>
+                <a:latin typeface="맑은 고딕"/>
+              </a:rPr>
+              <a:t>첫 주성분이 분산의 39% 를 설명하고, </a:t>
+            </a:r>
+            <a:r>
+              <a:rPr sz="1200" b="1">
+                <a:solidFill>
+                  <a:srgbClr val="1A202C"/>
+                </a:solidFill>
+                <a:latin typeface="맑은 고딕"/>
+              </a:rPr>
+              <a:t>주성분 1개만 써도 0.7282</a:t>
+            </a:r>
+            <a:r>
+              <a:rPr sz="1200" b="0">
+                <a:solidFill>
+                  <a:srgbClr val="667085"/>
+                </a:solidFill>
+                <a:latin typeface="맑은 고딕"/>
+              </a:rPr>
+              <a:t> 가 나옵니다. 그래도 13개를 유지한 이유 — PC1 로는 "골드가 1위" 같은 이유를 말할 수 없기 때문입니다.</a:t>
             </a:r>
           </a:p>
           <a:p>

--- a/LOLEX_포트폴리오.pptx
+++ b/LOLEX_포트폴리오.pptx
@@ -3196,6 +3196,90 @@
         </p:nvSpPr>
         <p:spPr>
           <a:xfrm>
+            <a:off x="7020000" y="1224000"/>
+            <a:ext cx="5040000" cy="2160000"/>
+          </a:xfrm>
+          <a:prstGeom prst="rect">
+            <a:avLst/>
+          </a:prstGeom>
+          <a:noFill/>
+        </p:spPr>
+        <p:txBody>
+          <a:bodyPr wrap="square" anchor="t" lIns="0" rIns="0" tIns="0" bIns="0">
+            <a:spAutoFit/>
+          </a:bodyPr>
+          <a:lstStyle/>
+          <a:p>
+            <a:pPr algn="r">
+              <a:lnSpc>
+                <a:spcPct val="118000"/>
+              </a:lnSpc>
+              <a:spcAft>
+                <a:spcPts val="400"/>
+              </a:spcAft>
+            </a:pPr>
+            <a:r>
+              <a:rPr sz="11000" b="1">
+                <a:solidFill>
+                  <a:srgbClr val="F0F3F9"/>
+                </a:solidFill>
+                <a:latin typeface="맑은 고딕"/>
+              </a:rPr>
+              <a:t>10:00</a:t>
+            </a:r>
+          </a:p>
+        </p:txBody>
+      </p:sp>
+      <p:sp>
+        <p:nvSpPr>
+          <p:cNvPr id="5" name="TextBox 4"/>
+          <p:cNvSpPr txBox="1"/>
+          <p:nvPr/>
+        </p:nvSpPr>
+        <p:spPr>
+          <a:xfrm>
+            <a:off x="7020000" y="3311999"/>
+            <a:ext cx="4824000" cy="288000"/>
+          </a:xfrm>
+          <a:prstGeom prst="rect">
+            <a:avLst/>
+          </a:prstGeom>
+          <a:noFill/>
+        </p:spPr>
+        <p:txBody>
+          <a:bodyPr wrap="square" anchor="t" lIns="0" rIns="0" tIns="0" bIns="0">
+            <a:spAutoFit/>
+          </a:bodyPr>
+          <a:lstStyle/>
+          <a:p>
+            <a:pPr algn="r">
+              <a:lnSpc>
+                <a:spcPct val="118000"/>
+              </a:lnSpc>
+              <a:spcAft>
+                <a:spcPts val="400"/>
+              </a:spcAft>
+            </a:pPr>
+            <a:r>
+              <a:rPr sz="1050" b="0">
+                <a:solidFill>
+                  <a:srgbClr val="D5DBE6"/>
+                </a:solidFill>
+                <a:latin typeface="맑은 고딕"/>
+              </a:rPr>
+              <a:t>판정 시점 — 게임 시작 10분</a:t>
+            </a:r>
+          </a:p>
+        </p:txBody>
+      </p:sp>
+      <p:sp>
+        <p:nvSpPr>
+          <p:cNvPr id="6" name="TextBox 5"/>
+          <p:cNvSpPr txBox="1"/>
+          <p:nvPr/>
+        </p:nvSpPr>
+        <p:spPr>
+          <a:xfrm>
             <a:off x="792000" y="1440000"/>
             <a:ext cx="7200000" cy="360000"/>
           </a:xfrm>
@@ -3232,7 +3316,7 @@
       </p:sp>
       <p:sp>
         <p:nvSpPr>
-          <p:cNvPr id="5" name="TextBox 4"/>
+          <p:cNvPr id="7" name="TextBox 6"/>
           <p:cNvSpPr txBox="1"/>
           <p:nvPr/>
         </p:nvSpPr>
@@ -3275,7 +3359,7 @@
       </p:sp>
       <p:sp>
         <p:nvSpPr>
-          <p:cNvPr id="6" name="TextBox 5"/>
+          <p:cNvPr id="8" name="TextBox 7"/>
           <p:cNvSpPr txBox="1"/>
           <p:nvPr/>
         </p:nvSpPr>
@@ -3354,7 +3438,7 @@
       </p:sp>
       <p:sp>
         <p:nvSpPr>
-          <p:cNvPr id="7" name="TextBox 6"/>
+          <p:cNvPr id="9" name="TextBox 8"/>
           <p:cNvSpPr txBox="1"/>
           <p:nvPr/>
         </p:nvSpPr>
@@ -3396,7 +3480,7 @@
       </p:sp>
       <p:sp>
         <p:nvSpPr>
-          <p:cNvPr id="8" name="Rectangle 7"/>
+          <p:cNvPr id="10" name="Rectangle 9"/>
           <p:cNvSpPr/>
           <p:nvPr/>
         </p:nvSpPr>
@@ -3440,7 +3524,7 @@
       </p:sp>
       <p:sp>
         <p:nvSpPr>
-          <p:cNvPr id="9" name="TextBox 8"/>
+          <p:cNvPr id="11" name="TextBox 10"/>
           <p:cNvSpPr txBox="1"/>
           <p:nvPr/>
         </p:nvSpPr>
@@ -3660,7 +3744,7 @@
               </a:spcAft>
             </a:pPr>
             <a:r>
-              <a:rPr sz="2150" b="1">
+              <a:rPr sz="2200" b="1">
                 <a:solidFill>
                   <a:srgbClr val="1A202C"/>
                 </a:solidFill>
@@ -3679,7 +3763,7 @@
         </p:nvSpPr>
         <p:spPr>
           <a:xfrm>
-            <a:off x="8304120" y="871200"/>
+            <a:off x="8304120" y="943200"/>
             <a:ext cx="3096000" cy="432000"/>
           </a:xfrm>
           <a:prstGeom prst="rect">
@@ -4179,7 +4263,7 @@
               </a:spcAft>
             </a:pPr>
             <a:r>
-              <a:rPr sz="2150" b="1">
+              <a:rPr sz="2200" b="1">
                 <a:solidFill>
                   <a:srgbClr val="1A202C"/>
                 </a:solidFill>
@@ -4198,7 +4282,7 @@
         </p:nvSpPr>
         <p:spPr>
           <a:xfrm>
-            <a:off x="8304120" y="871200"/>
+            <a:off x="8304120" y="943200"/>
             <a:ext cx="3096000" cy="432000"/>
           </a:xfrm>
           <a:prstGeom prst="rect">
@@ -5370,7 +5454,7 @@
               </a:spcAft>
             </a:pPr>
             <a:r>
-              <a:rPr sz="2150" b="1">
+              <a:rPr sz="2200" b="1">
                 <a:solidFill>
                   <a:srgbClr val="1A202C"/>
                 </a:solidFill>
@@ -5575,14 +5659,14 @@
           <a:p>
             <a:pPr algn="l">
               <a:lnSpc>
-                <a:spcPct val="145000"/>
+                <a:spcPct val="142500"/>
               </a:lnSpc>
               <a:spcAft>
                 <a:spcPts val="400"/>
               </a:spcAft>
             </a:pPr>
             <a:r>
-              <a:rPr sz="1180" b="0">
+              <a:rPr sz="1200" b="0">
                 <a:solidFill>
                   <a:srgbClr val="667085"/>
                 </a:solidFill>
@@ -5703,14 +5787,14 @@
           <a:p>
             <a:pPr algn="l">
               <a:lnSpc>
-                <a:spcPct val="145000"/>
+                <a:spcPct val="142500"/>
               </a:lnSpc>
               <a:spcAft>
                 <a:spcPts val="400"/>
               </a:spcAft>
             </a:pPr>
             <a:r>
-              <a:rPr sz="1180" b="0">
+              <a:rPr sz="1200" b="0">
                 <a:solidFill>
                   <a:srgbClr val="667085"/>
                 </a:solidFill>
@@ -5831,14 +5915,14 @@
           <a:p>
             <a:pPr algn="l">
               <a:lnSpc>
-                <a:spcPct val="145000"/>
+                <a:spcPct val="142500"/>
               </a:lnSpc>
               <a:spcAft>
                 <a:spcPts val="400"/>
               </a:spcAft>
             </a:pPr>
             <a:r>
-              <a:rPr sz="1180" b="0">
+              <a:rPr sz="1200" b="0">
                 <a:solidFill>
                   <a:srgbClr val="667085"/>
                 </a:solidFill>
@@ -6661,7 +6745,7 @@
               </a:spcAft>
             </a:pPr>
             <a:r>
-              <a:rPr sz="2150" b="1">
+              <a:rPr sz="2200" b="1">
                 <a:solidFill>
                   <a:srgbClr val="1A202C"/>
                 </a:solidFill>
@@ -6875,7 +6959,7 @@
               </a:spcAft>
             </a:pPr>
             <a:r>
-              <a:rPr sz="2500" b="1">
+              <a:rPr sz="2700" b="1">
                 <a:solidFill>
                   <a:srgbClr val="1A202C"/>
                 </a:solidFill>
@@ -7048,7 +7132,7 @@
               </a:spcAft>
             </a:pPr>
             <a:r>
-              <a:rPr sz="2500" b="1">
+              <a:rPr sz="2700" b="1">
                 <a:solidFill>
                   <a:srgbClr val="D64550"/>
                 </a:solidFill>
@@ -7221,7 +7305,7 @@
               </a:spcAft>
             </a:pPr>
             <a:r>
-              <a:rPr sz="2500" b="1">
+              <a:rPr sz="2700" b="1">
                 <a:solidFill>
                   <a:srgbClr val="1A202C"/>
                 </a:solidFill>
@@ -7394,7 +7478,7 @@
               </a:spcAft>
             </a:pPr>
             <a:r>
-              <a:rPr sz="2500" b="1">
+              <a:rPr sz="2700" b="1">
                 <a:solidFill>
                   <a:srgbClr val="1A202C"/>
                 </a:solidFill>
@@ -7709,7 +7793,7 @@
               </a:spcAft>
             </a:pPr>
             <a:r>
-              <a:rPr sz="2150" b="1">
+              <a:rPr sz="2200" b="1">
                 <a:solidFill>
                   <a:srgbClr val="1A202C"/>
                 </a:solidFill>
@@ -8970,7 +9054,7 @@
               </a:spcAft>
             </a:pPr>
             <a:r>
-              <a:rPr sz="2150" b="1">
+              <a:rPr sz="2200" b="1">
                 <a:solidFill>
                   <a:srgbClr val="1A202C"/>
                 </a:solidFill>
@@ -8989,7 +9073,7 @@
         </p:nvSpPr>
         <p:spPr>
           <a:xfrm>
-            <a:off x="8304120" y="871200"/>
+            <a:off x="8304120" y="943200"/>
             <a:ext cx="3096000" cy="432000"/>
           </a:xfrm>
           <a:prstGeom prst="rect">
@@ -9116,7 +9200,7 @@
         <p:spPr>
           <a:xfrm>
             <a:off x="748800" y="1648800"/>
-            <a:ext cx="5918399" cy="3628841"/>
+            <a:ext cx="6422400" cy="3934977"/>
           </a:xfrm>
           <a:prstGeom prst="roundRect">
             <a:avLst>
@@ -9172,7 +9256,7 @@
         <p:spPr>
           <a:xfrm>
             <a:off x="792000" y="1692000"/>
-            <a:ext cx="5832000" cy="3542441"/>
+            <a:ext cx="6336000" cy="3848577"/>
           </a:xfrm>
           <a:prstGeom prst="rect">
             <a:avLst/>
@@ -9187,23 +9271,23 @@
         </p:nvSpPr>
         <p:spPr>
           <a:xfrm>
-            <a:off x="7020000" y="1764000"/>
-            <a:ext cx="4380119" cy="2880000"/>
-          </a:xfrm>
-          <a:prstGeom prst="rect">
-            <a:avLst/>
-          </a:prstGeom>
-          <a:noFill/>
-        </p:spPr>
-        <p:txBody>
-          <a:bodyPr wrap="square" anchor="t" lIns="0" rIns="0" tIns="0" bIns="0">
-            <a:spAutoFit/>
-          </a:bodyPr>
-          <a:lstStyle/>
-          <a:p>
-            <a:pPr algn="l">
-              <a:lnSpc>
-                <a:spcPct val="132000"/>
+            <a:off x="7523999" y="1764000"/>
+            <a:ext cx="3876120" cy="2880000"/>
+          </a:xfrm>
+          <a:prstGeom prst="rect">
+            <a:avLst/>
+          </a:prstGeom>
+          <a:noFill/>
+        </p:spPr>
+        <p:txBody>
+          <a:bodyPr wrap="square" anchor="t" lIns="0" rIns="0" tIns="0" bIns="0">
+            <a:spAutoFit/>
+          </a:bodyPr>
+          <a:lstStyle/>
+          <a:p>
+            <a:pPr algn="l">
+              <a:lnSpc>
+                <a:spcPct val="138000"/>
               </a:lnSpc>
               <a:spcAft>
                 <a:spcPts val="700"/>
@@ -9222,7 +9306,7 @@
           <a:p>
             <a:pPr algn="l">
               <a:lnSpc>
-                <a:spcPct val="132000"/>
+                <a:spcPct val="138000"/>
               </a:lnSpc>
               <a:spcAft>
                 <a:spcPts val="700"/>
@@ -9250,7 +9334,7 @@
           <a:p>
             <a:pPr algn="l">
               <a:lnSpc>
-                <a:spcPct val="132000"/>
+                <a:spcPct val="138000"/>
               </a:lnSpc>
               <a:spcAft>
                 <a:spcPts val="700"/>
@@ -9278,7 +9362,7 @@
           <a:p>
             <a:pPr algn="l">
               <a:lnSpc>
-                <a:spcPct val="132000"/>
+                <a:spcPct val="138000"/>
               </a:lnSpc>
               <a:spcAft>
                 <a:spcPts val="700"/>
@@ -9297,7 +9381,7 @@
           <a:p>
             <a:pPr algn="l">
               <a:lnSpc>
-                <a:spcPct val="132000"/>
+                <a:spcPct val="138000"/>
               </a:lnSpc>
               <a:spcAft>
                 <a:spcPts val="700"/>
@@ -9459,7 +9543,7 @@
               </a:spcAft>
             </a:pPr>
             <a:r>
-              <a:rPr sz="2150" b="1">
+              <a:rPr sz="2200" b="1">
                 <a:solidFill>
                   <a:srgbClr val="1A202C"/>
                 </a:solidFill>
@@ -9478,7 +9562,7 @@
         </p:nvSpPr>
         <p:spPr>
           <a:xfrm>
-            <a:off x="8304120" y="871200"/>
+            <a:off x="8304120" y="943200"/>
             <a:ext cx="3096000" cy="432000"/>
           </a:xfrm>
           <a:prstGeom prst="rect">
@@ -9692,7 +9776,7 @@
           <a:p>
             <a:pPr algn="l">
               <a:lnSpc>
-                <a:spcPct val="132000"/>
+                <a:spcPct val="138000"/>
               </a:lnSpc>
               <a:spcAft>
                 <a:spcPts val="700"/>
@@ -9711,7 +9795,7 @@
           <a:p>
             <a:pPr algn="l">
               <a:lnSpc>
-                <a:spcPct val="132000"/>
+                <a:spcPct val="138000"/>
               </a:lnSpc>
               <a:spcAft>
                 <a:spcPts val="700"/>
@@ -9766,7 +9850,7 @@
           <a:p>
             <a:pPr algn="l">
               <a:lnSpc>
-                <a:spcPct val="132000"/>
+                <a:spcPct val="138000"/>
               </a:lnSpc>
               <a:spcAft>
                 <a:spcPts val="700"/>
@@ -9785,7 +9869,7 @@
           <a:p>
             <a:pPr algn="l">
               <a:lnSpc>
-                <a:spcPct val="132000"/>
+                <a:spcPct val="138000"/>
               </a:lnSpc>
               <a:spcAft>
                 <a:spcPts val="700"/>
@@ -9804,7 +9888,7 @@
           <a:p>
             <a:pPr algn="l">
               <a:lnSpc>
-                <a:spcPct val="132000"/>
+                <a:spcPct val="138000"/>
               </a:lnSpc>
               <a:spcAft>
                 <a:spcPts val="700"/>
@@ -9957,7 +10041,7 @@
               </a:spcAft>
             </a:pPr>
             <a:r>
-              <a:rPr sz="2150" b="1">
+              <a:rPr sz="2200" b="1">
                 <a:solidFill>
                   <a:srgbClr val="1A202C"/>
                 </a:solidFill>
@@ -9976,7 +10060,7 @@
         </p:nvSpPr>
         <p:spPr>
           <a:xfrm>
-            <a:off x="8304120" y="871200"/>
+            <a:off x="8304120" y="943200"/>
             <a:ext cx="3096000" cy="432000"/>
           </a:xfrm>
           <a:prstGeom prst="rect">
@@ -10190,7 +10274,7 @@
           <a:p>
             <a:pPr algn="l">
               <a:lnSpc>
-                <a:spcPct val="132000"/>
+                <a:spcPct val="138000"/>
               </a:lnSpc>
               <a:spcAft>
                 <a:spcPts val="700"/>
@@ -10209,7 +10293,7 @@
           <a:p>
             <a:pPr algn="l">
               <a:lnSpc>
-                <a:spcPct val="132000"/>
+                <a:spcPct val="138000"/>
               </a:lnSpc>
               <a:spcAft>
                 <a:spcPts val="700"/>
@@ -10228,7 +10312,7 @@
           <a:p>
             <a:pPr algn="l">
               <a:lnSpc>
-                <a:spcPct val="132000"/>
+                <a:spcPct val="138000"/>
               </a:lnSpc>
               <a:spcAft>
                 <a:spcPts val="700"/>
@@ -10265,7 +10349,7 @@
           <a:p>
             <a:pPr algn="l">
               <a:lnSpc>
-                <a:spcPct val="132000"/>
+                <a:spcPct val="138000"/>
               </a:lnSpc>
               <a:spcAft>
                 <a:spcPts val="700"/>
@@ -10284,7 +10368,7 @@
           <a:p>
             <a:pPr algn="l">
               <a:lnSpc>
-                <a:spcPct val="132000"/>
+                <a:spcPct val="138000"/>
               </a:lnSpc>
               <a:spcAft>
                 <a:spcPts val="700"/>
@@ -10303,7 +10387,7 @@
           <a:p>
             <a:pPr algn="l">
               <a:lnSpc>
-                <a:spcPct val="132000"/>
+                <a:spcPct val="138000"/>
               </a:lnSpc>
               <a:spcAft>
                 <a:spcPts val="700"/>
@@ -10456,7 +10540,7 @@
               </a:spcAft>
             </a:pPr>
             <a:r>
-              <a:rPr sz="2150" b="1">
+              <a:rPr sz="2200" b="1">
                 <a:solidFill>
                   <a:srgbClr val="1A202C"/>
                 </a:solidFill>
@@ -10475,7 +10559,7 @@
         </p:nvSpPr>
         <p:spPr>
           <a:xfrm>
-            <a:off x="8304120" y="871200"/>
+            <a:off x="8304120" y="943200"/>
             <a:ext cx="3096000" cy="432000"/>
           </a:xfrm>
           <a:prstGeom prst="rect">
@@ -10689,7 +10773,7 @@
           <a:p>
             <a:pPr algn="l">
               <a:lnSpc>
-                <a:spcPct val="132000"/>
+                <a:spcPct val="138000"/>
               </a:lnSpc>
               <a:spcAft>
                 <a:spcPts val="700"/>
@@ -10708,7 +10792,7 @@
           <a:p>
             <a:pPr algn="l">
               <a:lnSpc>
-                <a:spcPct val="132000"/>
+                <a:spcPct val="138000"/>
               </a:lnSpc>
               <a:spcAft>
                 <a:spcPts val="700"/>
@@ -10727,7 +10811,7 @@
           <a:p>
             <a:pPr algn="l">
               <a:lnSpc>
-                <a:spcPct val="132000"/>
+                <a:spcPct val="138000"/>
               </a:lnSpc>
               <a:spcAft>
                 <a:spcPts val="700"/>
@@ -10746,7 +10830,7 @@
           <a:p>
             <a:pPr algn="l">
               <a:lnSpc>
-                <a:spcPct val="132000"/>
+                <a:spcPct val="138000"/>
               </a:lnSpc>
               <a:spcAft>
                 <a:spcPts val="700"/>
@@ -10765,7 +10849,7 @@
           <a:p>
             <a:pPr algn="l">
               <a:lnSpc>
-                <a:spcPct val="132000"/>
+                <a:spcPct val="138000"/>
               </a:lnSpc>
               <a:spcAft>
                 <a:spcPts val="700"/>
@@ -10802,7 +10886,7 @@
           <a:p>
             <a:pPr algn="l">
               <a:lnSpc>
-                <a:spcPct val="132000"/>
+                <a:spcPct val="138000"/>
               </a:lnSpc>
               <a:spcAft>
                 <a:spcPts val="700"/>
@@ -10821,7 +10905,7 @@
           <a:p>
             <a:pPr algn="l">
               <a:lnSpc>
-                <a:spcPct val="132000"/>
+                <a:spcPct val="138000"/>
               </a:lnSpc>
               <a:spcAft>
                 <a:spcPts val="700"/>
@@ -10840,7 +10924,7 @@
           <a:p>
             <a:pPr algn="l">
               <a:lnSpc>
-                <a:spcPct val="132000"/>
+                <a:spcPct val="138000"/>
               </a:lnSpc>
               <a:spcAft>
                 <a:spcPts val="700"/>
@@ -10877,7 +10961,7 @@
           <a:p>
             <a:pPr algn="l">
               <a:lnSpc>
-                <a:spcPct val="132000"/>
+                <a:spcPct val="138000"/>
               </a:lnSpc>
               <a:spcAft>
                 <a:spcPts val="700"/>
@@ -11030,7 +11114,7 @@
               </a:spcAft>
             </a:pPr>
             <a:r>
-              <a:rPr sz="2150" b="1">
+              <a:rPr sz="2200" b="1">
                 <a:solidFill>
                   <a:srgbClr val="1A202C"/>
                 </a:solidFill>
@@ -11049,7 +11133,7 @@
         </p:nvSpPr>
         <p:spPr>
           <a:xfrm>
-            <a:off x="8304120" y="871200"/>
+            <a:off x="8304120" y="943200"/>
             <a:ext cx="3096000" cy="432000"/>
           </a:xfrm>
           <a:prstGeom prst="rect">
@@ -11263,7 +11347,7 @@
           <a:p>
             <a:pPr algn="l">
               <a:lnSpc>
-                <a:spcPct val="132000"/>
+                <a:spcPct val="138000"/>
               </a:lnSpc>
               <a:spcAft>
                 <a:spcPts val="700"/>
@@ -11282,7 +11366,7 @@
           <a:p>
             <a:pPr algn="l">
               <a:lnSpc>
-                <a:spcPct val="132000"/>
+                <a:spcPct val="138000"/>
               </a:lnSpc>
               <a:spcAft>
                 <a:spcPts val="700"/>
@@ -11337,7 +11421,7 @@
           <a:p>
             <a:pPr algn="l">
               <a:lnSpc>
-                <a:spcPct val="132000"/>
+                <a:spcPct val="138000"/>
               </a:lnSpc>
               <a:spcAft>
                 <a:spcPts val="700"/>
@@ -11356,7 +11440,7 @@
           <a:p>
             <a:pPr algn="l">
               <a:lnSpc>
-                <a:spcPct val="132000"/>
+                <a:spcPct val="138000"/>
               </a:lnSpc>
               <a:spcAft>
                 <a:spcPts val="700"/>
@@ -11375,7 +11459,7 @@
           <a:p>
             <a:pPr algn="l">
               <a:lnSpc>
-                <a:spcPct val="132000"/>
+                <a:spcPct val="138000"/>
               </a:lnSpc>
               <a:spcAft>
                 <a:spcPts val="700"/>
@@ -11394,7 +11478,7 @@
           <a:p>
             <a:pPr algn="l">
               <a:lnSpc>
-                <a:spcPct val="132000"/>
+                <a:spcPct val="138000"/>
               </a:lnSpc>
               <a:spcAft>
                 <a:spcPts val="700"/>
@@ -11547,7 +11631,7 @@
               </a:spcAft>
             </a:pPr>
             <a:r>
-              <a:rPr sz="2150" b="1">
+              <a:rPr sz="2200" b="1">
                 <a:solidFill>
                   <a:srgbClr val="1A202C"/>
                 </a:solidFill>
@@ -11566,7 +11650,7 @@
         </p:nvSpPr>
         <p:spPr>
           <a:xfrm>
-            <a:off x="8304120" y="871200"/>
+            <a:off x="8304120" y="943200"/>
             <a:ext cx="3096000" cy="432000"/>
           </a:xfrm>
           <a:prstGeom prst="rect">
@@ -11780,7 +11864,7 @@
           <a:p>
             <a:pPr algn="l">
               <a:lnSpc>
-                <a:spcPct val="132000"/>
+                <a:spcPct val="138000"/>
               </a:lnSpc>
               <a:spcAft>
                 <a:spcPts val="700"/>
@@ -11799,7 +11883,7 @@
           <a:p>
             <a:pPr algn="l">
               <a:lnSpc>
-                <a:spcPct val="132000"/>
+                <a:spcPct val="138000"/>
               </a:lnSpc>
               <a:spcAft>
                 <a:spcPts val="700"/>
@@ -11836,7 +11920,7 @@
           <a:p>
             <a:pPr algn="l">
               <a:lnSpc>
-                <a:spcPct val="132000"/>
+                <a:spcPct val="138000"/>
               </a:lnSpc>
               <a:spcAft>
                 <a:spcPts val="700"/>
@@ -11855,7 +11939,7 @@
           <a:p>
             <a:pPr algn="l">
               <a:lnSpc>
-                <a:spcPct val="132000"/>
+                <a:spcPct val="138000"/>
               </a:lnSpc>
               <a:spcAft>
                 <a:spcPts val="700"/>

--- a/LOLEX_포트폴리오.pptx
+++ b/LOLEX_포트폴리오.pptx
@@ -15,6 +15,7 @@
     <p:sldId id="263" r:id="rId14"/>
     <p:sldId id="264" r:id="rId15"/>
     <p:sldId id="265" r:id="rId16"/>
+    <p:sldId id="266" r:id="rId17"/>
   </p:sldIdLst>
   <p:sldSz cx="12192119" cy="6858000" type="screen4x3"/>
   <p:notesSz cx="6858000" cy="9144000"/>
@@ -3803,7 +3804,7 @@
                 </a:solidFill>
                 <a:latin typeface="맑은 고딕"/>
               </a:rPr>
-              <a:t>github.com/wpalswpa/project2608</a:t>
+              <a:t>github.com/wpalswpa/lol-win-prediction</a:t>
             </a:r>
             <a:r>
               <a:rPr sz="1050" b="0">
@@ -3870,8 +3871,8 @@
         </p:nvSpPr>
         <p:spPr>
           <a:xfrm>
-            <a:off x="0" y="0"/>
-            <a:ext cx="125999" cy="6858000"/>
+            <a:off x="792000" y="737999"/>
+            <a:ext cx="306000" cy="32400"/>
           </a:xfrm>
           <a:prstGeom prst="rect">
             <a:avLst/>
@@ -3915,7 +3916,7 @@
         <p:spPr>
           <a:xfrm>
             <a:off x="792000" y="413999"/>
-            <a:ext cx="7200000" cy="216000"/>
+            <a:ext cx="10608120" cy="216000"/>
           </a:xfrm>
           <a:prstGeom prst="rect">
             <a:avLst/>
@@ -3943,21 +3944,699 @@
                 </a:solidFill>
                 <a:latin typeface="맑은 고딕"/>
               </a:rPr>
-              <a:t>RETROSPECTIVE</a:t>
-            </a:r>
-          </a:p>
-        </p:txBody>
-      </p:sp>
-      <p:sp>
-        <p:nvSpPr>
-          <p:cNvPr id="4" name="Rectangle 3"/>
+              <a:t>SERVICE</a:t>
+            </a:r>
+          </a:p>
+        </p:txBody>
+      </p:sp>
+      <p:sp>
+        <p:nvSpPr>
+          <p:cNvPr id="4" name="TextBox 3"/>
+          <p:cNvSpPr txBox="1"/>
+          <p:nvPr/>
+        </p:nvSpPr>
+        <p:spPr>
+          <a:xfrm>
+            <a:off x="792000" y="846000"/>
+            <a:ext cx="7728120" cy="503999"/>
+          </a:xfrm>
+          <a:prstGeom prst="rect">
+            <a:avLst/>
+          </a:prstGeom>
+          <a:noFill/>
+        </p:spPr>
+        <p:txBody>
+          <a:bodyPr wrap="square" anchor="t" lIns="0" rIns="0" tIns="0" bIns="0">
+            <a:spAutoFit/>
+          </a:bodyPr>
+          <a:lstStyle/>
+          <a:p>
+            <a:pPr algn="l">
+              <a:lnSpc>
+                <a:spcPct val="120000"/>
+              </a:lnSpc>
+              <a:spcAft>
+                <a:spcPts val="400"/>
+              </a:spcAft>
+            </a:pPr>
+            <a:r>
+              <a:rPr sz="2200" b="1">
+                <a:solidFill>
+                  <a:srgbClr val="1A202C"/>
+                </a:solidFill>
+                <a:latin typeface="맑은 고딕"/>
+              </a:rPr>
+              <a:t>모델이 화면이 되기까지 — p4.sumzip.com</a:t>
+            </a:r>
+          </a:p>
+        </p:txBody>
+      </p:sp>
+      <p:sp>
+        <p:nvSpPr>
+          <p:cNvPr id="5" name="TextBox 4"/>
+          <p:cNvSpPr txBox="1"/>
+          <p:nvPr/>
+        </p:nvSpPr>
+        <p:spPr>
+          <a:xfrm>
+            <a:off x="8160119" y="943200"/>
+            <a:ext cx="3240000" cy="432000"/>
+          </a:xfrm>
+          <a:prstGeom prst="rect">
+            <a:avLst/>
+          </a:prstGeom>
+          <a:noFill/>
+        </p:spPr>
+        <p:txBody>
+          <a:bodyPr wrap="square" anchor="t" lIns="0" rIns="0" tIns="0" bIns="0">
+            <a:spAutoFit/>
+          </a:bodyPr>
+          <a:lstStyle/>
+          <a:p>
+            <a:pPr algn="r">
+              <a:lnSpc>
+                <a:spcPct val="120000"/>
+              </a:lnSpc>
+              <a:spcAft>
+                <a:spcPts val="400"/>
+              </a:spcAft>
+            </a:pPr>
+            <a:r>
+              <a:rPr sz="1000" b="0">
+                <a:solidFill>
+                  <a:srgbClr val="98A2B3"/>
+                </a:solidFill>
+                <a:latin typeface="맑은 고딕"/>
+              </a:rPr>
+              <a:t>탭 4개 · 운영 중</a:t>
+            </a:r>
+          </a:p>
+        </p:txBody>
+      </p:sp>
+      <p:sp>
+        <p:nvSpPr>
+          <p:cNvPr id="6" name="TextBox 5"/>
+          <p:cNvSpPr txBox="1"/>
+          <p:nvPr/>
+        </p:nvSpPr>
+        <p:spPr>
+          <a:xfrm>
+            <a:off x="792000" y="6480000"/>
+            <a:ext cx="5040000" cy="180000"/>
+          </a:xfrm>
+          <a:prstGeom prst="rect">
+            <a:avLst/>
+          </a:prstGeom>
+          <a:noFill/>
+        </p:spPr>
+        <p:txBody>
+          <a:bodyPr wrap="square" anchor="t" lIns="0" rIns="0" tIns="0" bIns="0">
+            <a:spAutoFit/>
+          </a:bodyPr>
+          <a:lstStyle/>
+          <a:p>
+            <a:pPr algn="l">
+              <a:lnSpc>
+                <a:spcPct val="120000"/>
+              </a:lnSpc>
+              <a:spcAft>
+                <a:spcPts val="400"/>
+              </a:spcAft>
+            </a:pPr>
+            <a:r>
+              <a:rPr sz="850" b="0">
+                <a:solidFill>
+                  <a:srgbClr val="98A2B3"/>
+                </a:solidFill>
+                <a:latin typeface="맑은 고딕"/>
+              </a:rPr>
+              <a:t>LOL.EX — LoL 10분 승패 판정 · 이제민 포트폴리오</a:t>
+            </a:r>
+          </a:p>
+        </p:txBody>
+      </p:sp>
+      <p:sp>
+        <p:nvSpPr>
+          <p:cNvPr id="7" name="TextBox 6"/>
+          <p:cNvSpPr txBox="1"/>
+          <p:nvPr/>
+        </p:nvSpPr>
+        <p:spPr>
+          <a:xfrm>
+            <a:off x="10680120" y="6480000"/>
+            <a:ext cx="720000" cy="180000"/>
+          </a:xfrm>
+          <a:prstGeom prst="rect">
+            <a:avLst/>
+          </a:prstGeom>
+          <a:noFill/>
+        </p:spPr>
+        <p:txBody>
+          <a:bodyPr wrap="square" anchor="t" lIns="0" rIns="0" tIns="0" bIns="0">
+            <a:spAutoFit/>
+          </a:bodyPr>
+          <a:lstStyle/>
+          <a:p>
+            <a:pPr algn="r">
+              <a:lnSpc>
+                <a:spcPct val="120000"/>
+              </a:lnSpc>
+              <a:spcAft>
+                <a:spcPts val="400"/>
+              </a:spcAft>
+            </a:pPr>
+            <a:r>
+              <a:rPr sz="850" b="0">
+                <a:solidFill>
+                  <a:srgbClr val="98A2B3"/>
+                </a:solidFill>
+                <a:latin typeface="맑은 고딕"/>
+              </a:rPr>
+              <a:t>10</a:t>
+            </a:r>
+          </a:p>
+        </p:txBody>
+      </p:sp>
+      <p:sp>
+        <p:nvSpPr>
+          <p:cNvPr id="8" name="Rounded Rectangle 7"/>
           <p:cNvSpPr/>
           <p:nvPr/>
         </p:nvSpPr>
         <p:spPr>
           <a:xfrm>
-            <a:off x="792000" y="737999"/>
-            <a:ext cx="306000" cy="32400"/>
+            <a:off x="748800" y="1558800"/>
+            <a:ext cx="6274246" cy="4010400"/>
+          </a:xfrm>
+          <a:prstGeom prst="roundRect">
+            <a:avLst>
+              <a:gd name="adj" fmla="val 4500"/>
+            </a:avLst>
+          </a:prstGeom>
+          <a:solidFill>
+            <a:srgbClr val="FFFFFF"/>
+          </a:solidFill>
+          <a:ln w="9525">
+            <a:solidFill>
+              <a:srgbClr val="E4E8EF"/>
+            </a:solidFill>
+          </a:ln>
+          <a:effectLst/>
+        </p:spPr>
+        <p:style>
+          <a:lnRef idx="1">
+            <a:schemeClr val="accent1"/>
+          </a:lnRef>
+          <a:fillRef idx="3">
+            <a:schemeClr val="accent1"/>
+          </a:fillRef>
+          <a:effectRef idx="2">
+            <a:schemeClr val="accent1"/>
+          </a:effectRef>
+          <a:fontRef idx="minor">
+            <a:schemeClr val="lt1"/>
+          </a:fontRef>
+        </p:style>
+        <p:txBody>
+          <a:bodyPr rtlCol="0" anchor="ctr"/>
+          <a:lstStyle/>
+          <a:p>
+            <a:pPr algn="ctr"/>
+          </a:p>
+        </p:txBody>
+      </p:sp>
+      <p:pic>
+        <p:nvPicPr>
+          <p:cNvPr id="9" name="Picture 8" descr="svc_shot.png"/>
+          <p:cNvPicPr>
+            <a:picLocks noChangeAspect="1"/>
+          </p:cNvPicPr>
+          <p:nvPr/>
+        </p:nvPicPr>
+        <p:blipFill>
+          <a:blip r:embed="rId2"/>
+          <a:stretch>
+            <a:fillRect/>
+          </a:stretch>
+        </p:blipFill>
+        <p:spPr>
+          <a:xfrm>
+            <a:off x="792000" y="1602000"/>
+            <a:ext cx="6187846" cy="3924000"/>
+          </a:xfrm>
+          <a:prstGeom prst="rect">
+            <a:avLst/>
+          </a:prstGeom>
+        </p:spPr>
+      </p:pic>
+      <p:sp>
+        <p:nvSpPr>
+          <p:cNvPr id="10" name="TextBox 9"/>
+          <p:cNvSpPr txBox="1"/>
+          <p:nvPr/>
+        </p:nvSpPr>
+        <p:spPr>
+          <a:xfrm>
+            <a:off x="7375846" y="1692000"/>
+            <a:ext cx="4024273" cy="198000"/>
+          </a:xfrm>
+          <a:prstGeom prst="rect">
+            <a:avLst/>
+          </a:prstGeom>
+          <a:noFill/>
+        </p:spPr>
+        <p:txBody>
+          <a:bodyPr wrap="square" anchor="t" lIns="0" rIns="0" tIns="0" bIns="0">
+            <a:spAutoFit/>
+          </a:bodyPr>
+          <a:lstStyle/>
+          <a:p>
+            <a:pPr algn="l">
+              <a:lnSpc>
+                <a:spcPct val="120000"/>
+              </a:lnSpc>
+              <a:spcAft>
+                <a:spcPts val="400"/>
+              </a:spcAft>
+            </a:pPr>
+            <a:r>
+              <a:rPr sz="1150" b="1">
+                <a:solidFill>
+                  <a:srgbClr val="1A202C"/>
+                </a:solidFill>
+                <a:latin typeface="맑은 고딕"/>
+              </a:rPr>
+              <a:t>판정 4분면</a:t>
+            </a:r>
+          </a:p>
+        </p:txBody>
+      </p:sp>
+      <p:sp>
+        <p:nvSpPr>
+          <p:cNvPr id="11" name="TextBox 10"/>
+          <p:cNvSpPr txBox="1"/>
+          <p:nvPr/>
+        </p:nvSpPr>
+        <p:spPr>
+          <a:xfrm>
+            <a:off x="7375846" y="1890000"/>
+            <a:ext cx="4024273" cy="468000"/>
+          </a:xfrm>
+          <a:prstGeom prst="rect">
+            <a:avLst/>
+          </a:prstGeom>
+          <a:noFill/>
+        </p:spPr>
+        <p:txBody>
+          <a:bodyPr wrap="square" anchor="t" lIns="0" rIns="0" tIns="0" bIns="0">
+            <a:spAutoFit/>
+          </a:bodyPr>
+          <a:lstStyle/>
+          <a:p>
+            <a:pPr algn="l">
+              <a:lnSpc>
+                <a:spcPct val="136000"/>
+              </a:lnSpc>
+              <a:spcAft>
+                <a:spcPts val="400"/>
+              </a:spcAft>
+            </a:pPr>
+            <a:r>
+              <a:rPr sz="1019" b="0">
+                <a:solidFill>
+                  <a:srgbClr val="667085"/>
+                </a:solidFill>
+                <a:latin typeface="맑은 고딕"/>
+              </a:rPr>
+              <a:t>10분 확률(앞섬/밀림) × 실제 결과(승/패) = 우세승·역전승·역전패·열세패. 같은 패배라도 처방이 다르다.</a:t>
+            </a:r>
+          </a:p>
+        </p:txBody>
+      </p:sp>
+      <p:sp>
+        <p:nvSpPr>
+          <p:cNvPr id="12" name="TextBox 11"/>
+          <p:cNvSpPr txBox="1"/>
+          <p:nvPr/>
+        </p:nvSpPr>
+        <p:spPr>
+          <a:xfrm>
+            <a:off x="7375846" y="2466000"/>
+            <a:ext cx="4024273" cy="198000"/>
+          </a:xfrm>
+          <a:prstGeom prst="rect">
+            <a:avLst/>
+          </a:prstGeom>
+          <a:noFill/>
+        </p:spPr>
+        <p:txBody>
+          <a:bodyPr wrap="square" anchor="t" lIns="0" rIns="0" tIns="0" bIns="0">
+            <a:spAutoFit/>
+          </a:bodyPr>
+          <a:lstStyle/>
+          <a:p>
+            <a:pPr algn="l">
+              <a:lnSpc>
+                <a:spcPct val="120000"/>
+              </a:lnSpc>
+              <a:spcAft>
+                <a:spcPts val="400"/>
+              </a:spcAft>
+            </a:pPr>
+            <a:r>
+              <a:rPr sz="1150" b="1">
+                <a:solidFill>
+                  <a:srgbClr val="1A202C"/>
+                </a:solidFill>
+                <a:latin typeface="맑은 고딕"/>
+              </a:rPr>
+              <a:t>코칭</a:t>
+            </a:r>
+          </a:p>
+        </p:txBody>
+      </p:sp>
+      <p:sp>
+        <p:nvSpPr>
+          <p:cNvPr id="13" name="TextBox 12"/>
+          <p:cNvSpPr txBox="1"/>
+          <p:nvPr/>
+        </p:nvSpPr>
+        <p:spPr>
+          <a:xfrm>
+            <a:off x="7375846" y="2664000"/>
+            <a:ext cx="4024273" cy="468000"/>
+          </a:xfrm>
+          <a:prstGeom prst="rect">
+            <a:avLst/>
+          </a:prstGeom>
+          <a:noFill/>
+        </p:spPr>
+        <p:txBody>
+          <a:bodyPr wrap="square" anchor="t" lIns="0" rIns="0" tIns="0" bIns="0">
+            <a:spAutoFit/>
+          </a:bodyPr>
+          <a:lstStyle/>
+          <a:p>
+            <a:pPr algn="l">
+              <a:lnSpc>
+                <a:spcPct val="136000"/>
+              </a:lnSpc>
+              <a:spcAft>
+                <a:spcPts val="400"/>
+              </a:spcAft>
+            </a:pPr>
+            <a:r>
+              <a:rPr sz="1019" b="0">
+                <a:solidFill>
+                  <a:srgbClr val="667085"/>
+                </a:solidFill>
+                <a:latin typeface="맑은 고딕"/>
+              </a:rPr>
+              <a:t>"드래곤 하나 더였다면" — 반사실 계산. 관찰 기록이지 인과 증명이 아님을 화면에 명시.</a:t>
+            </a:r>
+          </a:p>
+        </p:txBody>
+      </p:sp>
+      <p:sp>
+        <p:nvSpPr>
+          <p:cNvPr id="14" name="TextBox 13"/>
+          <p:cNvSpPr txBox="1"/>
+          <p:nvPr/>
+        </p:nvSpPr>
+        <p:spPr>
+          <a:xfrm>
+            <a:off x="7375846" y="3240000"/>
+            <a:ext cx="4024273" cy="198000"/>
+          </a:xfrm>
+          <a:prstGeom prst="rect">
+            <a:avLst/>
+          </a:prstGeom>
+          <a:noFill/>
+        </p:spPr>
+        <p:txBody>
+          <a:bodyPr wrap="square" anchor="t" lIns="0" rIns="0" tIns="0" bIns="0">
+            <a:spAutoFit/>
+          </a:bodyPr>
+          <a:lstStyle/>
+          <a:p>
+            <a:pPr algn="l">
+              <a:lnSpc>
+                <a:spcPct val="120000"/>
+              </a:lnSpc>
+              <a:spcAft>
+                <a:spcPts val="400"/>
+              </a:spcAft>
+            </a:pPr>
+            <a:r>
+              <a:rPr sz="1150" b="1">
+                <a:solidFill>
+                  <a:srgbClr val="1A202C"/>
+                </a:solidFill>
+                <a:latin typeface="맑은 고딕"/>
+              </a:rPr>
+              <a:t>플레이 성향 레이더</a:t>
+            </a:r>
+          </a:p>
+        </p:txBody>
+      </p:sp>
+      <p:sp>
+        <p:nvSpPr>
+          <p:cNvPr id="15" name="TextBox 14"/>
+          <p:cNvSpPr txBox="1"/>
+          <p:nvPr/>
+        </p:nvSpPr>
+        <p:spPr>
+          <a:xfrm>
+            <a:off x="7375846" y="3438000"/>
+            <a:ext cx="4024273" cy="468000"/>
+          </a:xfrm>
+          <a:prstGeom prst="rect">
+            <a:avLst/>
+          </a:prstGeom>
+          <a:noFill/>
+        </p:spPr>
+        <p:txBody>
+          <a:bodyPr wrap="square" anchor="t" lIns="0" rIns="0" tIns="0" bIns="0">
+            <a:spAutoFit/>
+          </a:bodyPr>
+          <a:lstStyle/>
+          <a:p>
+            <a:pPr algn="l">
+              <a:lnSpc>
+                <a:spcPct val="136000"/>
+              </a:lnSpc>
+              <a:spcAft>
+                <a:spcPts val="400"/>
+              </a:spcAft>
+            </a:pPr>
+            <a:r>
+              <a:rPr sz="1019" b="0">
+                <a:solidFill>
+                  <a:srgbClr val="667085"/>
+                </a:solidFill>
+                <a:latin typeface="맑은 고딕"/>
+              </a:rPr>
+              <a:t>다섯 축 백분위(교전·라인·정글·오브젝트·시야). 축끼리 상관 최대 0.13 이 되도록 데이터로 선정.</a:t>
+            </a:r>
+          </a:p>
+        </p:txBody>
+      </p:sp>
+      <p:sp>
+        <p:nvSpPr>
+          <p:cNvPr id="16" name="TextBox 15"/>
+          <p:cNvSpPr txBox="1"/>
+          <p:nvPr/>
+        </p:nvSpPr>
+        <p:spPr>
+          <a:xfrm>
+            <a:off x="7375846" y="4014000"/>
+            <a:ext cx="4024273" cy="198000"/>
+          </a:xfrm>
+          <a:prstGeom prst="rect">
+            <a:avLst/>
+          </a:prstGeom>
+          <a:noFill/>
+        </p:spPr>
+        <p:txBody>
+          <a:bodyPr wrap="square" anchor="t" lIns="0" rIns="0" tIns="0" bIns="0">
+            <a:spAutoFit/>
+          </a:bodyPr>
+          <a:lstStyle/>
+          <a:p>
+            <a:pPr algn="l">
+              <a:lnSpc>
+                <a:spcPct val="120000"/>
+              </a:lnSpc>
+              <a:spcAft>
+                <a:spcPts val="400"/>
+              </a:spcAft>
+            </a:pPr>
+            <a:r>
+              <a:rPr sz="1150" b="1">
+                <a:solidFill>
+                  <a:srgbClr val="1A202C"/>
+                </a:solidFill>
+                <a:latin typeface="맑은 고딕"/>
+              </a:rPr>
+              <a:t>라인 기준선</a:t>
+            </a:r>
+          </a:p>
+        </p:txBody>
+      </p:sp>
+      <p:sp>
+        <p:nvSpPr>
+          <p:cNvPr id="17" name="TextBox 16"/>
+          <p:cNvSpPr txBox="1"/>
+          <p:nvPr/>
+        </p:nvSpPr>
+        <p:spPr>
+          <a:xfrm>
+            <a:off x="7375846" y="4212000"/>
+            <a:ext cx="4024273" cy="468000"/>
+          </a:xfrm>
+          <a:prstGeom prst="rect">
+            <a:avLst/>
+          </a:prstGeom>
+          <a:noFill/>
+        </p:spPr>
+        <p:txBody>
+          <a:bodyPr wrap="square" anchor="t" lIns="0" rIns="0" tIns="0" bIns="0">
+            <a:spAutoFit/>
+          </a:bodyPr>
+          <a:lstStyle/>
+          <a:p>
+            <a:pPr algn="l">
+              <a:lnSpc>
+                <a:spcPct val="136000"/>
+              </a:lnSpc>
+              <a:spcAft>
+                <a:spcPts val="400"/>
+              </a:spcAft>
+            </a:pPr>
+            <a:r>
+              <a:rPr sz="1019" b="0">
+                <a:solidFill>
+                  <a:srgbClr val="667085"/>
+                </a:solidFill>
+                <a:latin typeface="맑은 고딕"/>
+              </a:rPr>
+              <a:t>같은 판의 라인 상대 = 같은 티어 표본. "내 티어가 거품인가"를 별도 수집 없이 잰다.</a:t>
+            </a:r>
+          </a:p>
+        </p:txBody>
+      </p:sp>
+      <p:sp>
+        <p:nvSpPr>
+          <p:cNvPr id="18" name="TextBox 17"/>
+          <p:cNvSpPr txBox="1"/>
+          <p:nvPr/>
+        </p:nvSpPr>
+        <p:spPr>
+          <a:xfrm>
+            <a:off x="7375846" y="4788000"/>
+            <a:ext cx="4024273" cy="198000"/>
+          </a:xfrm>
+          <a:prstGeom prst="rect">
+            <a:avLst/>
+          </a:prstGeom>
+          <a:noFill/>
+        </p:spPr>
+        <p:txBody>
+          <a:bodyPr wrap="square" anchor="t" lIns="0" rIns="0" tIns="0" bIns="0">
+            <a:spAutoFit/>
+          </a:bodyPr>
+          <a:lstStyle/>
+          <a:p>
+            <a:pPr algn="l">
+              <a:lnSpc>
+                <a:spcPct val="120000"/>
+              </a:lnSpc>
+              <a:spcAft>
+                <a:spcPts val="400"/>
+              </a:spcAft>
+            </a:pPr>
+            <a:r>
+              <a:rPr sz="1150" b="1">
+                <a:solidFill>
+                  <a:srgbClr val="1A202C"/>
+                </a:solidFill>
+                <a:latin typeface="맑은 고딕"/>
+              </a:rPr>
+              <a:t>운영</a:t>
+            </a:r>
+          </a:p>
+        </p:txBody>
+      </p:sp>
+      <p:sp>
+        <p:nvSpPr>
+          <p:cNvPr id="19" name="TextBox 18"/>
+          <p:cNvSpPr txBox="1"/>
+          <p:nvPr/>
+        </p:nvSpPr>
+        <p:spPr>
+          <a:xfrm>
+            <a:off x="7375846" y="4986000"/>
+            <a:ext cx="4024273" cy="468000"/>
+          </a:xfrm>
+          <a:prstGeom prst="rect">
+            <a:avLst/>
+          </a:prstGeom>
+          <a:noFill/>
+        </p:spPr>
+        <p:txBody>
+          <a:bodyPr wrap="square" anchor="t" lIns="0" rIns="0" tIns="0" bIns="0">
+            <a:spAutoFit/>
+          </a:bodyPr>
+          <a:lstStyle/>
+          <a:p>
+            <a:pPr algn="l">
+              <a:lnSpc>
+                <a:spcPct val="136000"/>
+              </a:lnSpc>
+              <a:spcAft>
+                <a:spcPts val="400"/>
+              </a:spcAft>
+            </a:pPr>
+            <a:r>
+              <a:rPr sz="1019" b="0">
+                <a:solidFill>
+                  <a:srgbClr val="667085"/>
+                </a:solidFill>
+                <a:latin typeface="맑은 고딕"/>
+              </a:rPr>
+              <a:t>Riot API 예산 100/120초 — 수집기는 30만 쓰고 양보. 5분 캐시로 동시 접속 시 외부 호출 0.</a:t>
+            </a:r>
+          </a:p>
+        </p:txBody>
+      </p:sp>
+    </p:spTree>
+  </p:cSld>
+  <p:clrMapOvr>
+    <a:masterClrMapping/>
+  </p:clrMapOvr>
+</p:sld>
+</file>
+
+<file path=ppt/slides/slide11.xml><?xml version="1.0" encoding="utf-8"?>
+<p:sld xmlns:a="http://schemas.openxmlformats.org/drawingml/2006/main" xmlns:p="http://schemas.openxmlformats.org/presentationml/2006/main" xmlns:r="http://schemas.openxmlformats.org/officeDocument/2006/relationships">
+  <p:cSld>
+    <p:spTree>
+      <p:nvGrpSpPr>
+        <p:cNvPr id="1" name=""/>
+        <p:cNvGrpSpPr/>
+        <p:nvPr/>
+      </p:nvGrpSpPr>
+      <p:grpSpPr/>
+      <p:sp>
+        <p:nvSpPr>
+          <p:cNvPr id="2" name="Rectangle 1"/>
+          <p:cNvSpPr/>
+          <p:nvPr/>
+        </p:nvSpPr>
+        <p:spPr>
+          <a:xfrm>
+            <a:off x="0" y="0"/>
+            <a:ext cx="125999" cy="6858000"/>
           </a:xfrm>
           <a:prstGeom prst="rect">
             <a:avLst/>
@@ -3994,14 +4673,14 @@
       </p:sp>
       <p:sp>
         <p:nvSpPr>
-          <p:cNvPr id="5" name="TextBox 4"/>
-          <p:cNvSpPr txBox="1"/>
-          <p:nvPr/>
-        </p:nvSpPr>
-        <p:spPr>
-          <a:xfrm>
-            <a:off x="792000" y="846000"/>
-            <a:ext cx="7920000" cy="503999"/>
+          <p:cNvPr id="3" name="TextBox 2"/>
+          <p:cNvSpPr txBox="1"/>
+          <p:nvPr/>
+        </p:nvSpPr>
+        <p:spPr>
+          <a:xfrm>
+            <a:off x="792000" y="413999"/>
+            <a:ext cx="7200000" cy="216000"/>
           </a:xfrm>
           <a:prstGeom prst="rect">
             <a:avLst/>
@@ -4023,27 +4702,27 @@
               </a:spcAft>
             </a:pPr>
             <a:r>
-              <a:rPr sz="2200" b="1">
-                <a:solidFill>
-                  <a:srgbClr val="1A202C"/>
-                </a:solidFill>
-                <a:latin typeface="맑은 고딕"/>
-              </a:rPr>
-              <a:t>배운 것, 그리고 다음</a:t>
-            </a:r>
-          </a:p>
-        </p:txBody>
-      </p:sp>
-      <p:sp>
-        <p:nvSpPr>
-          <p:cNvPr id="6" name="Rectangle 5"/>
+              <a:rPr sz="1050" b="1">
+                <a:solidFill>
+                  <a:srgbClr val="274BDB"/>
+                </a:solidFill>
+                <a:latin typeface="맑은 고딕"/>
+              </a:rPr>
+              <a:t>RETROSPECTIVE</a:t>
+            </a:r>
+          </a:p>
+        </p:txBody>
+      </p:sp>
+      <p:sp>
+        <p:nvSpPr>
+          <p:cNvPr id="4" name="Rectangle 3"/>
           <p:cNvSpPr/>
           <p:nvPr/>
         </p:nvSpPr>
         <p:spPr>
           <a:xfrm>
-            <a:off x="792000" y="1735200"/>
-            <a:ext cx="198000" cy="32400"/>
+            <a:off x="792000" y="737999"/>
+            <a:ext cx="306000" cy="32400"/>
           </a:xfrm>
           <a:prstGeom prst="rect">
             <a:avLst/>
@@ -4080,14 +4759,14 @@
       </p:sp>
       <p:sp>
         <p:nvSpPr>
-          <p:cNvPr id="7" name="TextBox 6"/>
-          <p:cNvSpPr txBox="1"/>
-          <p:nvPr/>
-        </p:nvSpPr>
-        <p:spPr>
-          <a:xfrm>
-            <a:off x="1152000" y="1627200"/>
-            <a:ext cx="6840000" cy="288000"/>
+          <p:cNvPr id="5" name="TextBox 4"/>
+          <p:cNvSpPr txBox="1"/>
+          <p:nvPr/>
+        </p:nvSpPr>
+        <p:spPr>
+          <a:xfrm>
+            <a:off x="792000" y="846000"/>
+            <a:ext cx="7920000" cy="503999"/>
           </a:xfrm>
           <a:prstGeom prst="rect">
             <a:avLst/>
@@ -4109,68 +4788,26 @@
               </a:spcAft>
             </a:pPr>
             <a:r>
-              <a:rPr sz="1400" b="1">
+              <a:rPr sz="2200" b="1">
                 <a:solidFill>
                   <a:srgbClr val="1A202C"/>
                 </a:solidFill>
                 <a:latin typeface="맑은 고딕"/>
               </a:rPr>
-              <a:t>이상한 숫자는 버그가 아니라 단서다</a:t>
-            </a:r>
-          </a:p>
-        </p:txBody>
-      </p:sp>
-      <p:sp>
-        <p:nvSpPr>
-          <p:cNvPr id="8" name="TextBox 7"/>
-          <p:cNvSpPr txBox="1"/>
-          <p:nvPr/>
-        </p:nvSpPr>
-        <p:spPr>
-          <a:xfrm>
-            <a:off x="1152000" y="1926000"/>
-            <a:ext cx="6840000" cy="576000"/>
-          </a:xfrm>
-          <a:prstGeom prst="rect">
-            <a:avLst/>
-          </a:prstGeom>
-          <a:noFill/>
-        </p:spPr>
-        <p:txBody>
-          <a:bodyPr wrap="square" anchor="t" lIns="0" rIns="0" tIns="0" bIns="0">
-            <a:spAutoFit/>
-          </a:bodyPr>
-          <a:lstStyle/>
-          <a:p>
-            <a:pPr algn="l">
-              <a:lnSpc>
-                <a:spcPct val="140000"/>
-              </a:lnSpc>
-              <a:spcAft>
-                <a:spcPts val="400"/>
-              </a:spcAft>
-            </a:pPr>
-            <a:r>
-              <a:rPr sz="1150" b="0">
-                <a:solidFill>
-                  <a:srgbClr val="667085"/>
-                </a:solidFill>
-                <a:latin typeface="맑은 고딕"/>
-              </a:rPr>
-              <a:t>킬 계수가 음수로 나왔을 때 모델을 의심하는 대신 데이터 구조를 진단했고, 그 발견이 서비스 설계까지 이어졌다.</a:t>
-            </a:r>
-          </a:p>
-        </p:txBody>
-      </p:sp>
-      <p:sp>
-        <p:nvSpPr>
-          <p:cNvPr id="9" name="Rectangle 8"/>
+              <a:t>배운 것, 그리고 다음</a:t>
+            </a:r>
+          </a:p>
+        </p:txBody>
+      </p:sp>
+      <p:sp>
+        <p:nvSpPr>
+          <p:cNvPr id="6" name="Rectangle 5"/>
           <p:cNvSpPr/>
           <p:nvPr/>
         </p:nvSpPr>
         <p:spPr>
           <a:xfrm>
-            <a:off x="792000" y="2725200"/>
+            <a:off x="792000" y="1735200"/>
             <a:ext cx="198000" cy="32400"/>
           </a:xfrm>
           <a:prstGeom prst="rect">
@@ -4208,13 +4845,13 @@
       </p:sp>
       <p:sp>
         <p:nvSpPr>
-          <p:cNvPr id="10" name="TextBox 9"/>
-          <p:cNvSpPr txBox="1"/>
-          <p:nvPr/>
-        </p:nvSpPr>
-        <p:spPr>
-          <a:xfrm>
-            <a:off x="1152000" y="2617200"/>
+          <p:cNvPr id="7" name="TextBox 6"/>
+          <p:cNvSpPr txBox="1"/>
+          <p:nvPr/>
+        </p:nvSpPr>
+        <p:spPr>
+          <a:xfrm>
+            <a:off x="1152000" y="1627200"/>
             <a:ext cx="6840000" cy="288000"/>
           </a:xfrm>
           <a:prstGeom prst="rect">
@@ -4243,20 +4880,20 @@
                 </a:solidFill>
                 <a:latin typeface="맑은 고딕"/>
               </a:rPr>
-              <a:t>한계는 숨기는 게 아니라 측정하는 것이다</a:t>
-            </a:r>
-          </a:p>
-        </p:txBody>
-      </p:sp>
-      <p:sp>
-        <p:nvSpPr>
-          <p:cNvPr id="11" name="TextBox 10"/>
-          <p:cNvSpPr txBox="1"/>
-          <p:nvPr/>
-        </p:nvSpPr>
-        <p:spPr>
-          <a:xfrm>
-            <a:off x="1152000" y="2916000"/>
+              <a:t>이상한 숫자는 버그가 아니라 단서다</a:t>
+            </a:r>
+          </a:p>
+        </p:txBody>
+      </p:sp>
+      <p:sp>
+        <p:nvSpPr>
+          <p:cNvPr id="8" name="TextBox 7"/>
+          <p:cNvSpPr txBox="1"/>
+          <p:nvPr/>
+        </p:nvSpPr>
+        <p:spPr>
+          <a:xfrm>
+            <a:off x="1152000" y="1926000"/>
             <a:ext cx="6840000" cy="576000"/>
           </a:xfrm>
           <a:prstGeom prst="rect">
@@ -4285,20 +4922,20 @@
                 </a:solidFill>
                 <a:latin typeface="맑은 고딕"/>
               </a:rPr>
-              <a:t>접전 0.615 · 티어 p=0.407 · 2단계 4종 열위 — 못 하는 것을 실측해 문서와 화면에 적었다.</a:t>
-            </a:r>
-          </a:p>
-        </p:txBody>
-      </p:sp>
-      <p:sp>
-        <p:nvSpPr>
-          <p:cNvPr id="12" name="Rectangle 11"/>
+              <a:t>킬 계수가 음수로 나왔을 때 모델을 의심하는 대신 데이터 구조를 진단했고, 그 발견이 서비스 설계까지 이어졌다.</a:t>
+            </a:r>
+          </a:p>
+        </p:txBody>
+      </p:sp>
+      <p:sp>
+        <p:nvSpPr>
+          <p:cNvPr id="9" name="Rectangle 8"/>
           <p:cNvSpPr/>
           <p:nvPr/>
         </p:nvSpPr>
         <p:spPr>
           <a:xfrm>
-            <a:off x="792000" y="3715199"/>
+            <a:off x="792000" y="2725200"/>
             <a:ext cx="198000" cy="32400"/>
           </a:xfrm>
           <a:prstGeom prst="rect">
@@ -4336,6 +4973,134 @@
       </p:sp>
       <p:sp>
         <p:nvSpPr>
+          <p:cNvPr id="10" name="TextBox 9"/>
+          <p:cNvSpPr txBox="1"/>
+          <p:nvPr/>
+        </p:nvSpPr>
+        <p:spPr>
+          <a:xfrm>
+            <a:off x="1152000" y="2617200"/>
+            <a:ext cx="6840000" cy="288000"/>
+          </a:xfrm>
+          <a:prstGeom prst="rect">
+            <a:avLst/>
+          </a:prstGeom>
+          <a:noFill/>
+        </p:spPr>
+        <p:txBody>
+          <a:bodyPr wrap="square" anchor="t" lIns="0" rIns="0" tIns="0" bIns="0">
+            <a:spAutoFit/>
+          </a:bodyPr>
+          <a:lstStyle/>
+          <a:p>
+            <a:pPr algn="l">
+              <a:lnSpc>
+                <a:spcPct val="120000"/>
+              </a:lnSpc>
+              <a:spcAft>
+                <a:spcPts val="400"/>
+              </a:spcAft>
+            </a:pPr>
+            <a:r>
+              <a:rPr sz="1400" b="1">
+                <a:solidFill>
+                  <a:srgbClr val="1A202C"/>
+                </a:solidFill>
+                <a:latin typeface="맑은 고딕"/>
+              </a:rPr>
+              <a:t>한계는 숨기는 게 아니라 측정하는 것이다</a:t>
+            </a:r>
+          </a:p>
+        </p:txBody>
+      </p:sp>
+      <p:sp>
+        <p:nvSpPr>
+          <p:cNvPr id="11" name="TextBox 10"/>
+          <p:cNvSpPr txBox="1"/>
+          <p:nvPr/>
+        </p:nvSpPr>
+        <p:spPr>
+          <a:xfrm>
+            <a:off x="1152000" y="2916000"/>
+            <a:ext cx="6840000" cy="576000"/>
+          </a:xfrm>
+          <a:prstGeom prst="rect">
+            <a:avLst/>
+          </a:prstGeom>
+          <a:noFill/>
+        </p:spPr>
+        <p:txBody>
+          <a:bodyPr wrap="square" anchor="t" lIns="0" rIns="0" tIns="0" bIns="0">
+            <a:spAutoFit/>
+          </a:bodyPr>
+          <a:lstStyle/>
+          <a:p>
+            <a:pPr algn="l">
+              <a:lnSpc>
+                <a:spcPct val="140000"/>
+              </a:lnSpc>
+              <a:spcAft>
+                <a:spcPts val="400"/>
+              </a:spcAft>
+            </a:pPr>
+            <a:r>
+              <a:rPr sz="1150" b="0">
+                <a:solidFill>
+                  <a:srgbClr val="667085"/>
+                </a:solidFill>
+                <a:latin typeface="맑은 고딕"/>
+              </a:rPr>
+              <a:t>접전 0.615 · 티어 p=0.407 · 2단계 4종 열위 — 못 하는 것을 실측해 문서와 화면에 적었다.</a:t>
+            </a:r>
+          </a:p>
+        </p:txBody>
+      </p:sp>
+      <p:sp>
+        <p:nvSpPr>
+          <p:cNvPr id="12" name="Rectangle 11"/>
+          <p:cNvSpPr/>
+          <p:nvPr/>
+        </p:nvSpPr>
+        <p:spPr>
+          <a:xfrm>
+            <a:off x="792000" y="3715199"/>
+            <a:ext cx="198000" cy="32400"/>
+          </a:xfrm>
+          <a:prstGeom prst="rect">
+            <a:avLst/>
+          </a:prstGeom>
+          <a:solidFill>
+            <a:srgbClr val="274BDB"/>
+          </a:solidFill>
+          <a:ln>
+            <a:noFill/>
+          </a:ln>
+          <a:effectLst/>
+        </p:spPr>
+        <p:style>
+          <a:lnRef idx="1">
+            <a:schemeClr val="accent1"/>
+          </a:lnRef>
+          <a:fillRef idx="3">
+            <a:schemeClr val="accent1"/>
+          </a:fillRef>
+          <a:effectRef idx="2">
+            <a:schemeClr val="accent1"/>
+          </a:effectRef>
+          <a:fontRef idx="minor">
+            <a:schemeClr val="lt1"/>
+          </a:fontRef>
+        </p:style>
+        <p:txBody>
+          <a:bodyPr rtlCol="0" anchor="ctr"/>
+          <a:lstStyle/>
+          <a:p>
+            <a:pPr algn="ctr"/>
+          </a:p>
+        </p:txBody>
+      </p:sp>
+      <p:sp>
+        <p:nvSpPr>
           <p:cNvPr id="13" name="TextBox 12"/>
           <p:cNvSpPr txBox="1"/>
           <p:nvPr/>
@@ -4559,7 +5324,7 @@
                 </a:solidFill>
                 <a:latin typeface="맑은 고딕"/>
               </a:rPr>
-              <a:t>github.com/wpalswpa/project2608</a:t>
+              <a:t>github.com/wpalswpa/lol-win-prediction</a:t>
             </a:r>
             <a:r>
               <a:rPr sz="1050" b="0">
@@ -5016,7 +5781,7 @@
                 </a:solidFill>
                 <a:latin typeface="맑은 고딕"/>
               </a:rPr>
-              <a:t>10</a:t>
+              <a:t>11</a:t>
             </a:r>
           </a:p>
         </p:txBody>
@@ -6123,45 +6888,474 @@
         </p:nvSpPr>
         <p:spPr>
           <a:xfrm>
-            <a:off x="792000" y="5076000"/>
-            <a:ext cx="10608120" cy="432000"/>
-          </a:xfrm>
-          <a:prstGeom prst="rect">
-            <a:avLst/>
-          </a:prstGeom>
-          <a:noFill/>
-        </p:spPr>
-        <p:txBody>
-          <a:bodyPr wrap="square" anchor="t" lIns="0" rIns="0" tIns="0" bIns="0">
-            <a:spAutoFit/>
-          </a:bodyPr>
-          <a:lstStyle/>
-          <a:p>
-            <a:pPr algn="l">
-              <a:lnSpc>
-                <a:spcPct val="138000"/>
-              </a:lnSpc>
-              <a:spcAft>
-                <a:spcPts val="400"/>
-              </a:spcAft>
-            </a:pPr>
-            <a:r>
-              <a:rPr sz="1200" b="1">
-                <a:solidFill>
-                  <a:srgbClr val="1A202C"/>
-                </a:solidFill>
-                <a:latin typeface="맑은 고딕"/>
-              </a:rPr>
-              <a:t>이 프로젝트에서 보여주고 싶은 것 — </a:t>
-            </a:r>
-            <a:r>
-              <a:rPr sz="1200" b="0">
+            <a:off x="792000" y="4986000"/>
+            <a:ext cx="4320000" cy="180000"/>
+          </a:xfrm>
+          <a:prstGeom prst="rect">
+            <a:avLst/>
+          </a:prstGeom>
+          <a:noFill/>
+        </p:spPr>
+        <p:txBody>
+          <a:bodyPr wrap="square" anchor="t" lIns="0" rIns="0" tIns="0" bIns="0">
+            <a:spAutoFit/>
+          </a:bodyPr>
+          <a:lstStyle/>
+          <a:p>
+            <a:pPr algn="l">
+              <a:lnSpc>
+                <a:spcPct val="120000"/>
+              </a:lnSpc>
+              <a:spcAft>
+                <a:spcPts val="400"/>
+              </a:spcAft>
+            </a:pPr>
+            <a:r>
+              <a:rPr sz="1000" b="1">
+                <a:solidFill>
+                  <a:srgbClr val="98A2B3"/>
+                </a:solidFill>
+                <a:latin typeface="맑은 고딕"/>
+              </a:rPr>
+              <a:t>이 프로젝트에서 보여주고 싶은 것</a:t>
+            </a:r>
+          </a:p>
+        </p:txBody>
+      </p:sp>
+      <p:sp>
+        <p:nvSpPr>
+          <p:cNvPr id="28" name="Rounded Rectangle 27"/>
+          <p:cNvSpPr/>
+          <p:nvPr/>
+        </p:nvSpPr>
+        <p:spPr>
+          <a:xfrm>
+            <a:off x="792000" y="5184000"/>
+            <a:ext cx="3416039" cy="522000"/>
+          </a:xfrm>
+          <a:prstGeom prst="roundRect">
+            <a:avLst>
+              <a:gd name="adj" fmla="val 10000"/>
+            </a:avLst>
+          </a:prstGeom>
+          <a:solidFill>
+            <a:srgbClr val="FFFFFF"/>
+          </a:solidFill>
+          <a:ln w="9525">
+            <a:solidFill>
+              <a:srgbClr val="E4E8EF"/>
+            </a:solidFill>
+          </a:ln>
+          <a:effectLst/>
+        </p:spPr>
+        <p:style>
+          <a:lnRef idx="1">
+            <a:schemeClr val="accent1"/>
+          </a:lnRef>
+          <a:fillRef idx="3">
+            <a:schemeClr val="accent1"/>
+          </a:fillRef>
+          <a:effectRef idx="2">
+            <a:schemeClr val="accent1"/>
+          </a:effectRef>
+          <a:fontRef idx="minor">
+            <a:schemeClr val="lt1"/>
+          </a:fontRef>
+        </p:style>
+        <p:txBody>
+          <a:bodyPr rtlCol="0" anchor="ctr"/>
+          <a:lstStyle/>
+          <a:p>
+            <a:pPr algn="ctr"/>
+          </a:p>
+        </p:txBody>
+      </p:sp>
+      <p:sp>
+        <p:nvSpPr>
+          <p:cNvPr id="29" name="TextBox 28"/>
+          <p:cNvSpPr txBox="1"/>
+          <p:nvPr/>
+        </p:nvSpPr>
+        <p:spPr>
+          <a:xfrm>
+            <a:off x="972000" y="5263200"/>
+            <a:ext cx="1044000" cy="216000"/>
+          </a:xfrm>
+          <a:prstGeom prst="rect">
+            <a:avLst/>
+          </a:prstGeom>
+          <a:noFill/>
+        </p:spPr>
+        <p:txBody>
+          <a:bodyPr wrap="square" anchor="t" lIns="0" rIns="0" tIns="0" bIns="0">
+            <a:spAutoFit/>
+          </a:bodyPr>
+          <a:lstStyle/>
+          <a:p>
+            <a:pPr algn="l">
+              <a:lnSpc>
+                <a:spcPct val="120000"/>
+              </a:lnSpc>
+              <a:spcAft>
+                <a:spcPts val="400"/>
+              </a:spcAft>
+            </a:pPr>
+            <a:r>
+              <a:rPr sz="1150" b="1">
+                <a:solidFill>
+                  <a:srgbClr val="274BDB"/>
+                </a:solidFill>
+                <a:latin typeface="맑은 고딕"/>
+              </a:rPr>
+              <a:t>원인 증명</a:t>
+            </a:r>
+          </a:p>
+        </p:txBody>
+      </p:sp>
+      <p:sp>
+        <p:nvSpPr>
+          <p:cNvPr id="30" name="TextBox 29"/>
+          <p:cNvSpPr txBox="1"/>
+          <p:nvPr/>
+        </p:nvSpPr>
+        <p:spPr>
+          <a:xfrm>
+            <a:off x="1980000" y="5284800"/>
+            <a:ext cx="2084039" cy="324000"/>
+          </a:xfrm>
+          <a:prstGeom prst="rect">
+            <a:avLst/>
+          </a:prstGeom>
+          <a:noFill/>
+        </p:spPr>
+        <p:txBody>
+          <a:bodyPr wrap="square" anchor="t" lIns="0" rIns="0" tIns="0" bIns="0">
+            <a:spAutoFit/>
+          </a:bodyPr>
+          <a:lstStyle/>
+          <a:p>
+            <a:pPr algn="l">
+              <a:lnSpc>
+                <a:spcPct val="130000"/>
+              </a:lnSpc>
+              <a:spcAft>
+                <a:spcPts val="400"/>
+              </a:spcAft>
+            </a:pPr>
+            <a:r>
+              <a:rPr sz="980" b="0">
                 <a:solidFill>
                   <a:srgbClr val="667085"/>
                 </a:solidFill>
                 <a:latin typeface="맑은 고딕"/>
               </a:rPr>
-              <a:t>이상한 숫자를 파고들어 원인을 증명한 것, 못 맞히는 구간을 숨기지 않고 설계로 옮긴 것, 그리고 스스로를 검증하는 파이프라인.</a:t>
+              <a:t>계수 이상을 파고들어 원인 증명</a:t>
+            </a:r>
+          </a:p>
+        </p:txBody>
+      </p:sp>
+      <p:sp>
+        <p:nvSpPr>
+          <p:cNvPr id="31" name="Rounded Rectangle 30"/>
+          <p:cNvSpPr/>
+          <p:nvPr/>
+        </p:nvSpPr>
+        <p:spPr>
+          <a:xfrm>
+            <a:off x="4388040" y="5184000"/>
+            <a:ext cx="3416039" cy="522000"/>
+          </a:xfrm>
+          <a:prstGeom prst="roundRect">
+            <a:avLst>
+              <a:gd name="adj" fmla="val 10000"/>
+            </a:avLst>
+          </a:prstGeom>
+          <a:solidFill>
+            <a:srgbClr val="FFFFFF"/>
+          </a:solidFill>
+          <a:ln w="9525">
+            <a:solidFill>
+              <a:srgbClr val="E4E8EF"/>
+            </a:solidFill>
+          </a:ln>
+          <a:effectLst/>
+        </p:spPr>
+        <p:style>
+          <a:lnRef idx="1">
+            <a:schemeClr val="accent1"/>
+          </a:lnRef>
+          <a:fillRef idx="3">
+            <a:schemeClr val="accent1"/>
+          </a:fillRef>
+          <a:effectRef idx="2">
+            <a:schemeClr val="accent1"/>
+          </a:effectRef>
+          <a:fontRef idx="minor">
+            <a:schemeClr val="lt1"/>
+          </a:fontRef>
+        </p:style>
+        <p:txBody>
+          <a:bodyPr rtlCol="0" anchor="ctr"/>
+          <a:lstStyle/>
+          <a:p>
+            <a:pPr algn="ctr"/>
+          </a:p>
+        </p:txBody>
+      </p:sp>
+      <p:sp>
+        <p:nvSpPr>
+          <p:cNvPr id="32" name="TextBox 31"/>
+          <p:cNvSpPr txBox="1"/>
+          <p:nvPr/>
+        </p:nvSpPr>
+        <p:spPr>
+          <a:xfrm>
+            <a:off x="4568040" y="5263200"/>
+            <a:ext cx="1044000" cy="216000"/>
+          </a:xfrm>
+          <a:prstGeom prst="rect">
+            <a:avLst/>
+          </a:prstGeom>
+          <a:noFill/>
+        </p:spPr>
+        <p:txBody>
+          <a:bodyPr wrap="square" anchor="t" lIns="0" rIns="0" tIns="0" bIns="0">
+            <a:spAutoFit/>
+          </a:bodyPr>
+          <a:lstStyle/>
+          <a:p>
+            <a:pPr algn="l">
+              <a:lnSpc>
+                <a:spcPct val="120000"/>
+              </a:lnSpc>
+              <a:spcAft>
+                <a:spcPts val="400"/>
+              </a:spcAft>
+            </a:pPr>
+            <a:r>
+              <a:rPr sz="1150" b="1">
+                <a:solidFill>
+                  <a:srgbClr val="274BDB"/>
+                </a:solidFill>
+                <a:latin typeface="맑은 고딕"/>
+              </a:rPr>
+              <a:t>한계 측정</a:t>
+            </a:r>
+          </a:p>
+        </p:txBody>
+      </p:sp>
+      <p:sp>
+        <p:nvSpPr>
+          <p:cNvPr id="33" name="TextBox 32"/>
+          <p:cNvSpPr txBox="1"/>
+          <p:nvPr/>
+        </p:nvSpPr>
+        <p:spPr>
+          <a:xfrm>
+            <a:off x="5576040" y="5284800"/>
+            <a:ext cx="2084039" cy="324000"/>
+          </a:xfrm>
+          <a:prstGeom prst="rect">
+            <a:avLst/>
+          </a:prstGeom>
+          <a:noFill/>
+        </p:spPr>
+        <p:txBody>
+          <a:bodyPr wrap="square" anchor="t" lIns="0" rIns="0" tIns="0" bIns="0">
+            <a:spAutoFit/>
+          </a:bodyPr>
+          <a:lstStyle/>
+          <a:p>
+            <a:pPr algn="l">
+              <a:lnSpc>
+                <a:spcPct val="130000"/>
+              </a:lnSpc>
+              <a:spcAft>
+                <a:spcPts val="400"/>
+              </a:spcAft>
+            </a:pPr>
+            <a:r>
+              <a:rPr sz="980" b="0">
+                <a:solidFill>
+                  <a:srgbClr val="667085"/>
+                </a:solidFill>
+                <a:latin typeface="맑은 고딕"/>
+              </a:rPr>
+              <a:t>못 맞히는 구간을 실측해 공개</a:t>
+            </a:r>
+          </a:p>
+        </p:txBody>
+      </p:sp>
+      <p:sp>
+        <p:nvSpPr>
+          <p:cNvPr id="34" name="Rounded Rectangle 33"/>
+          <p:cNvSpPr/>
+          <p:nvPr/>
+        </p:nvSpPr>
+        <p:spPr>
+          <a:xfrm>
+            <a:off x="7984079" y="5184000"/>
+            <a:ext cx="3416039" cy="522000"/>
+          </a:xfrm>
+          <a:prstGeom prst="roundRect">
+            <a:avLst>
+              <a:gd name="adj" fmla="val 10000"/>
+            </a:avLst>
+          </a:prstGeom>
+          <a:solidFill>
+            <a:srgbClr val="FFFFFF"/>
+          </a:solidFill>
+          <a:ln w="9525">
+            <a:solidFill>
+              <a:srgbClr val="E4E8EF"/>
+            </a:solidFill>
+          </a:ln>
+          <a:effectLst/>
+        </p:spPr>
+        <p:style>
+          <a:lnRef idx="1">
+            <a:schemeClr val="accent1"/>
+          </a:lnRef>
+          <a:fillRef idx="3">
+            <a:schemeClr val="accent1"/>
+          </a:fillRef>
+          <a:effectRef idx="2">
+            <a:schemeClr val="accent1"/>
+          </a:effectRef>
+          <a:fontRef idx="minor">
+            <a:schemeClr val="lt1"/>
+          </a:fontRef>
+        </p:style>
+        <p:txBody>
+          <a:bodyPr rtlCol="0" anchor="ctr"/>
+          <a:lstStyle/>
+          <a:p>
+            <a:pPr algn="ctr"/>
+          </a:p>
+        </p:txBody>
+      </p:sp>
+      <p:sp>
+        <p:nvSpPr>
+          <p:cNvPr id="35" name="TextBox 34"/>
+          <p:cNvSpPr txBox="1"/>
+          <p:nvPr/>
+        </p:nvSpPr>
+        <p:spPr>
+          <a:xfrm>
+            <a:off x="8164079" y="5263200"/>
+            <a:ext cx="1044000" cy="216000"/>
+          </a:xfrm>
+          <a:prstGeom prst="rect">
+            <a:avLst/>
+          </a:prstGeom>
+          <a:noFill/>
+        </p:spPr>
+        <p:txBody>
+          <a:bodyPr wrap="square" anchor="t" lIns="0" rIns="0" tIns="0" bIns="0">
+            <a:spAutoFit/>
+          </a:bodyPr>
+          <a:lstStyle/>
+          <a:p>
+            <a:pPr algn="l">
+              <a:lnSpc>
+                <a:spcPct val="120000"/>
+              </a:lnSpc>
+              <a:spcAft>
+                <a:spcPts val="400"/>
+              </a:spcAft>
+            </a:pPr>
+            <a:r>
+              <a:rPr sz="1150" b="1">
+                <a:solidFill>
+                  <a:srgbClr val="274BDB"/>
+                </a:solidFill>
+                <a:latin typeface="맑은 고딕"/>
+              </a:rPr>
+              <a:t>자기 검증</a:t>
+            </a:r>
+          </a:p>
+        </p:txBody>
+      </p:sp>
+      <p:sp>
+        <p:nvSpPr>
+          <p:cNvPr id="36" name="TextBox 35"/>
+          <p:cNvSpPr txBox="1"/>
+          <p:nvPr/>
+        </p:nvSpPr>
+        <p:spPr>
+          <a:xfrm>
+            <a:off x="9172080" y="5284800"/>
+            <a:ext cx="2084039" cy="324000"/>
+          </a:xfrm>
+          <a:prstGeom prst="rect">
+            <a:avLst/>
+          </a:prstGeom>
+          <a:noFill/>
+        </p:spPr>
+        <p:txBody>
+          <a:bodyPr wrap="square" anchor="t" lIns="0" rIns="0" tIns="0" bIns="0">
+            <a:spAutoFit/>
+          </a:bodyPr>
+          <a:lstStyle/>
+          <a:p>
+            <a:pPr algn="l">
+              <a:lnSpc>
+                <a:spcPct val="130000"/>
+              </a:lnSpc>
+              <a:spcAft>
+                <a:spcPts val="400"/>
+              </a:spcAft>
+            </a:pPr>
+            <a:r>
+              <a:rPr sz="980" b="0">
+                <a:solidFill>
+                  <a:srgbClr val="667085"/>
+                </a:solidFill>
+                <a:latin typeface="맑은 고딕"/>
+              </a:rPr>
+              <a:t>배포 전 21항목 · 틀린 값으로 시험</a:t>
+            </a:r>
+          </a:p>
+        </p:txBody>
+      </p:sp>
+      <p:sp>
+        <p:nvSpPr>
+          <p:cNvPr id="37" name="TextBox 36"/>
+          <p:cNvSpPr txBox="1"/>
+          <p:nvPr/>
+        </p:nvSpPr>
+        <p:spPr>
+          <a:xfrm>
+            <a:off x="792000" y="5850000"/>
+            <a:ext cx="10608120" cy="216000"/>
+          </a:xfrm>
+          <a:prstGeom prst="rect">
+            <a:avLst/>
+          </a:prstGeom>
+          <a:noFill/>
+        </p:spPr>
+        <p:txBody>
+          <a:bodyPr wrap="square" anchor="t" lIns="0" rIns="0" tIns="0" bIns="0">
+            <a:spAutoFit/>
+          </a:bodyPr>
+          <a:lstStyle/>
+          <a:p>
+            <a:pPr algn="l">
+              <a:lnSpc>
+                <a:spcPct val="120000"/>
+              </a:lnSpc>
+              <a:spcAft>
+                <a:spcPts val="400"/>
+              </a:spcAft>
+            </a:pPr>
+            <a:r>
+              <a:rPr sz="900" b="0">
+                <a:solidFill>
+                  <a:srgbClr val="98A2B3"/>
+                </a:solidFill>
+                <a:latin typeface="맑은 고딕"/>
+              </a:rPr>
+              <a:t>용어 — 골드: 게임 내 화폐 · CS: 미니언 처치 수 · 접전: 10분 골드차 1,000 미만 · 홀드아웃: 학습에 쓰지 않고 봉인한 시험 데이터</a:t>
             </a:r>
           </a:p>
         </p:txBody>
@@ -7426,7 +8620,58 @@
                 </a:solidFill>
                 <a:latin typeface="맑은 고딕"/>
               </a:rPr>
-              <a:t>커밋 130+ · 검증 항목 21 · 문서 24개 수치 자동 대조 · 서비스 탭 4개 · 티어 실측 1,399판</a:t>
+              <a:t>커밋 162 중 151 · 서비스 탭 4개 · 검증 항목 21 · 문서 26개 수치 대조 · 티어 실측 1,399판</a:t>
+            </a:r>
+          </a:p>
+        </p:txBody>
+      </p:sp>
+      <p:sp>
+        <p:nvSpPr>
+          <p:cNvPr id="31" name="TextBox 30"/>
+          <p:cNvSpPr txBox="1"/>
+          <p:nvPr/>
+        </p:nvSpPr>
+        <p:spPr>
+          <a:xfrm>
+            <a:off x="792000" y="5220000"/>
+            <a:ext cx="10608120" cy="360000"/>
+          </a:xfrm>
+          <a:prstGeom prst="rect">
+            <a:avLst/>
+          </a:prstGeom>
+          <a:noFill/>
+        </p:spPr>
+        <p:txBody>
+          <a:bodyPr wrap="square" anchor="t" lIns="0" rIns="0" tIns="0" bIns="0">
+            <a:spAutoFit/>
+          </a:bodyPr>
+          <a:lstStyle/>
+          <a:p>
+            <a:pPr algn="l">
+              <a:lnSpc>
+                <a:spcPct val="138000"/>
+              </a:lnSpc>
+              <a:spcAft>
+                <a:spcPts val="400"/>
+              </a:spcAft>
+            </a:pPr>
+            <a:r>
+              <a:rPr sz="1050" b="1">
+                <a:solidFill>
+                  <a:srgbClr val="1A202C"/>
+                </a:solidFill>
+                <a:latin typeface="맑은 고딕"/>
+              </a:rPr>
+              <a:t>협업 방식  </a:t>
+            </a:r>
+            <a:r>
+              <a:rPr sz="1050" b="0">
+                <a:solidFill>
+                  <a:srgbClr val="667085"/>
+                </a:solidFill>
+                <a:latin typeface="맑은 고딕"/>
+              </a:rPr>
+              <a:t>한 브랜치(team) 공유 · 사람마다 손대는 파일을 갈라 충돌 0 · 검증 통과 후에만 main 스냅샷 · 담당 부재 시 인수 범위를 문서로 남김 (docs/TEAM_WORKFLOW.md)</a:t>
             </a:r>
           </a:p>
         </p:txBody>
@@ -12341,7 +13586,7 @@
                 </a:solidFill>
                 <a:latin typeface="맑은 고딕"/>
               </a:rPr>
-              <a:t>문서 24개 ↔ 근거 CSV</a:t>
+              <a:t>문서 26개 ↔ 근거 CSV</a:t>
             </a:r>
           </a:p>
         </p:txBody>
@@ -13196,7 +14441,7 @@
                 </a:solidFill>
                 <a:latin typeface="맑은 고딕"/>
               </a:rPr>
-              <a:t>RESULTS</a:t>
+              <a:t>CHALLENGE 4</a:t>
             </a:r>
           </a:p>
         </p:txBody>
@@ -13238,7 +14483,7 @@
                 </a:solidFill>
                 <a:latin typeface="맑은 고딕"/>
               </a:rPr>
-              <a:t>왜 로지스틱인가, 그리고 얼마나 맞히나</a:t>
+              <a:t>운영에서 만난 문제 4건 — 증상이 아니라 원인을 고쳤다</a:t>
             </a:r>
           </a:p>
         </p:txBody>
@@ -13280,7 +14525,7 @@
                 </a:solidFill>
                 <a:latin typeface="맑은 고딕"/>
               </a:rPr>
-              <a:t>홀드아웃 1,976판 · 분할 10회 반복</a:t>
+              <a:t>라이브 서비스 · 9/2 이후 단독 운영</a:t>
             </a:r>
           </a:p>
         </p:txBody>
@@ -13371,27 +14616,191 @@
       </p:sp>
       <p:sp>
         <p:nvSpPr>
-          <p:cNvPr id="8" name="Rounded Rectangle 7"/>
+          <p:cNvPr id="8" name="TextBox 7"/>
+          <p:cNvSpPr txBox="1"/>
+          <p:nvPr/>
+        </p:nvSpPr>
+        <p:spPr>
+          <a:xfrm>
+            <a:off x="918000" y="1638000"/>
+            <a:ext cx="2088000" cy="180000"/>
+          </a:xfrm>
+          <a:prstGeom prst="rect">
+            <a:avLst/>
+          </a:prstGeom>
+          <a:noFill/>
+        </p:spPr>
+        <p:txBody>
+          <a:bodyPr wrap="square" anchor="t" lIns="0" rIns="0" tIns="0" bIns="0">
+            <a:spAutoFit/>
+          </a:bodyPr>
+          <a:lstStyle/>
+          <a:p>
+            <a:pPr algn="l">
+              <a:lnSpc>
+                <a:spcPct val="120000"/>
+              </a:lnSpc>
+              <a:spcAft>
+                <a:spcPts val="400"/>
+              </a:spcAft>
+            </a:pPr>
+            <a:r>
+              <a:rPr sz="1000" b="1">
+                <a:solidFill>
+                  <a:srgbClr val="274BDB"/>
+                </a:solidFill>
+                <a:latin typeface="맑은 고딕"/>
+              </a:rPr>
+              <a:t>문제</a:t>
+            </a:r>
+          </a:p>
+        </p:txBody>
+      </p:sp>
+      <p:sp>
+        <p:nvSpPr>
+          <p:cNvPr id="9" name="TextBox 8"/>
+          <p:cNvSpPr txBox="1"/>
+          <p:nvPr/>
+        </p:nvSpPr>
+        <p:spPr>
+          <a:xfrm>
+            <a:off x="3186000" y="1638000"/>
+            <a:ext cx="2556000" cy="180000"/>
+          </a:xfrm>
+          <a:prstGeom prst="rect">
+            <a:avLst/>
+          </a:prstGeom>
+          <a:noFill/>
+        </p:spPr>
+        <p:txBody>
+          <a:bodyPr wrap="square" anchor="t" lIns="0" rIns="0" tIns="0" bIns="0">
+            <a:spAutoFit/>
+          </a:bodyPr>
+          <a:lstStyle/>
+          <a:p>
+            <a:pPr algn="l">
+              <a:lnSpc>
+                <a:spcPct val="120000"/>
+              </a:lnSpc>
+              <a:spcAft>
+                <a:spcPts val="400"/>
+              </a:spcAft>
+            </a:pPr>
+            <a:r>
+              <a:rPr sz="1000" b="1">
+                <a:solidFill>
+                  <a:srgbClr val="274BDB"/>
+                </a:solidFill>
+                <a:latin typeface="맑은 고딕"/>
+              </a:rPr>
+              <a:t>원인</a:t>
+            </a:r>
+          </a:p>
+        </p:txBody>
+      </p:sp>
+      <p:sp>
+        <p:nvSpPr>
+          <p:cNvPr id="10" name="TextBox 9"/>
+          <p:cNvSpPr txBox="1"/>
+          <p:nvPr/>
+        </p:nvSpPr>
+        <p:spPr>
+          <a:xfrm>
+            <a:off x="5922000" y="1638000"/>
+            <a:ext cx="2736000" cy="180000"/>
+          </a:xfrm>
+          <a:prstGeom prst="rect">
+            <a:avLst/>
+          </a:prstGeom>
+          <a:noFill/>
+        </p:spPr>
+        <p:txBody>
+          <a:bodyPr wrap="square" anchor="t" lIns="0" rIns="0" tIns="0" bIns="0">
+            <a:spAutoFit/>
+          </a:bodyPr>
+          <a:lstStyle/>
+          <a:p>
+            <a:pPr algn="l">
+              <a:lnSpc>
+                <a:spcPct val="120000"/>
+              </a:lnSpc>
+              <a:spcAft>
+                <a:spcPts val="400"/>
+              </a:spcAft>
+            </a:pPr>
+            <a:r>
+              <a:rPr sz="1000" b="1">
+                <a:solidFill>
+                  <a:srgbClr val="274BDB"/>
+                </a:solidFill>
+                <a:latin typeface="맑은 고딕"/>
+              </a:rPr>
+              <a:t>해결</a:t>
+            </a:r>
+          </a:p>
+        </p:txBody>
+      </p:sp>
+      <p:sp>
+        <p:nvSpPr>
+          <p:cNvPr id="11" name="TextBox 10"/>
+          <p:cNvSpPr txBox="1"/>
+          <p:nvPr/>
+        </p:nvSpPr>
+        <p:spPr>
+          <a:xfrm>
+            <a:off x="8838000" y="1638000"/>
+            <a:ext cx="2508119" cy="180000"/>
+          </a:xfrm>
+          <a:prstGeom prst="rect">
+            <a:avLst/>
+          </a:prstGeom>
+          <a:noFill/>
+        </p:spPr>
+        <p:txBody>
+          <a:bodyPr wrap="square" anchor="t" lIns="0" rIns="0" tIns="0" bIns="0">
+            <a:spAutoFit/>
+          </a:bodyPr>
+          <a:lstStyle/>
+          <a:p>
+            <a:pPr algn="l">
+              <a:lnSpc>
+                <a:spcPct val="120000"/>
+              </a:lnSpc>
+              <a:spcAft>
+                <a:spcPts val="400"/>
+              </a:spcAft>
+            </a:pPr>
+            <a:r>
+              <a:rPr sz="1000" b="1">
+                <a:solidFill>
+                  <a:srgbClr val="274BDB"/>
+                </a:solidFill>
+                <a:latin typeface="맑은 고딕"/>
+              </a:rPr>
+              <a:t>결과</a:t>
+            </a:r>
+          </a:p>
+        </p:txBody>
+      </p:sp>
+      <p:sp>
+        <p:nvSpPr>
+          <p:cNvPr id="12" name="Rectangle 11"/>
           <p:cNvSpPr/>
           <p:nvPr/>
         </p:nvSpPr>
         <p:spPr>
           <a:xfrm>
-            <a:off x="748800" y="1612799"/>
-            <a:ext cx="5702400" cy="3497639"/>
-          </a:xfrm>
-          <a:prstGeom prst="roundRect">
-            <a:avLst>
-              <a:gd name="adj" fmla="val 4500"/>
-            </a:avLst>
+            <a:off x="792000" y="1853999"/>
+            <a:ext cx="10608120" cy="18000"/>
+          </a:xfrm>
+          <a:prstGeom prst="rect">
+            <a:avLst/>
           </a:prstGeom>
           <a:solidFill>
-            <a:srgbClr val="FFFFFF"/>
+            <a:srgbClr val="274BDB"/>
           </a:solidFill>
-          <a:ln w="9525">
-            <a:solidFill>
-              <a:srgbClr val="E4E8EF"/>
-            </a:solidFill>
+          <a:ln>
+            <a:noFill/>
           </a:ln>
           <a:effectLst/>
         </p:spPr>
@@ -13417,203 +14826,816 @@
           </a:p>
         </p:txBody>
       </p:sp>
-      <p:pic>
-        <p:nvPicPr>
-          <p:cNvPr id="9" name="Picture 8" descr="model_choice_1_scores.png"/>
-          <p:cNvPicPr>
-            <a:picLocks noChangeAspect="1"/>
-          </p:cNvPicPr>
-          <p:nvPr/>
-        </p:nvPicPr>
-        <p:blipFill>
-          <a:blip r:embed="rId2"/>
-          <a:stretch>
-            <a:fillRect/>
-          </a:stretch>
-        </p:blipFill>
-        <p:spPr>
-          <a:xfrm>
-            <a:off x="792000" y="1655999"/>
-            <a:ext cx="5616000" cy="3411239"/>
-          </a:xfrm>
-          <a:prstGeom prst="rect">
-            <a:avLst/>
-          </a:prstGeom>
-        </p:spPr>
-      </p:pic>
-      <p:sp>
-        <p:nvSpPr>
-          <p:cNvPr id="10" name="TextBox 9"/>
-          <p:cNvSpPr txBox="1"/>
-          <p:nvPr/>
-        </p:nvSpPr>
-        <p:spPr>
-          <a:xfrm>
-            <a:off x="792000" y="5229239"/>
-            <a:ext cx="5616000" cy="216000"/>
-          </a:xfrm>
-          <a:prstGeom prst="rect">
-            <a:avLst/>
-          </a:prstGeom>
-          <a:noFill/>
-        </p:spPr>
-        <p:txBody>
-          <a:bodyPr wrap="square" anchor="t" lIns="0" rIns="0" tIns="0" bIns="0">
-            <a:spAutoFit/>
-          </a:bodyPr>
-          <a:lstStyle/>
-          <a:p>
-            <a:pPr algn="l">
-              <a:lnSpc>
-                <a:spcPct val="120000"/>
-              </a:lnSpc>
-              <a:spcAft>
-                <a:spcPts val="400"/>
-              </a:spcAft>
-            </a:pPr>
-            <a:r>
-              <a:rPr sz="950" b="0">
-                <a:solidFill>
-                  <a:srgbClr val="98A2B3"/>
-                </a:solidFill>
-                <a:latin typeface="맑은 고딕"/>
-              </a:rPr>
-              <a:t>후보 8종 교차검증 — 1위와 2위가 0.003 차이, 점수로는 못 고른다</a:t>
-            </a:r>
-          </a:p>
-        </p:txBody>
-      </p:sp>
-      <p:sp>
-        <p:nvSpPr>
-          <p:cNvPr id="11" name="TextBox 10"/>
-          <p:cNvSpPr txBox="1"/>
-          <p:nvPr/>
-        </p:nvSpPr>
-        <p:spPr>
-          <a:xfrm>
-            <a:off x="6875999" y="1692000"/>
-            <a:ext cx="4524120" cy="216000"/>
-          </a:xfrm>
-          <a:prstGeom prst="rect">
-            <a:avLst/>
-          </a:prstGeom>
-          <a:noFill/>
-        </p:spPr>
-        <p:txBody>
-          <a:bodyPr wrap="square" anchor="t" lIns="0" rIns="0" tIns="0" bIns="0">
-            <a:spAutoFit/>
-          </a:bodyPr>
-          <a:lstStyle/>
-          <a:p>
-            <a:pPr algn="l">
-              <a:lnSpc>
-                <a:spcPct val="120000"/>
-              </a:lnSpc>
-              <a:spcAft>
-                <a:spcPts val="400"/>
-              </a:spcAft>
-            </a:pPr>
-            <a:r>
-              <a:rPr sz="1250" b="1">
+      <p:sp>
+        <p:nvSpPr>
+          <p:cNvPr id="13" name="Rounded Rectangle 12"/>
+          <p:cNvSpPr/>
+          <p:nvPr/>
+        </p:nvSpPr>
+        <p:spPr>
+          <a:xfrm>
+            <a:off x="792000" y="1879200"/>
+            <a:ext cx="10608120" cy="835200"/>
+          </a:xfrm>
+          <a:prstGeom prst="roundRect">
+            <a:avLst>
+              <a:gd name="adj" fmla="val 4000"/>
+            </a:avLst>
+          </a:prstGeom>
+          <a:solidFill>
+            <a:srgbClr val="F4F6FA"/>
+          </a:solidFill>
+          <a:ln>
+            <a:noFill/>
+          </a:ln>
+          <a:effectLst/>
+        </p:spPr>
+        <p:style>
+          <a:lnRef idx="1">
+            <a:schemeClr val="accent1"/>
+          </a:lnRef>
+          <a:fillRef idx="3">
+            <a:schemeClr val="accent1"/>
+          </a:fillRef>
+          <a:effectRef idx="2">
+            <a:schemeClr val="accent1"/>
+          </a:effectRef>
+          <a:fontRef idx="minor">
+            <a:schemeClr val="lt1"/>
+          </a:fontRef>
+        </p:style>
+        <p:txBody>
+          <a:bodyPr rtlCol="0" anchor="ctr"/>
+          <a:lstStyle/>
+          <a:p>
+            <a:pPr algn="ctr"/>
+          </a:p>
+        </p:txBody>
+      </p:sp>
+      <p:sp>
+        <p:nvSpPr>
+          <p:cNvPr id="14" name="TextBox 13"/>
+          <p:cNvSpPr txBox="1"/>
+          <p:nvPr/>
+        </p:nvSpPr>
+        <p:spPr>
+          <a:xfrm>
+            <a:off x="918000" y="1980000"/>
+            <a:ext cx="2052000" cy="727200"/>
+          </a:xfrm>
+          <a:prstGeom prst="rect">
+            <a:avLst/>
+          </a:prstGeom>
+          <a:noFill/>
+        </p:spPr>
+        <p:txBody>
+          <a:bodyPr wrap="square" anchor="t" lIns="0" rIns="0" tIns="0" bIns="0">
+            <a:spAutoFit/>
+          </a:bodyPr>
+          <a:lstStyle/>
+          <a:p>
+            <a:pPr algn="l">
+              <a:lnSpc>
+                <a:spcPct val="136000"/>
+              </a:lnSpc>
+              <a:spcAft>
+                <a:spcPts val="400"/>
+              </a:spcAft>
+            </a:pPr>
+            <a:r>
+              <a:rPr sz="1019" b="1">
                 <a:solidFill>
                   <a:srgbClr val="1A202C"/>
                 </a:solidFill>
                 <a:latin typeface="맑은 고딕"/>
               </a:rPr>
-              <a:t>선정 기준 — 점수 대신 두 가지</a:t>
-            </a:r>
-          </a:p>
-        </p:txBody>
-      </p:sp>
-      <p:sp>
-        <p:nvSpPr>
-          <p:cNvPr id="12" name="TextBox 11"/>
-          <p:cNvSpPr txBox="1"/>
-          <p:nvPr/>
-        </p:nvSpPr>
-        <p:spPr>
-          <a:xfrm>
-            <a:off x="6875999" y="1944000"/>
-            <a:ext cx="4524120" cy="648000"/>
-          </a:xfrm>
-          <a:prstGeom prst="rect">
-            <a:avLst/>
-          </a:prstGeom>
-          <a:noFill/>
-        </p:spPr>
-        <p:txBody>
-          <a:bodyPr wrap="square" anchor="t" lIns="0" rIns="0" tIns="0" bIns="0">
-            <a:spAutoFit/>
-          </a:bodyPr>
-          <a:lstStyle/>
-          <a:p>
-            <a:pPr algn="l">
-              <a:lnSpc>
-                <a:spcPct val="135000"/>
-              </a:lnSpc>
-              <a:spcAft>
-                <a:spcPts val="400"/>
-              </a:spcAft>
-            </a:pPr>
-            <a:r>
-              <a:rPr sz="1100" b="1">
+              <a:t>검색 한 번에 3.1초. 동시 접속하면 Riot 예산이 바닥난다</a:t>
+            </a:r>
+          </a:p>
+        </p:txBody>
+      </p:sp>
+      <p:sp>
+        <p:nvSpPr>
+          <p:cNvPr id="15" name="TextBox 14"/>
+          <p:cNvSpPr txBox="1"/>
+          <p:nvPr/>
+        </p:nvSpPr>
+        <p:spPr>
+          <a:xfrm>
+            <a:off x="3186000" y="1980000"/>
+            <a:ext cx="2520000" cy="727200"/>
+          </a:xfrm>
+          <a:prstGeom prst="rect">
+            <a:avLst/>
+          </a:prstGeom>
+          <a:noFill/>
+        </p:spPr>
+        <p:txBody>
+          <a:bodyPr wrap="square" anchor="t" lIns="0" rIns="0" tIns="0" bIns="0">
+            <a:spAutoFit/>
+          </a:bodyPr>
+          <a:lstStyle/>
+          <a:p>
+            <a:pPr algn="l">
+              <a:lnSpc>
+                <a:spcPct val="136000"/>
+              </a:lnSpc>
+              <a:spcAft>
+                <a:spcPts val="400"/>
+              </a:spcAft>
+            </a:pPr>
+            <a:r>
+              <a:rPr sz="1019" b="0">
+                <a:solidFill>
+                  <a:srgbClr val="667085"/>
+                </a:solidFill>
+                <a:latin typeface="맑은 고딕"/>
+              </a:rPr>
+              <a:t>사용자 요청마다 Riot API 를 새로 호출. 같은 소환사를 다시 봐도 전부 재호출</a:t>
+            </a:r>
+          </a:p>
+        </p:txBody>
+      </p:sp>
+      <p:sp>
+        <p:nvSpPr>
+          <p:cNvPr id="16" name="TextBox 15"/>
+          <p:cNvSpPr txBox="1"/>
+          <p:nvPr/>
+        </p:nvSpPr>
+        <p:spPr>
+          <a:xfrm>
+            <a:off x="5922000" y="1980000"/>
+            <a:ext cx="2700000" cy="727200"/>
+          </a:xfrm>
+          <a:prstGeom prst="rect">
+            <a:avLst/>
+          </a:prstGeom>
+          <a:noFill/>
+        </p:spPr>
+        <p:txBody>
+          <a:bodyPr wrap="square" anchor="t" lIns="0" rIns="0" tIns="0" bIns="0">
+            <a:spAutoFit/>
+          </a:bodyPr>
+          <a:lstStyle/>
+          <a:p>
+            <a:pPr algn="l">
+              <a:lnSpc>
+                <a:spcPct val="136000"/>
+              </a:lnSpc>
+              <a:spcAft>
+                <a:spcPts val="400"/>
+              </a:spcAft>
+            </a:pPr>
+            <a:r>
+              <a:rPr sz="1019" b="0">
                 <a:solidFill>
                   <a:srgbClr val="1A202C"/>
                 </a:solidFill>
                 <a:latin typeface="맑은 고딕"/>
               </a:rPr>
-              <a:t>① 외웠는가 </a:t>
-            </a:r>
-            <a:r>
-              <a:rPr sz="1100" b="0">
+              <a:t>소환사 단위 5분 캐시(_SUMMONER_CACHE, 200건 상한·만료 정리)</a:t>
+            </a:r>
+          </a:p>
+        </p:txBody>
+      </p:sp>
+      <p:sp>
+        <p:nvSpPr>
+          <p:cNvPr id="17" name="TextBox 16"/>
+          <p:cNvSpPr txBox="1"/>
+          <p:nvPr/>
+        </p:nvSpPr>
+        <p:spPr>
+          <a:xfrm>
+            <a:off x="8838000" y="1980000"/>
+            <a:ext cx="2472119" cy="727200"/>
+          </a:xfrm>
+          <a:prstGeom prst="rect">
+            <a:avLst/>
+          </a:prstGeom>
+          <a:noFill/>
+        </p:spPr>
+        <p:txBody>
+          <a:bodyPr wrap="square" anchor="t" lIns="0" rIns="0" tIns="0" bIns="0">
+            <a:spAutoFit/>
+          </a:bodyPr>
+          <a:lstStyle/>
+          <a:p>
+            <a:pPr algn="l">
+              <a:lnSpc>
+                <a:spcPct val="136000"/>
+              </a:lnSpc>
+              <a:spcAft>
+                <a:spcPts val="400"/>
+              </a:spcAft>
+            </a:pPr>
+            <a:r>
+              <a:rPr sz="1019" b="1">
+                <a:solidFill>
+                  <a:srgbClr val="1A202C"/>
+                </a:solidFill>
+                <a:latin typeface="맑은 고딕"/>
+              </a:rPr>
+              <a:t>3.1s → 0.02s</a:t>
+            </a:r>
+            <a:r>
+              <a:rPr sz="1019" b="0">
                 <a:solidFill>
                   <a:srgbClr val="667085"/>
                 </a:solidFill>
                 <a:latin typeface="맑은 고딕"/>
               </a:rPr>
-              <a:t>— 연습·검증 격차. 복잡한 모델일수록 크게 벌어졌다.</a:t>
-            </a:r>
-          </a:p>
-          <a:p>
-            <a:pPr algn="l">
-              <a:lnSpc>
-                <a:spcPct val="135000"/>
-              </a:lnSpc>
-              <a:spcAft>
-                <a:spcPts val="400"/>
-              </a:spcAft>
-            </a:pPr>
-            <a:r>
-              <a:rPr sz="1100" b="1">
+              <a:t> · 재조회는 외부 호출 0</a:t>
+            </a:r>
+          </a:p>
+        </p:txBody>
+      </p:sp>
+      <p:sp>
+        <p:nvSpPr>
+          <p:cNvPr id="18" name="TextBox 17"/>
+          <p:cNvSpPr txBox="1"/>
+          <p:nvPr/>
+        </p:nvSpPr>
+        <p:spPr>
+          <a:xfrm>
+            <a:off x="918000" y="2851200"/>
+            <a:ext cx="2052000" cy="727200"/>
+          </a:xfrm>
+          <a:prstGeom prst="rect">
+            <a:avLst/>
+          </a:prstGeom>
+          <a:noFill/>
+        </p:spPr>
+        <p:txBody>
+          <a:bodyPr wrap="square" anchor="t" lIns="0" rIns="0" tIns="0" bIns="0">
+            <a:spAutoFit/>
+          </a:bodyPr>
+          <a:lstStyle/>
+          <a:p>
+            <a:pPr algn="l">
+              <a:lnSpc>
+                <a:spcPct val="136000"/>
+              </a:lnSpc>
+              <a:spcAft>
+                <a:spcPts val="400"/>
+              </a:spcAft>
+            </a:pPr>
+            <a:r>
+              <a:rPr sz="1019" b="1">
                 <a:solidFill>
                   <a:srgbClr val="1A202C"/>
                 </a:solidFill>
                 <a:latin typeface="맑은 고딕"/>
               </a:rPr>
-              <a:t>② 왜를 말할 수 있는가 </a:t>
-            </a:r>
-            <a:r>
-              <a:rPr sz="1100" b="0">
+              <a:t>새벽 수집기가 돌면 라이브 검색이 429 로 죽는다</a:t>
+            </a:r>
+          </a:p>
+        </p:txBody>
+      </p:sp>
+      <p:sp>
+        <p:nvSpPr>
+          <p:cNvPr id="19" name="TextBox 18"/>
+          <p:cNvSpPr txBox="1"/>
+          <p:nvPr/>
+        </p:nvSpPr>
+        <p:spPr>
+          <a:xfrm>
+            <a:off x="3186000" y="2851200"/>
+            <a:ext cx="2520000" cy="727200"/>
+          </a:xfrm>
+          <a:prstGeom prst="rect">
+            <a:avLst/>
+          </a:prstGeom>
+          <a:noFill/>
+        </p:spPr>
+        <p:txBody>
+          <a:bodyPr wrap="square" anchor="t" lIns="0" rIns="0" tIns="0" bIns="0">
+            <a:spAutoFit/>
+          </a:bodyPr>
+          <a:lstStyle/>
+          <a:p>
+            <a:pPr algn="l">
+              <a:lnSpc>
+                <a:spcPct val="136000"/>
+              </a:lnSpc>
+              <a:spcAft>
+                <a:spcPts val="400"/>
+              </a:spcAft>
+            </a:pPr>
+            <a:r>
+              <a:rPr sz="1019" b="0">
                 <a:solidFill>
                   <a:srgbClr val="667085"/>
                 </a:solidFill>
                 <a:latin typeface="맑은 고딕"/>
               </a:rPr>
-              <a:t>— 랜덤포레스트는 중요도는 말해도 방향(+/−)을 못 말한다.</a:t>
-            </a:r>
-          </a:p>
-        </p:txBody>
-      </p:sp>
-      <p:sp>
-        <p:nvSpPr>
-          <p:cNvPr id="13" name="Rectangle 12"/>
+              <a:t>수집기와 서비스가 같은 키의 예산(100회 / 120초)을 나눠 쓴다</a:t>
+            </a:r>
+          </a:p>
+        </p:txBody>
+      </p:sp>
+      <p:sp>
+        <p:nvSpPr>
+          <p:cNvPr id="20" name="TextBox 19"/>
+          <p:cNvSpPr txBox="1"/>
+          <p:nvPr/>
+        </p:nvSpPr>
+        <p:spPr>
+          <a:xfrm>
+            <a:off x="5922000" y="2851200"/>
+            <a:ext cx="2700000" cy="727200"/>
+          </a:xfrm>
+          <a:prstGeom prst="rect">
+            <a:avLst/>
+          </a:prstGeom>
+          <a:noFill/>
+        </p:spPr>
+        <p:txBody>
+          <a:bodyPr wrap="square" anchor="t" lIns="0" rIns="0" tIns="0" bIns="0">
+            <a:spAutoFit/>
+          </a:bodyPr>
+          <a:lstStyle/>
+          <a:p>
+            <a:pPr algn="l">
+              <a:lnSpc>
+                <a:spcPct val="136000"/>
+              </a:lnSpc>
+              <a:spcAft>
+                <a:spcPts val="400"/>
+              </a:spcAft>
+            </a:pPr>
+            <a:r>
+              <a:rPr sz="1019" b="0">
+                <a:solidFill>
+                  <a:srgbClr val="1A202C"/>
+                </a:solidFill>
+                <a:latin typeface="맑은 고딕"/>
+              </a:rPr>
+              <a:t>응답 헤더의 사용량(LAST_APP_COUNT)을 읽어 70을 넘으면 수집기가 20초씩 쉰다(RESERVE)</a:t>
+            </a:r>
+          </a:p>
+        </p:txBody>
+      </p:sp>
+      <p:sp>
+        <p:nvSpPr>
+          <p:cNvPr id="21" name="TextBox 20"/>
+          <p:cNvSpPr txBox="1"/>
+          <p:nvPr/>
+        </p:nvSpPr>
+        <p:spPr>
+          <a:xfrm>
+            <a:off x="8838000" y="2851200"/>
+            <a:ext cx="2472119" cy="727200"/>
+          </a:xfrm>
+          <a:prstGeom prst="rect">
+            <a:avLst/>
+          </a:prstGeom>
+          <a:noFill/>
+        </p:spPr>
+        <p:txBody>
+          <a:bodyPr wrap="square" anchor="t" lIns="0" rIns="0" tIns="0" bIns="0">
+            <a:spAutoFit/>
+          </a:bodyPr>
+          <a:lstStyle/>
+          <a:p>
+            <a:pPr algn="l">
+              <a:lnSpc>
+                <a:spcPct val="136000"/>
+              </a:lnSpc>
+              <a:spcAft>
+                <a:spcPts val="400"/>
+              </a:spcAft>
+            </a:pPr>
+            <a:r>
+              <a:rPr sz="1019" b="1">
+                <a:solidFill>
+                  <a:srgbClr val="1A202C"/>
+                </a:solidFill>
+                <a:latin typeface="맑은 고딕"/>
+              </a:rPr>
+              <a:t>사용자 몫 30 상시 확보</a:t>
+            </a:r>
+            <a:r>
+              <a:rPr sz="1019" b="0">
+                <a:solidFill>
+                  <a:srgbClr val="667085"/>
+                </a:solidFill>
+                <a:latin typeface="맑은 고딕"/>
+              </a:rPr>
+              <a:t> · 밤샘 수집 중에도 검색 정상</a:t>
+            </a:r>
+          </a:p>
+        </p:txBody>
+      </p:sp>
+      <p:sp>
+        <p:nvSpPr>
+          <p:cNvPr id="22" name="Rounded Rectangle 21"/>
           <p:cNvSpPr/>
           <p:nvPr/>
         </p:nvSpPr>
         <p:spPr>
           <a:xfrm>
-            <a:off x="6875999" y="2790000"/>
-            <a:ext cx="4524120" cy="18000"/>
+            <a:off x="792000" y="3621600"/>
+            <a:ext cx="10608120" cy="835200"/>
+          </a:xfrm>
+          <a:prstGeom prst="roundRect">
+            <a:avLst>
+              <a:gd name="adj" fmla="val 4000"/>
+            </a:avLst>
+          </a:prstGeom>
+          <a:solidFill>
+            <a:srgbClr val="F4F6FA"/>
+          </a:solidFill>
+          <a:ln>
+            <a:noFill/>
+          </a:ln>
+          <a:effectLst/>
+        </p:spPr>
+        <p:style>
+          <a:lnRef idx="1">
+            <a:schemeClr val="accent1"/>
+          </a:lnRef>
+          <a:fillRef idx="3">
+            <a:schemeClr val="accent1"/>
+          </a:fillRef>
+          <a:effectRef idx="2">
+            <a:schemeClr val="accent1"/>
+          </a:effectRef>
+          <a:fontRef idx="minor">
+            <a:schemeClr val="lt1"/>
+          </a:fontRef>
+        </p:style>
+        <p:txBody>
+          <a:bodyPr rtlCol="0" anchor="ctr"/>
+          <a:lstStyle/>
+          <a:p>
+            <a:pPr algn="ctr"/>
+          </a:p>
+        </p:txBody>
+      </p:sp>
+      <p:sp>
+        <p:nvSpPr>
+          <p:cNvPr id="23" name="TextBox 22"/>
+          <p:cNvSpPr txBox="1"/>
+          <p:nvPr/>
+        </p:nvSpPr>
+        <p:spPr>
+          <a:xfrm>
+            <a:off x="918000" y="3722400"/>
+            <a:ext cx="2052000" cy="727200"/>
+          </a:xfrm>
+          <a:prstGeom prst="rect">
+            <a:avLst/>
+          </a:prstGeom>
+          <a:noFill/>
+        </p:spPr>
+        <p:txBody>
+          <a:bodyPr wrap="square" anchor="t" lIns="0" rIns="0" tIns="0" bIns="0">
+            <a:spAutoFit/>
+          </a:bodyPr>
+          <a:lstStyle/>
+          <a:p>
+            <a:pPr algn="l">
+              <a:lnSpc>
+                <a:spcPct val="136000"/>
+              </a:lnSpc>
+              <a:spcAft>
+                <a:spcPts val="400"/>
+              </a:spcAft>
+            </a:pPr>
+            <a:r>
+              <a:rPr sz="1019" b="1">
+                <a:solidFill>
+                  <a:srgbClr val="1A202C"/>
+                </a:solidFill>
+                <a:latin typeface="맑은 고딕"/>
+              </a:rPr>
+              <a:t>배포했는데 화면이 그대로다</a:t>
+            </a:r>
+          </a:p>
+        </p:txBody>
+      </p:sp>
+      <p:sp>
+        <p:nvSpPr>
+          <p:cNvPr id="24" name="TextBox 23"/>
+          <p:cNvSpPr txBox="1"/>
+          <p:nvPr/>
+        </p:nvSpPr>
+        <p:spPr>
+          <a:xfrm>
+            <a:off x="3186000" y="3722400"/>
+            <a:ext cx="2520000" cy="727200"/>
+          </a:xfrm>
+          <a:prstGeom prst="rect">
+            <a:avLst/>
+          </a:prstGeom>
+          <a:noFill/>
+        </p:spPr>
+        <p:txBody>
+          <a:bodyPr wrap="square" anchor="t" lIns="0" rIns="0" tIns="0" bIns="0">
+            <a:spAutoFit/>
+          </a:bodyPr>
+          <a:lstStyle/>
+          <a:p>
+            <a:pPr algn="l">
+              <a:lnSpc>
+                <a:spcPct val="136000"/>
+              </a:lnSpc>
+              <a:spcAft>
+                <a:spcPts val="400"/>
+              </a:spcAft>
+            </a:pPr>
+            <a:r>
+              <a:rPr sz="1019" b="0">
+                <a:solidFill>
+                  <a:srgbClr val="667085"/>
+                </a:solidFill>
+                <a:latin typeface="맑은 고딕"/>
+              </a:rPr>
+              <a:t>HTML 응답에 캐시 헤더가 없어 브라우저가 옛 화면을 계속 쓴다</a:t>
+            </a:r>
+          </a:p>
+        </p:txBody>
+      </p:sp>
+      <p:sp>
+        <p:nvSpPr>
+          <p:cNvPr id="25" name="TextBox 24"/>
+          <p:cNvSpPr txBox="1"/>
+          <p:nvPr/>
+        </p:nvSpPr>
+        <p:spPr>
+          <a:xfrm>
+            <a:off x="5922000" y="3722400"/>
+            <a:ext cx="2700000" cy="727200"/>
+          </a:xfrm>
+          <a:prstGeom prst="rect">
+            <a:avLst/>
+          </a:prstGeom>
+          <a:noFill/>
+        </p:spPr>
+        <p:txBody>
+          <a:bodyPr wrap="square" anchor="t" lIns="0" rIns="0" tIns="0" bIns="0">
+            <a:spAutoFit/>
+          </a:bodyPr>
+          <a:lstStyle/>
+          <a:p>
+            <a:pPr algn="l">
+              <a:lnSpc>
+                <a:spcPct val="136000"/>
+              </a:lnSpc>
+              <a:spcAft>
+                <a:spcPts val="400"/>
+              </a:spcAft>
+            </a:pPr>
+            <a:r>
+              <a:rPr sz="1019" b="0">
+                <a:solidFill>
+                  <a:srgbClr val="1A202C"/>
+                </a:solidFill>
+                <a:latin typeface="맑은 고딕"/>
+              </a:rPr>
+              <a:t>text/html 응답에 Cache-Control: no-store 부착(after_request 한 곳)</a:t>
+            </a:r>
+          </a:p>
+        </p:txBody>
+      </p:sp>
+      <p:sp>
+        <p:nvSpPr>
+          <p:cNvPr id="26" name="TextBox 25"/>
+          <p:cNvSpPr txBox="1"/>
+          <p:nvPr/>
+        </p:nvSpPr>
+        <p:spPr>
+          <a:xfrm>
+            <a:off x="8838000" y="3722400"/>
+            <a:ext cx="2472119" cy="727200"/>
+          </a:xfrm>
+          <a:prstGeom prst="rect">
+            <a:avLst/>
+          </a:prstGeom>
+          <a:noFill/>
+        </p:spPr>
+        <p:txBody>
+          <a:bodyPr wrap="square" anchor="t" lIns="0" rIns="0" tIns="0" bIns="0">
+            <a:spAutoFit/>
+          </a:bodyPr>
+          <a:lstStyle/>
+          <a:p>
+            <a:pPr algn="l">
+              <a:lnSpc>
+                <a:spcPct val="136000"/>
+              </a:lnSpc>
+              <a:spcAft>
+                <a:spcPts val="400"/>
+              </a:spcAft>
+            </a:pPr>
+            <a:r>
+              <a:rPr sz="1019" b="1">
+                <a:solidFill>
+                  <a:srgbClr val="1A202C"/>
+                </a:solidFill>
+                <a:latin typeface="맑은 고딕"/>
+              </a:rPr>
+              <a:t>배포 즉시 반영</a:t>
+            </a:r>
+            <a:r>
+              <a:rPr sz="1019" b="0">
+                <a:solidFill>
+                  <a:srgbClr val="667085"/>
+                </a:solidFill>
+                <a:latin typeface="맑은 고딕"/>
+              </a:rPr>
+              <a:t> · 로컬 = 라이브 바이트 동일 확인을 배포 절차에 추가</a:t>
+            </a:r>
+          </a:p>
+        </p:txBody>
+      </p:sp>
+      <p:sp>
+        <p:nvSpPr>
+          <p:cNvPr id="27" name="TextBox 26"/>
+          <p:cNvSpPr txBox="1"/>
+          <p:nvPr/>
+        </p:nvSpPr>
+        <p:spPr>
+          <a:xfrm>
+            <a:off x="918000" y="4593600"/>
+            <a:ext cx="2052000" cy="727200"/>
+          </a:xfrm>
+          <a:prstGeom prst="rect">
+            <a:avLst/>
+          </a:prstGeom>
+          <a:noFill/>
+        </p:spPr>
+        <p:txBody>
+          <a:bodyPr wrap="square" anchor="t" lIns="0" rIns="0" tIns="0" bIns="0">
+            <a:spAutoFit/>
+          </a:bodyPr>
+          <a:lstStyle/>
+          <a:p>
+            <a:pPr algn="l">
+              <a:lnSpc>
+                <a:spcPct val="136000"/>
+              </a:lnSpc>
+              <a:spcAft>
+                <a:spcPts val="400"/>
+              </a:spcAft>
+            </a:pPr>
+            <a:r>
+              <a:rPr sz="1019" b="1">
+                <a:solidFill>
+                  <a:srgbClr val="1A202C"/>
+                </a:solidFill>
+                <a:latin typeface="맑은 고딕"/>
+              </a:rPr>
+              <a:t>태그 "0223" 유저 링크가 죽고, 19자리 경기 ID 끝자리가 바뀐다</a:t>
+            </a:r>
+          </a:p>
+        </p:txBody>
+      </p:sp>
+      <p:sp>
+        <p:nvSpPr>
+          <p:cNvPr id="28" name="TextBox 27"/>
+          <p:cNvSpPr txBox="1"/>
+          <p:nvPr/>
+        </p:nvSpPr>
+        <p:spPr>
+          <a:xfrm>
+            <a:off x="3186000" y="4593600"/>
+            <a:ext cx="2520000" cy="727200"/>
+          </a:xfrm>
+          <a:prstGeom prst="rect">
+            <a:avLst/>
+          </a:prstGeom>
+          <a:noFill/>
+        </p:spPr>
+        <p:txBody>
+          <a:bodyPr wrap="square" anchor="t" lIns="0" rIns="0" tIns="0" bIns="0">
+            <a:spAutoFit/>
+          </a:bodyPr>
+          <a:lstStyle/>
+          <a:p>
+            <a:pPr algn="l">
+              <a:lnSpc>
+                <a:spcPct val="136000"/>
+              </a:lnSpc>
+              <a:spcAft>
+                <a:spcPts val="400"/>
+              </a:spcAft>
+            </a:pPr>
+            <a:r>
+              <a:rPr sz="1019" b="0">
+                <a:solidFill>
+                  <a:srgbClr val="667085"/>
+                </a:solidFill>
+                <a:latin typeface="맑은 고딕"/>
+              </a:rPr>
+              <a:t>CSV → JSON 변환이 숫자처럼 보이는 열을 전부 숫자로 바꿈. JS 안전 정수(2^53) 초과</a:t>
+            </a:r>
+          </a:p>
+        </p:txBody>
+      </p:sp>
+      <p:sp>
+        <p:nvSpPr>
+          <p:cNvPr id="29" name="TextBox 28"/>
+          <p:cNvSpPr txBox="1"/>
+          <p:nvPr/>
+        </p:nvSpPr>
+        <p:spPr>
+          <a:xfrm>
+            <a:off x="5922000" y="4593600"/>
+            <a:ext cx="2700000" cy="727200"/>
+          </a:xfrm>
+          <a:prstGeom prst="rect">
+            <a:avLst/>
+          </a:prstGeom>
+          <a:noFill/>
+        </p:spPr>
+        <p:txBody>
+          <a:bodyPr wrap="square" anchor="t" lIns="0" rIns="0" tIns="0" bIns="0">
+            <a:spAutoFit/>
+          </a:bodyPr>
+          <a:lstStyle/>
+          <a:p>
+            <a:pPr algn="l">
+              <a:lnSpc>
+                <a:spcPct val="136000"/>
+              </a:lnSpc>
+              <a:spcAft>
+                <a:spcPts val="400"/>
+              </a:spcAft>
+            </a:pPr>
+            <a:r>
+              <a:rPr sz="1019" b="0">
+                <a:solidFill>
+                  <a:srgbClr val="1A202C"/>
+                </a:solidFill>
+                <a:latin typeface="맑은 고딕"/>
+              </a:rPr>
+              <a:t>문자열로 남길 열을 명시(TEXT_COLUMNS) + 계약 테스트에 타입 검사 추가</a:t>
+            </a:r>
+          </a:p>
+        </p:txBody>
+      </p:sp>
+      <p:sp>
+        <p:nvSpPr>
+          <p:cNvPr id="30" name="TextBox 29"/>
+          <p:cNvSpPr txBox="1"/>
+          <p:nvPr/>
+        </p:nvSpPr>
+        <p:spPr>
+          <a:xfrm>
+            <a:off x="8838000" y="4593600"/>
+            <a:ext cx="2472119" cy="727200"/>
+          </a:xfrm>
+          <a:prstGeom prst="rect">
+            <a:avLst/>
+          </a:prstGeom>
+          <a:noFill/>
+        </p:spPr>
+        <p:txBody>
+          <a:bodyPr wrap="square" anchor="t" lIns="0" rIns="0" tIns="0" bIns="0">
+            <a:spAutoFit/>
+          </a:bodyPr>
+          <a:lstStyle/>
+          <a:p>
+            <a:pPr algn="l">
+              <a:lnSpc>
+                <a:spcPct val="136000"/>
+              </a:lnSpc>
+              <a:spcAft>
+                <a:spcPts val="400"/>
+              </a:spcAft>
+            </a:pPr>
+            <a:r>
+              <a:rPr sz="1019" b="1">
+                <a:solidFill>
+                  <a:srgbClr val="1A202C"/>
+                </a:solidFill>
+                <a:latin typeface="맑은 고딕"/>
+              </a:rPr>
+              <a:t>같은 부류 재발 차단</a:t>
+            </a:r>
+            <a:r>
+              <a:rPr sz="1019" b="0">
+                <a:solidFill>
+                  <a:srgbClr val="667085"/>
+                </a:solidFill>
+                <a:latin typeface="맑은 고딕"/>
+              </a:rPr>
+              <a:t> · 배포 전 자동 검증 21항목에 편입</a:t>
+            </a:r>
+          </a:p>
+        </p:txBody>
+      </p:sp>
+      <p:sp>
+        <p:nvSpPr>
+          <p:cNvPr id="31" name="Rectangle 30"/>
+          <p:cNvSpPr/>
+          <p:nvPr/>
+        </p:nvSpPr>
+        <p:spPr>
+          <a:xfrm>
+            <a:off x="792000" y="5410800"/>
+            <a:ext cx="10608120" cy="10800"/>
           </a:xfrm>
           <a:prstGeom prst="rect">
             <a:avLst/>
@@ -13650,34 +15672,43 @@
       </p:sp>
       <p:sp>
         <p:nvSpPr>
-          <p:cNvPr id="14" name="TextBox 13"/>
-          <p:cNvSpPr txBox="1"/>
-          <p:nvPr/>
-        </p:nvSpPr>
-        <p:spPr>
-          <a:xfrm>
-            <a:off x="6875999" y="2840400"/>
-            <a:ext cx="1512000" cy="251999"/>
-          </a:xfrm>
-          <a:prstGeom prst="rect">
-            <a:avLst/>
-          </a:prstGeom>
-          <a:noFill/>
-        </p:spPr>
-        <p:txBody>
-          <a:bodyPr wrap="square" anchor="t" lIns="0" rIns="0" tIns="0" bIns="0">
-            <a:spAutoFit/>
-          </a:bodyPr>
-          <a:lstStyle/>
-          <a:p>
-            <a:pPr algn="l">
-              <a:lnSpc>
-                <a:spcPct val="120000"/>
-              </a:lnSpc>
-              <a:spcAft>
-                <a:spcPts val="400"/>
-              </a:spcAft>
-            </a:pPr>
+          <p:cNvPr id="32" name="TextBox 31"/>
+          <p:cNvSpPr txBox="1"/>
+          <p:nvPr/>
+        </p:nvSpPr>
+        <p:spPr>
+          <a:xfrm>
+            <a:off x="792000" y="5554800"/>
+            <a:ext cx="10608120" cy="324000"/>
+          </a:xfrm>
+          <a:prstGeom prst="rect">
+            <a:avLst/>
+          </a:prstGeom>
+          <a:noFill/>
+        </p:spPr>
+        <p:txBody>
+          <a:bodyPr wrap="square" anchor="t" lIns="0" rIns="0" tIns="0" bIns="0">
+            <a:spAutoFit/>
+          </a:bodyPr>
+          <a:lstStyle/>
+          <a:p>
+            <a:pPr algn="l">
+              <a:lnSpc>
+                <a:spcPct val="138000"/>
+              </a:lnSpc>
+              <a:spcAft>
+                <a:spcPts val="400"/>
+              </a:spcAft>
+            </a:pPr>
+            <a:r>
+              <a:rPr sz="1050" b="1">
+                <a:solidFill>
+                  <a:srgbClr val="1A202C"/>
+                </a:solidFill>
+                <a:latin typeface="맑은 고딕"/>
+              </a:rPr>
+              <a:t>공통점 — </a:t>
+            </a:r>
             <a:r>
               <a:rPr sz="1050" b="0">
                 <a:solidFill>
@@ -13685,866 +15716,7 @@
                 </a:solidFill>
                 <a:latin typeface="맑은 고딕"/>
               </a:rPr>
-              <a:t>대표 정확도</a:t>
-            </a:r>
-          </a:p>
-        </p:txBody>
-      </p:sp>
-      <p:sp>
-        <p:nvSpPr>
-          <p:cNvPr id="15" name="TextBox 14"/>
-          <p:cNvSpPr txBox="1"/>
-          <p:nvPr/>
-        </p:nvSpPr>
-        <p:spPr>
-          <a:xfrm>
-            <a:off x="8387999" y="2840400"/>
-            <a:ext cx="1800000" cy="251999"/>
-          </a:xfrm>
-          <a:prstGeom prst="rect">
-            <a:avLst/>
-          </a:prstGeom>
-          <a:noFill/>
-        </p:spPr>
-        <p:txBody>
-          <a:bodyPr wrap="square" anchor="t" lIns="0" rIns="0" tIns="0" bIns="0">
-            <a:spAutoFit/>
-          </a:bodyPr>
-          <a:lstStyle/>
-          <a:p>
-            <a:pPr algn="l">
-              <a:lnSpc>
-                <a:spcPct val="120000"/>
-              </a:lnSpc>
-              <a:spcAft>
-                <a:spcPts val="400"/>
-              </a:spcAft>
-            </a:pPr>
-            <a:r>
-              <a:rPr sz="1150" b="1">
-                <a:solidFill>
-                  <a:srgbClr val="1A202C"/>
-                </a:solidFill>
-                <a:latin typeface="맑은 고딕"/>
-              </a:rPr>
-              <a:t>0.7366 ± 0.0081</a:t>
-            </a:r>
-          </a:p>
-        </p:txBody>
-      </p:sp>
-      <p:sp>
-        <p:nvSpPr>
-          <p:cNvPr id="16" name="TextBox 15"/>
-          <p:cNvSpPr txBox="1"/>
-          <p:nvPr/>
-        </p:nvSpPr>
-        <p:spPr>
-          <a:xfrm>
-            <a:off x="10224000" y="2840400"/>
-            <a:ext cx="1176119" cy="251999"/>
-          </a:xfrm>
-          <a:prstGeom prst="rect">
-            <a:avLst/>
-          </a:prstGeom>
-          <a:noFill/>
-        </p:spPr>
-        <p:txBody>
-          <a:bodyPr wrap="square" anchor="t" lIns="0" rIns="0" tIns="0" bIns="0">
-            <a:spAutoFit/>
-          </a:bodyPr>
-          <a:lstStyle/>
-          <a:p>
-            <a:pPr algn="l">
-              <a:lnSpc>
-                <a:spcPct val="120000"/>
-              </a:lnSpc>
-              <a:spcAft>
-                <a:spcPts val="400"/>
-              </a:spcAft>
-            </a:pPr>
-            <a:r>
-              <a:rPr sz="950" b="0">
-                <a:solidFill>
-                  <a:srgbClr val="98A2B3"/>
-                </a:solidFill>
-                <a:latin typeface="맑은 고딕"/>
-              </a:rPr>
-              <a:t>분할 10회 반복 평균</a:t>
-            </a:r>
-          </a:p>
-        </p:txBody>
-      </p:sp>
-      <p:sp>
-        <p:nvSpPr>
-          <p:cNvPr id="17" name="Rectangle 16"/>
-          <p:cNvSpPr/>
-          <p:nvPr/>
-        </p:nvSpPr>
-        <p:spPr>
-          <a:xfrm>
-            <a:off x="6875999" y="3063600"/>
-            <a:ext cx="4524120" cy="10800"/>
-          </a:xfrm>
-          <a:prstGeom prst="rect">
-            <a:avLst/>
-          </a:prstGeom>
-          <a:solidFill>
-            <a:srgbClr val="E4E8EF"/>
-          </a:solidFill>
-          <a:ln>
-            <a:noFill/>
-          </a:ln>
-          <a:effectLst/>
-        </p:spPr>
-        <p:style>
-          <a:lnRef idx="1">
-            <a:schemeClr val="accent1"/>
-          </a:lnRef>
-          <a:fillRef idx="3">
-            <a:schemeClr val="accent1"/>
-          </a:fillRef>
-          <a:effectRef idx="2">
-            <a:schemeClr val="accent1"/>
-          </a:effectRef>
-          <a:fontRef idx="minor">
-            <a:schemeClr val="lt1"/>
-          </a:fontRef>
-        </p:style>
-        <p:txBody>
-          <a:bodyPr rtlCol="0" anchor="ctr"/>
-          <a:lstStyle/>
-          <a:p>
-            <a:pPr algn="ctr"/>
-          </a:p>
-        </p:txBody>
-      </p:sp>
-      <p:sp>
-        <p:nvSpPr>
-          <p:cNvPr id="18" name="TextBox 17"/>
-          <p:cNvSpPr txBox="1"/>
-          <p:nvPr/>
-        </p:nvSpPr>
-        <p:spPr>
-          <a:xfrm>
-            <a:off x="6875999" y="3114000"/>
-            <a:ext cx="1512000" cy="251999"/>
-          </a:xfrm>
-          <a:prstGeom prst="rect">
-            <a:avLst/>
-          </a:prstGeom>
-          <a:noFill/>
-        </p:spPr>
-        <p:txBody>
-          <a:bodyPr wrap="square" anchor="t" lIns="0" rIns="0" tIns="0" bIns="0">
-            <a:spAutoFit/>
-          </a:bodyPr>
-          <a:lstStyle/>
-          <a:p>
-            <a:pPr algn="l">
-              <a:lnSpc>
-                <a:spcPct val="120000"/>
-              </a:lnSpc>
-              <a:spcAft>
-                <a:spcPts val="400"/>
-              </a:spcAft>
-            </a:pPr>
-            <a:r>
-              <a:rPr sz="1050" b="0">
-                <a:solidFill>
-                  <a:srgbClr val="667085"/>
-                </a:solidFill>
-                <a:latin typeface="맑은 고딕"/>
-              </a:rPr>
-              <a:t>단일 홀드아웃</a:t>
-            </a:r>
-          </a:p>
-        </p:txBody>
-      </p:sp>
-      <p:sp>
-        <p:nvSpPr>
-          <p:cNvPr id="19" name="TextBox 18"/>
-          <p:cNvSpPr txBox="1"/>
-          <p:nvPr/>
-        </p:nvSpPr>
-        <p:spPr>
-          <a:xfrm>
-            <a:off x="8387999" y="3114000"/>
-            <a:ext cx="1800000" cy="251999"/>
-          </a:xfrm>
-          <a:prstGeom prst="rect">
-            <a:avLst/>
-          </a:prstGeom>
-          <a:noFill/>
-        </p:spPr>
-        <p:txBody>
-          <a:bodyPr wrap="square" anchor="t" lIns="0" rIns="0" tIns="0" bIns="0">
-            <a:spAutoFit/>
-          </a:bodyPr>
-          <a:lstStyle/>
-          <a:p>
-            <a:pPr algn="l">
-              <a:lnSpc>
-                <a:spcPct val="120000"/>
-              </a:lnSpc>
-              <a:spcAft>
-                <a:spcPts val="400"/>
-              </a:spcAft>
-            </a:pPr>
-            <a:r>
-              <a:rPr sz="1150" b="1">
-                <a:solidFill>
-                  <a:srgbClr val="1A202C"/>
-                </a:solidFill>
-                <a:latin typeface="맑은 고딕"/>
-              </a:rPr>
-              <a:t>0.7394</a:t>
-            </a:r>
-          </a:p>
-        </p:txBody>
-      </p:sp>
-      <p:sp>
-        <p:nvSpPr>
-          <p:cNvPr id="20" name="TextBox 19"/>
-          <p:cNvSpPr txBox="1"/>
-          <p:nvPr/>
-        </p:nvSpPr>
-        <p:spPr>
-          <a:xfrm>
-            <a:off x="10224000" y="3114000"/>
-            <a:ext cx="1176119" cy="251999"/>
-          </a:xfrm>
-          <a:prstGeom prst="rect">
-            <a:avLst/>
-          </a:prstGeom>
-          <a:noFill/>
-        </p:spPr>
-        <p:txBody>
-          <a:bodyPr wrap="square" anchor="t" lIns="0" rIns="0" tIns="0" bIns="0">
-            <a:spAutoFit/>
-          </a:bodyPr>
-          <a:lstStyle/>
-          <a:p>
-            <a:pPr algn="l">
-              <a:lnSpc>
-                <a:spcPct val="120000"/>
-              </a:lnSpc>
-              <a:spcAft>
-                <a:spcPts val="400"/>
-              </a:spcAft>
-            </a:pPr>
-            <a:r>
-              <a:rPr sz="950" b="0">
-                <a:solidFill>
-                  <a:srgbClr val="98A2B3"/>
-                </a:solidFill>
-                <a:latin typeface="맑은 고딕"/>
-              </a:rPr>
-              <a:t>시드 42 · 찍기 0.5010</a:t>
-            </a:r>
-          </a:p>
-        </p:txBody>
-      </p:sp>
-      <p:sp>
-        <p:nvSpPr>
-          <p:cNvPr id="21" name="Rectangle 20"/>
-          <p:cNvSpPr/>
-          <p:nvPr/>
-        </p:nvSpPr>
-        <p:spPr>
-          <a:xfrm>
-            <a:off x="6875999" y="3337200"/>
-            <a:ext cx="4524120" cy="10800"/>
-          </a:xfrm>
-          <a:prstGeom prst="rect">
-            <a:avLst/>
-          </a:prstGeom>
-          <a:solidFill>
-            <a:srgbClr val="E4E8EF"/>
-          </a:solidFill>
-          <a:ln>
-            <a:noFill/>
-          </a:ln>
-          <a:effectLst/>
-        </p:spPr>
-        <p:style>
-          <a:lnRef idx="1">
-            <a:schemeClr val="accent1"/>
-          </a:lnRef>
-          <a:fillRef idx="3">
-            <a:schemeClr val="accent1"/>
-          </a:fillRef>
-          <a:effectRef idx="2">
-            <a:schemeClr val="accent1"/>
-          </a:effectRef>
-          <a:fontRef idx="minor">
-            <a:schemeClr val="lt1"/>
-          </a:fontRef>
-        </p:style>
-        <p:txBody>
-          <a:bodyPr rtlCol="0" anchor="ctr"/>
-          <a:lstStyle/>
-          <a:p>
-            <a:pPr algn="ctr"/>
-          </a:p>
-        </p:txBody>
-      </p:sp>
-      <p:sp>
-        <p:nvSpPr>
-          <p:cNvPr id="22" name="TextBox 21"/>
-          <p:cNvSpPr txBox="1"/>
-          <p:nvPr/>
-        </p:nvSpPr>
-        <p:spPr>
-          <a:xfrm>
-            <a:off x="6875999" y="3387600"/>
-            <a:ext cx="1512000" cy="251999"/>
-          </a:xfrm>
-          <a:prstGeom prst="rect">
-            <a:avLst/>
-          </a:prstGeom>
-          <a:noFill/>
-        </p:spPr>
-        <p:txBody>
-          <a:bodyPr wrap="square" anchor="t" lIns="0" rIns="0" tIns="0" bIns="0">
-            <a:spAutoFit/>
-          </a:bodyPr>
-          <a:lstStyle/>
-          <a:p>
-            <a:pPr algn="l">
-              <a:lnSpc>
-                <a:spcPct val="120000"/>
-              </a:lnSpc>
-              <a:spcAft>
-                <a:spcPts val="400"/>
-              </a:spcAft>
-            </a:pPr>
-            <a:r>
-              <a:rPr sz="1050" b="0">
-                <a:solidFill>
-                  <a:srgbClr val="667085"/>
-                </a:solidFill>
-                <a:latin typeface="맑은 고딕"/>
-              </a:rPr>
-              <a:t>AUC</a:t>
-            </a:r>
-          </a:p>
-        </p:txBody>
-      </p:sp>
-      <p:sp>
-        <p:nvSpPr>
-          <p:cNvPr id="23" name="TextBox 22"/>
-          <p:cNvSpPr txBox="1"/>
-          <p:nvPr/>
-        </p:nvSpPr>
-        <p:spPr>
-          <a:xfrm>
-            <a:off x="8387999" y="3387600"/>
-            <a:ext cx="1800000" cy="251999"/>
-          </a:xfrm>
-          <a:prstGeom prst="rect">
-            <a:avLst/>
-          </a:prstGeom>
-          <a:noFill/>
-        </p:spPr>
-        <p:txBody>
-          <a:bodyPr wrap="square" anchor="t" lIns="0" rIns="0" tIns="0" bIns="0">
-            <a:spAutoFit/>
-          </a:bodyPr>
-          <a:lstStyle/>
-          <a:p>
-            <a:pPr algn="l">
-              <a:lnSpc>
-                <a:spcPct val="120000"/>
-              </a:lnSpc>
-              <a:spcAft>
-                <a:spcPts val="400"/>
-              </a:spcAft>
-            </a:pPr>
-            <a:r>
-              <a:rPr sz="1150" b="1">
-                <a:solidFill>
-                  <a:srgbClr val="1A202C"/>
-                </a:solidFill>
-                <a:latin typeface="맑은 고딕"/>
-              </a:rPr>
-              <a:t>0.8150</a:t>
-            </a:r>
-          </a:p>
-        </p:txBody>
-      </p:sp>
-      <p:sp>
-        <p:nvSpPr>
-          <p:cNvPr id="24" name="TextBox 23"/>
-          <p:cNvSpPr txBox="1"/>
-          <p:nvPr/>
-        </p:nvSpPr>
-        <p:spPr>
-          <a:xfrm>
-            <a:off x="10224000" y="3387600"/>
-            <a:ext cx="1176119" cy="251999"/>
-          </a:xfrm>
-          <a:prstGeom prst="rect">
-            <a:avLst/>
-          </a:prstGeom>
-          <a:noFill/>
-        </p:spPr>
-        <p:txBody>
-          <a:bodyPr wrap="square" anchor="t" lIns="0" rIns="0" tIns="0" bIns="0">
-            <a:spAutoFit/>
-          </a:bodyPr>
-          <a:lstStyle/>
-          <a:p>
-            <a:pPr algn="l">
-              <a:lnSpc>
-                <a:spcPct val="120000"/>
-              </a:lnSpc>
-              <a:spcAft>
-                <a:spcPts val="400"/>
-              </a:spcAft>
-            </a:pPr>
-            <a:r>
-              <a:rPr sz="950" b="0">
-                <a:solidFill>
-                  <a:srgbClr val="98A2B3"/>
-                </a:solidFill>
-                <a:latin typeface="맑은 고딕"/>
-              </a:rPr>
-              <a:t>순위 능력</a:t>
-            </a:r>
-          </a:p>
-        </p:txBody>
-      </p:sp>
-      <p:sp>
-        <p:nvSpPr>
-          <p:cNvPr id="25" name="Rectangle 24"/>
-          <p:cNvSpPr/>
-          <p:nvPr/>
-        </p:nvSpPr>
-        <p:spPr>
-          <a:xfrm>
-            <a:off x="6875999" y="3610800"/>
-            <a:ext cx="4524120" cy="10800"/>
-          </a:xfrm>
-          <a:prstGeom prst="rect">
-            <a:avLst/>
-          </a:prstGeom>
-          <a:solidFill>
-            <a:srgbClr val="E4E8EF"/>
-          </a:solidFill>
-          <a:ln>
-            <a:noFill/>
-          </a:ln>
-          <a:effectLst/>
-        </p:spPr>
-        <p:style>
-          <a:lnRef idx="1">
-            <a:schemeClr val="accent1"/>
-          </a:lnRef>
-          <a:fillRef idx="3">
-            <a:schemeClr val="accent1"/>
-          </a:fillRef>
-          <a:effectRef idx="2">
-            <a:schemeClr val="accent1"/>
-          </a:effectRef>
-          <a:fontRef idx="minor">
-            <a:schemeClr val="lt1"/>
-          </a:fontRef>
-        </p:style>
-        <p:txBody>
-          <a:bodyPr rtlCol="0" anchor="ctr"/>
-          <a:lstStyle/>
-          <a:p>
-            <a:pPr algn="ctr"/>
-          </a:p>
-        </p:txBody>
-      </p:sp>
-      <p:sp>
-        <p:nvSpPr>
-          <p:cNvPr id="26" name="TextBox 25"/>
-          <p:cNvSpPr txBox="1"/>
-          <p:nvPr/>
-        </p:nvSpPr>
-        <p:spPr>
-          <a:xfrm>
-            <a:off x="6875999" y="3661200"/>
-            <a:ext cx="1512000" cy="251999"/>
-          </a:xfrm>
-          <a:prstGeom prst="rect">
-            <a:avLst/>
-          </a:prstGeom>
-          <a:noFill/>
-        </p:spPr>
-        <p:txBody>
-          <a:bodyPr wrap="square" anchor="t" lIns="0" rIns="0" tIns="0" bIns="0">
-            <a:spAutoFit/>
-          </a:bodyPr>
-          <a:lstStyle/>
-          <a:p>
-            <a:pPr algn="l">
-              <a:lnSpc>
-                <a:spcPct val="120000"/>
-              </a:lnSpc>
-              <a:spcAft>
-                <a:spcPts val="400"/>
-              </a:spcAft>
-            </a:pPr>
-            <a:r>
-              <a:rPr sz="1050" b="0">
-                <a:solidFill>
-                  <a:srgbClr val="667085"/>
-                </a:solidFill>
-                <a:latin typeface="맑은 고딕"/>
-              </a:rPr>
-              <a:t>F1 / Brier</a:t>
-            </a:r>
-          </a:p>
-        </p:txBody>
-      </p:sp>
-      <p:sp>
-        <p:nvSpPr>
-          <p:cNvPr id="27" name="TextBox 26"/>
-          <p:cNvSpPr txBox="1"/>
-          <p:nvPr/>
-        </p:nvSpPr>
-        <p:spPr>
-          <a:xfrm>
-            <a:off x="8387999" y="3661200"/>
-            <a:ext cx="1800000" cy="251999"/>
-          </a:xfrm>
-          <a:prstGeom prst="rect">
-            <a:avLst/>
-          </a:prstGeom>
-          <a:noFill/>
-        </p:spPr>
-        <p:txBody>
-          <a:bodyPr wrap="square" anchor="t" lIns="0" rIns="0" tIns="0" bIns="0">
-            <a:spAutoFit/>
-          </a:bodyPr>
-          <a:lstStyle/>
-          <a:p>
-            <a:pPr algn="l">
-              <a:lnSpc>
-                <a:spcPct val="120000"/>
-              </a:lnSpc>
-              <a:spcAft>
-                <a:spcPts val="400"/>
-              </a:spcAft>
-            </a:pPr>
-            <a:r>
-              <a:rPr sz="1150" b="1">
-                <a:solidFill>
-                  <a:srgbClr val="1A202C"/>
-                </a:solidFill>
-                <a:latin typeface="맑은 고딕"/>
-              </a:rPr>
-              <a:t>0.7352 / 0.1756</a:t>
-            </a:r>
-          </a:p>
-        </p:txBody>
-      </p:sp>
-      <p:sp>
-        <p:nvSpPr>
-          <p:cNvPr id="28" name="TextBox 27"/>
-          <p:cNvSpPr txBox="1"/>
-          <p:nvPr/>
-        </p:nvSpPr>
-        <p:spPr>
-          <a:xfrm>
-            <a:off x="10224000" y="3661200"/>
-            <a:ext cx="1176119" cy="251999"/>
-          </a:xfrm>
-          <a:prstGeom prst="rect">
-            <a:avLst/>
-          </a:prstGeom>
-          <a:noFill/>
-        </p:spPr>
-        <p:txBody>
-          <a:bodyPr wrap="square" anchor="t" lIns="0" rIns="0" tIns="0" bIns="0">
-            <a:spAutoFit/>
-          </a:bodyPr>
-          <a:lstStyle/>
-          <a:p>
-            <a:pPr algn="l">
-              <a:lnSpc>
-                <a:spcPct val="120000"/>
-              </a:lnSpc>
-              <a:spcAft>
-                <a:spcPts val="400"/>
-              </a:spcAft>
-            </a:pPr>
-            <a:r>
-              <a:rPr sz="950" b="0">
-                <a:solidFill>
-                  <a:srgbClr val="98A2B3"/>
-                </a:solidFill>
-                <a:latin typeface="맑은 고딕"/>
-              </a:rPr>
-              <a:t>쏠림 · 확률 정확도</a:t>
-            </a:r>
-          </a:p>
-        </p:txBody>
-      </p:sp>
-      <p:sp>
-        <p:nvSpPr>
-          <p:cNvPr id="29" name="Rectangle 28"/>
-          <p:cNvSpPr/>
-          <p:nvPr/>
-        </p:nvSpPr>
-        <p:spPr>
-          <a:xfrm>
-            <a:off x="6875999" y="3884399"/>
-            <a:ext cx="4524120" cy="10800"/>
-          </a:xfrm>
-          <a:prstGeom prst="rect">
-            <a:avLst/>
-          </a:prstGeom>
-          <a:solidFill>
-            <a:srgbClr val="E4E8EF"/>
-          </a:solidFill>
-          <a:ln>
-            <a:noFill/>
-          </a:ln>
-          <a:effectLst/>
-        </p:spPr>
-        <p:style>
-          <a:lnRef idx="1">
-            <a:schemeClr val="accent1"/>
-          </a:lnRef>
-          <a:fillRef idx="3">
-            <a:schemeClr val="accent1"/>
-          </a:fillRef>
-          <a:effectRef idx="2">
-            <a:schemeClr val="accent1"/>
-          </a:effectRef>
-          <a:fontRef idx="minor">
-            <a:schemeClr val="lt1"/>
-          </a:fontRef>
-        </p:style>
-        <p:txBody>
-          <a:bodyPr rtlCol="0" anchor="ctr"/>
-          <a:lstStyle/>
-          <a:p>
-            <a:pPr algn="ctr"/>
-          </a:p>
-        </p:txBody>
-      </p:sp>
-      <p:sp>
-        <p:nvSpPr>
-          <p:cNvPr id="30" name="TextBox 29"/>
-          <p:cNvSpPr txBox="1"/>
-          <p:nvPr/>
-        </p:nvSpPr>
-        <p:spPr>
-          <a:xfrm>
-            <a:off x="6875999" y="3934800"/>
-            <a:ext cx="1512000" cy="251999"/>
-          </a:xfrm>
-          <a:prstGeom prst="rect">
-            <a:avLst/>
-          </a:prstGeom>
-          <a:noFill/>
-        </p:spPr>
-        <p:txBody>
-          <a:bodyPr wrap="square" anchor="t" lIns="0" rIns="0" tIns="0" bIns="0">
-            <a:spAutoFit/>
-          </a:bodyPr>
-          <a:lstStyle/>
-          <a:p>
-            <a:pPr algn="l">
-              <a:lnSpc>
-                <a:spcPct val="120000"/>
-              </a:lnSpc>
-              <a:spcAft>
-                <a:spcPts val="400"/>
-              </a:spcAft>
-            </a:pPr>
-            <a:r>
-              <a:rPr sz="1050" b="0">
-                <a:solidFill>
-                  <a:srgbClr val="667085"/>
-                </a:solidFill>
-                <a:latin typeface="맑은 고딕"/>
-              </a:rPr>
-              <a:t>교차검증</a:t>
-            </a:r>
-          </a:p>
-        </p:txBody>
-      </p:sp>
-      <p:sp>
-        <p:nvSpPr>
-          <p:cNvPr id="31" name="TextBox 30"/>
-          <p:cNvSpPr txBox="1"/>
-          <p:nvPr/>
-        </p:nvSpPr>
-        <p:spPr>
-          <a:xfrm>
-            <a:off x="8387999" y="3934800"/>
-            <a:ext cx="1800000" cy="251999"/>
-          </a:xfrm>
-          <a:prstGeom prst="rect">
-            <a:avLst/>
-          </a:prstGeom>
-          <a:noFill/>
-        </p:spPr>
-        <p:txBody>
-          <a:bodyPr wrap="square" anchor="t" lIns="0" rIns="0" tIns="0" bIns="0">
-            <a:spAutoFit/>
-          </a:bodyPr>
-          <a:lstStyle/>
-          <a:p>
-            <a:pPr algn="l">
-              <a:lnSpc>
-                <a:spcPct val="120000"/>
-              </a:lnSpc>
-              <a:spcAft>
-                <a:spcPts val="400"/>
-              </a:spcAft>
-            </a:pPr>
-            <a:r>
-              <a:rPr sz="1150" b="1">
-                <a:solidFill>
-                  <a:srgbClr val="1A202C"/>
-                </a:solidFill>
-                <a:latin typeface="맑은 고딕"/>
-              </a:rPr>
-              <a:t>0.7315 ± 0.0153</a:t>
-            </a:r>
-          </a:p>
-        </p:txBody>
-      </p:sp>
-      <p:sp>
-        <p:nvSpPr>
-          <p:cNvPr id="32" name="TextBox 31"/>
-          <p:cNvSpPr txBox="1"/>
-          <p:nvPr/>
-        </p:nvSpPr>
-        <p:spPr>
-          <a:xfrm>
-            <a:off x="10224000" y="3934800"/>
-            <a:ext cx="1176119" cy="251999"/>
-          </a:xfrm>
-          <a:prstGeom prst="rect">
-            <a:avLst/>
-          </a:prstGeom>
-          <a:noFill/>
-        </p:spPr>
-        <p:txBody>
-          <a:bodyPr wrap="square" anchor="t" lIns="0" rIns="0" tIns="0" bIns="0">
-            <a:spAutoFit/>
-          </a:bodyPr>
-          <a:lstStyle/>
-          <a:p>
-            <a:pPr algn="l">
-              <a:lnSpc>
-                <a:spcPct val="120000"/>
-              </a:lnSpc>
-              <a:spcAft>
-                <a:spcPts val="400"/>
-              </a:spcAft>
-            </a:pPr>
-            <a:r>
-              <a:rPr sz="950" b="0">
-                <a:solidFill>
-                  <a:srgbClr val="98A2B3"/>
-                </a:solidFill>
-                <a:latin typeface="맑은 고딕"/>
-              </a:rPr>
-              <a:t>5-fold · 격차 +0.0022</a:t>
-            </a:r>
-          </a:p>
-        </p:txBody>
-      </p:sp>
-      <p:sp>
-        <p:nvSpPr>
-          <p:cNvPr id="33" name="Rectangle 32"/>
-          <p:cNvSpPr/>
-          <p:nvPr/>
-        </p:nvSpPr>
-        <p:spPr>
-          <a:xfrm>
-            <a:off x="6875999" y="4157999"/>
-            <a:ext cx="4524120" cy="10800"/>
-          </a:xfrm>
-          <a:prstGeom prst="rect">
-            <a:avLst/>
-          </a:prstGeom>
-          <a:solidFill>
-            <a:srgbClr val="E4E8EF"/>
-          </a:solidFill>
-          <a:ln>
-            <a:noFill/>
-          </a:ln>
-          <a:effectLst/>
-        </p:spPr>
-        <p:style>
-          <a:lnRef idx="1">
-            <a:schemeClr val="accent1"/>
-          </a:lnRef>
-          <a:fillRef idx="3">
-            <a:schemeClr val="accent1"/>
-          </a:fillRef>
-          <a:effectRef idx="2">
-            <a:schemeClr val="accent1"/>
-          </a:effectRef>
-          <a:fontRef idx="minor">
-            <a:schemeClr val="lt1"/>
-          </a:fontRef>
-        </p:style>
-        <p:txBody>
-          <a:bodyPr rtlCol="0" anchor="ctr"/>
-          <a:lstStyle/>
-          <a:p>
-            <a:pPr algn="ctr"/>
-          </a:p>
-        </p:txBody>
-      </p:sp>
-      <p:sp>
-        <p:nvSpPr>
-          <p:cNvPr id="34" name="TextBox 33"/>
-          <p:cNvSpPr txBox="1"/>
-          <p:nvPr/>
-        </p:nvSpPr>
-        <p:spPr>
-          <a:xfrm>
-            <a:off x="6875999" y="4338000"/>
-            <a:ext cx="4524120" cy="576000"/>
-          </a:xfrm>
-          <a:prstGeom prst="rect">
-            <a:avLst/>
-          </a:prstGeom>
-          <a:noFill/>
-        </p:spPr>
-        <p:txBody>
-          <a:bodyPr wrap="square" anchor="t" lIns="0" rIns="0" tIns="0" bIns="0">
-            <a:spAutoFit/>
-          </a:bodyPr>
-          <a:lstStyle/>
-          <a:p>
-            <a:pPr algn="l">
-              <a:lnSpc>
-                <a:spcPct val="138000"/>
-              </a:lnSpc>
-              <a:spcAft>
-                <a:spcPts val="400"/>
-              </a:spcAft>
-            </a:pPr>
-            <a:r>
-              <a:rPr sz="1050" b="1">
-                <a:solidFill>
-                  <a:srgbClr val="1A202C"/>
-                </a:solidFill>
-                <a:latin typeface="맑은 고딕"/>
-              </a:rPr>
-              <a:t>일반화 — </a:t>
-            </a:r>
-            <a:r>
-              <a:rPr sz="1050" b="0">
-                <a:solidFill>
-                  <a:srgbClr val="667085"/>
-                </a:solidFill>
-                <a:latin typeface="맑은 고딕"/>
-              </a:rPr>
-              <a:t>2026년 아이언~다이아 1,399판을 직접 수집해 채점: 저티어 0.685 vs 고티어 0.707, p=0.407. "차이가 없다"가 아니라 "큰 차이는 확인되지 않았다"까지만 적었다(티어당 150~312판).</a:t>
+              <a:t>증상을 덮는 대신 원인을 찾았고, 고친 뒤에는 같은 부류가 다시 오면 테스트가 먼저 잡도록 했다. 네 건 모두 재현 절차와 함께 docs/ 에 기록.</a:t>
             </a:r>
           </a:p>
         </p:txBody>
@@ -14648,7 +15820,7 @@
                 </a:solidFill>
                 <a:latin typeface="맑은 고딕"/>
               </a:rPr>
-              <a:t>SERVICE</a:t>
+              <a:t>RESULTS</a:t>
             </a:r>
           </a:p>
         </p:txBody>
@@ -14690,7 +15862,7 @@
                 </a:solidFill>
                 <a:latin typeface="맑은 고딕"/>
               </a:rPr>
-              <a:t>모델이 화면이 되기까지 — p4.sumzip.com</a:t>
+              <a:t>왜 로지스틱인가, 그리고 얼마나 맞히나</a:t>
             </a:r>
           </a:p>
         </p:txBody>
@@ -14732,7 +15904,7 @@
                 </a:solidFill>
                 <a:latin typeface="맑은 고딕"/>
               </a:rPr>
-              <a:t>탭 4개 · 운영 중</a:t>
+              <a:t>홀드아웃 1,976판 · 분할 10회 반복</a:t>
             </a:r>
           </a:p>
         </p:txBody>
@@ -14829,8 +16001,8 @@
         </p:nvSpPr>
         <p:spPr>
           <a:xfrm>
-            <a:off x="748800" y="1558800"/>
-            <a:ext cx="6274246" cy="4010400"/>
+            <a:off x="748800" y="1612799"/>
+            <a:ext cx="5702400" cy="3497639"/>
           </a:xfrm>
           <a:prstGeom prst="roundRect">
             <a:avLst>
@@ -14871,7 +16043,7 @@
       </p:sp>
       <p:pic>
         <p:nvPicPr>
-          <p:cNvPr id="9" name="Picture 8" descr="svc_shot.png"/>
+          <p:cNvPr id="9" name="Picture 8" descr="model_choice_1_scores.png"/>
           <p:cNvPicPr>
             <a:picLocks noChangeAspect="1"/>
           </p:cNvPicPr>
@@ -14885,8 +16057,8 @@
         </p:blipFill>
         <p:spPr>
           <a:xfrm>
-            <a:off x="792000" y="1602000"/>
-            <a:ext cx="6187846" cy="3924000"/>
+            <a:off x="792000" y="1655999"/>
+            <a:ext cx="5616000" cy="3411239"/>
           </a:xfrm>
           <a:prstGeom prst="rect">
             <a:avLst/>
@@ -14901,8 +16073,8 @@
         </p:nvSpPr>
         <p:spPr>
           <a:xfrm>
-            <a:off x="7375846" y="1692000"/>
-            <a:ext cx="4024273" cy="198000"/>
+            <a:off x="792000" y="5229239"/>
+            <a:ext cx="5616000" cy="216000"/>
           </a:xfrm>
           <a:prstGeom prst="rect">
             <a:avLst/>
@@ -14924,69 +16096,404 @@
               </a:spcAft>
             </a:pPr>
             <a:r>
+              <a:rPr sz="950" b="0">
+                <a:solidFill>
+                  <a:srgbClr val="98A2B3"/>
+                </a:solidFill>
+                <a:latin typeface="맑은 고딕"/>
+              </a:rPr>
+              <a:t>후보 8종 교차검증 — 1위와 2위가 0.003 차이, 점수로는 못 고른다</a:t>
+            </a:r>
+          </a:p>
+        </p:txBody>
+      </p:sp>
+      <p:sp>
+        <p:nvSpPr>
+          <p:cNvPr id="11" name="TextBox 10"/>
+          <p:cNvSpPr txBox="1"/>
+          <p:nvPr/>
+        </p:nvSpPr>
+        <p:spPr>
+          <a:xfrm>
+            <a:off x="6875999" y="1692000"/>
+            <a:ext cx="4524120" cy="216000"/>
+          </a:xfrm>
+          <a:prstGeom prst="rect">
+            <a:avLst/>
+          </a:prstGeom>
+          <a:noFill/>
+        </p:spPr>
+        <p:txBody>
+          <a:bodyPr wrap="square" anchor="t" lIns="0" rIns="0" tIns="0" bIns="0">
+            <a:spAutoFit/>
+          </a:bodyPr>
+          <a:lstStyle/>
+          <a:p>
+            <a:pPr algn="l">
+              <a:lnSpc>
+                <a:spcPct val="120000"/>
+              </a:lnSpc>
+              <a:spcAft>
+                <a:spcPts val="400"/>
+              </a:spcAft>
+            </a:pPr>
+            <a:r>
+              <a:rPr sz="1250" b="1">
+                <a:solidFill>
+                  <a:srgbClr val="1A202C"/>
+                </a:solidFill>
+                <a:latin typeface="맑은 고딕"/>
+              </a:rPr>
+              <a:t>선정 기준 — 점수 대신 두 가지</a:t>
+            </a:r>
+          </a:p>
+        </p:txBody>
+      </p:sp>
+      <p:sp>
+        <p:nvSpPr>
+          <p:cNvPr id="12" name="TextBox 11"/>
+          <p:cNvSpPr txBox="1"/>
+          <p:nvPr/>
+        </p:nvSpPr>
+        <p:spPr>
+          <a:xfrm>
+            <a:off x="6875999" y="1944000"/>
+            <a:ext cx="4524120" cy="648000"/>
+          </a:xfrm>
+          <a:prstGeom prst="rect">
+            <a:avLst/>
+          </a:prstGeom>
+          <a:noFill/>
+        </p:spPr>
+        <p:txBody>
+          <a:bodyPr wrap="square" anchor="t" lIns="0" rIns="0" tIns="0" bIns="0">
+            <a:spAutoFit/>
+          </a:bodyPr>
+          <a:lstStyle/>
+          <a:p>
+            <a:pPr algn="l">
+              <a:lnSpc>
+                <a:spcPct val="135000"/>
+              </a:lnSpc>
+              <a:spcAft>
+                <a:spcPts val="400"/>
+              </a:spcAft>
+            </a:pPr>
+            <a:r>
+              <a:rPr sz="1100" b="1">
+                <a:solidFill>
+                  <a:srgbClr val="1A202C"/>
+                </a:solidFill>
+                <a:latin typeface="맑은 고딕"/>
+              </a:rPr>
+              <a:t>① 외웠는가 </a:t>
+            </a:r>
+            <a:r>
+              <a:rPr sz="1100" b="0">
+                <a:solidFill>
+                  <a:srgbClr val="667085"/>
+                </a:solidFill>
+                <a:latin typeface="맑은 고딕"/>
+              </a:rPr>
+              <a:t>— 연습·검증 격차. 복잡한 모델일수록 크게 벌어졌다.</a:t>
+            </a:r>
+          </a:p>
+          <a:p>
+            <a:pPr algn="l">
+              <a:lnSpc>
+                <a:spcPct val="135000"/>
+              </a:lnSpc>
+              <a:spcAft>
+                <a:spcPts val="400"/>
+              </a:spcAft>
+            </a:pPr>
+            <a:r>
+              <a:rPr sz="1100" b="1">
+                <a:solidFill>
+                  <a:srgbClr val="1A202C"/>
+                </a:solidFill>
+                <a:latin typeface="맑은 고딕"/>
+              </a:rPr>
+              <a:t>② 왜를 말할 수 있는가 </a:t>
+            </a:r>
+            <a:r>
+              <a:rPr sz="1100" b="0">
+                <a:solidFill>
+                  <a:srgbClr val="667085"/>
+                </a:solidFill>
+                <a:latin typeface="맑은 고딕"/>
+              </a:rPr>
+              <a:t>— 랜덤포레스트는 중요도는 말해도 방향(+/−)을 못 말한다.</a:t>
+            </a:r>
+          </a:p>
+        </p:txBody>
+      </p:sp>
+      <p:sp>
+        <p:nvSpPr>
+          <p:cNvPr id="13" name="Rectangle 12"/>
+          <p:cNvSpPr/>
+          <p:nvPr/>
+        </p:nvSpPr>
+        <p:spPr>
+          <a:xfrm>
+            <a:off x="6875999" y="2790000"/>
+            <a:ext cx="4524120" cy="18000"/>
+          </a:xfrm>
+          <a:prstGeom prst="rect">
+            <a:avLst/>
+          </a:prstGeom>
+          <a:solidFill>
+            <a:srgbClr val="E4E8EF"/>
+          </a:solidFill>
+          <a:ln>
+            <a:noFill/>
+          </a:ln>
+          <a:effectLst/>
+        </p:spPr>
+        <p:style>
+          <a:lnRef idx="1">
+            <a:schemeClr val="accent1"/>
+          </a:lnRef>
+          <a:fillRef idx="3">
+            <a:schemeClr val="accent1"/>
+          </a:fillRef>
+          <a:effectRef idx="2">
+            <a:schemeClr val="accent1"/>
+          </a:effectRef>
+          <a:fontRef idx="minor">
+            <a:schemeClr val="lt1"/>
+          </a:fontRef>
+        </p:style>
+        <p:txBody>
+          <a:bodyPr rtlCol="0" anchor="ctr"/>
+          <a:lstStyle/>
+          <a:p>
+            <a:pPr algn="ctr"/>
+          </a:p>
+        </p:txBody>
+      </p:sp>
+      <p:sp>
+        <p:nvSpPr>
+          <p:cNvPr id="14" name="TextBox 13"/>
+          <p:cNvSpPr txBox="1"/>
+          <p:nvPr/>
+        </p:nvSpPr>
+        <p:spPr>
+          <a:xfrm>
+            <a:off x="6875999" y="2840400"/>
+            <a:ext cx="1512000" cy="251999"/>
+          </a:xfrm>
+          <a:prstGeom prst="rect">
+            <a:avLst/>
+          </a:prstGeom>
+          <a:noFill/>
+        </p:spPr>
+        <p:txBody>
+          <a:bodyPr wrap="square" anchor="t" lIns="0" rIns="0" tIns="0" bIns="0">
+            <a:spAutoFit/>
+          </a:bodyPr>
+          <a:lstStyle/>
+          <a:p>
+            <a:pPr algn="l">
+              <a:lnSpc>
+                <a:spcPct val="120000"/>
+              </a:lnSpc>
+              <a:spcAft>
+                <a:spcPts val="400"/>
+              </a:spcAft>
+            </a:pPr>
+            <a:r>
+              <a:rPr sz="1050" b="0">
+                <a:solidFill>
+                  <a:srgbClr val="667085"/>
+                </a:solidFill>
+                <a:latin typeface="맑은 고딕"/>
+              </a:rPr>
+              <a:t>대표 정확도</a:t>
+            </a:r>
+          </a:p>
+        </p:txBody>
+      </p:sp>
+      <p:sp>
+        <p:nvSpPr>
+          <p:cNvPr id="15" name="TextBox 14"/>
+          <p:cNvSpPr txBox="1"/>
+          <p:nvPr/>
+        </p:nvSpPr>
+        <p:spPr>
+          <a:xfrm>
+            <a:off x="8387999" y="2840400"/>
+            <a:ext cx="1800000" cy="251999"/>
+          </a:xfrm>
+          <a:prstGeom prst="rect">
+            <a:avLst/>
+          </a:prstGeom>
+          <a:noFill/>
+        </p:spPr>
+        <p:txBody>
+          <a:bodyPr wrap="square" anchor="t" lIns="0" rIns="0" tIns="0" bIns="0">
+            <a:spAutoFit/>
+          </a:bodyPr>
+          <a:lstStyle/>
+          <a:p>
+            <a:pPr algn="l">
+              <a:lnSpc>
+                <a:spcPct val="120000"/>
+              </a:lnSpc>
+              <a:spcAft>
+                <a:spcPts val="400"/>
+              </a:spcAft>
+            </a:pPr>
+            <a:r>
               <a:rPr sz="1150" b="1">
                 <a:solidFill>
                   <a:srgbClr val="1A202C"/>
                 </a:solidFill>
                 <a:latin typeface="맑은 고딕"/>
               </a:rPr>
-              <a:t>판정 4분면</a:t>
-            </a:r>
-          </a:p>
-        </p:txBody>
-      </p:sp>
-      <p:sp>
-        <p:nvSpPr>
-          <p:cNvPr id="11" name="TextBox 10"/>
-          <p:cNvSpPr txBox="1"/>
-          <p:nvPr/>
-        </p:nvSpPr>
-        <p:spPr>
-          <a:xfrm>
-            <a:off x="7375846" y="1890000"/>
-            <a:ext cx="4024273" cy="468000"/>
-          </a:xfrm>
-          <a:prstGeom prst="rect">
-            <a:avLst/>
-          </a:prstGeom>
-          <a:noFill/>
-        </p:spPr>
-        <p:txBody>
-          <a:bodyPr wrap="square" anchor="t" lIns="0" rIns="0" tIns="0" bIns="0">
-            <a:spAutoFit/>
-          </a:bodyPr>
-          <a:lstStyle/>
-          <a:p>
-            <a:pPr algn="l">
-              <a:lnSpc>
-                <a:spcPct val="136000"/>
-              </a:lnSpc>
-              <a:spcAft>
-                <a:spcPts val="400"/>
-              </a:spcAft>
-            </a:pPr>
-            <a:r>
-              <a:rPr sz="1019" b="0">
+              <a:t>0.7366 ± 0.0081</a:t>
+            </a:r>
+          </a:p>
+        </p:txBody>
+      </p:sp>
+      <p:sp>
+        <p:nvSpPr>
+          <p:cNvPr id="16" name="TextBox 15"/>
+          <p:cNvSpPr txBox="1"/>
+          <p:nvPr/>
+        </p:nvSpPr>
+        <p:spPr>
+          <a:xfrm>
+            <a:off x="10224000" y="2840400"/>
+            <a:ext cx="1176119" cy="251999"/>
+          </a:xfrm>
+          <a:prstGeom prst="rect">
+            <a:avLst/>
+          </a:prstGeom>
+          <a:noFill/>
+        </p:spPr>
+        <p:txBody>
+          <a:bodyPr wrap="square" anchor="t" lIns="0" rIns="0" tIns="0" bIns="0">
+            <a:spAutoFit/>
+          </a:bodyPr>
+          <a:lstStyle/>
+          <a:p>
+            <a:pPr algn="l">
+              <a:lnSpc>
+                <a:spcPct val="120000"/>
+              </a:lnSpc>
+              <a:spcAft>
+                <a:spcPts val="400"/>
+              </a:spcAft>
+            </a:pPr>
+            <a:r>
+              <a:rPr sz="950" b="0">
+                <a:solidFill>
+                  <a:srgbClr val="98A2B3"/>
+                </a:solidFill>
+                <a:latin typeface="맑은 고딕"/>
+              </a:rPr>
+              <a:t>분할 10회 반복 평균</a:t>
+            </a:r>
+          </a:p>
+        </p:txBody>
+      </p:sp>
+      <p:sp>
+        <p:nvSpPr>
+          <p:cNvPr id="17" name="Rectangle 16"/>
+          <p:cNvSpPr/>
+          <p:nvPr/>
+        </p:nvSpPr>
+        <p:spPr>
+          <a:xfrm>
+            <a:off x="6875999" y="3063600"/>
+            <a:ext cx="4524120" cy="10800"/>
+          </a:xfrm>
+          <a:prstGeom prst="rect">
+            <a:avLst/>
+          </a:prstGeom>
+          <a:solidFill>
+            <a:srgbClr val="E4E8EF"/>
+          </a:solidFill>
+          <a:ln>
+            <a:noFill/>
+          </a:ln>
+          <a:effectLst/>
+        </p:spPr>
+        <p:style>
+          <a:lnRef idx="1">
+            <a:schemeClr val="accent1"/>
+          </a:lnRef>
+          <a:fillRef idx="3">
+            <a:schemeClr val="accent1"/>
+          </a:fillRef>
+          <a:effectRef idx="2">
+            <a:schemeClr val="accent1"/>
+          </a:effectRef>
+          <a:fontRef idx="minor">
+            <a:schemeClr val="lt1"/>
+          </a:fontRef>
+        </p:style>
+        <p:txBody>
+          <a:bodyPr rtlCol="0" anchor="ctr"/>
+          <a:lstStyle/>
+          <a:p>
+            <a:pPr algn="ctr"/>
+          </a:p>
+        </p:txBody>
+      </p:sp>
+      <p:sp>
+        <p:nvSpPr>
+          <p:cNvPr id="18" name="TextBox 17"/>
+          <p:cNvSpPr txBox="1"/>
+          <p:nvPr/>
+        </p:nvSpPr>
+        <p:spPr>
+          <a:xfrm>
+            <a:off x="6875999" y="3114000"/>
+            <a:ext cx="1512000" cy="251999"/>
+          </a:xfrm>
+          <a:prstGeom prst="rect">
+            <a:avLst/>
+          </a:prstGeom>
+          <a:noFill/>
+        </p:spPr>
+        <p:txBody>
+          <a:bodyPr wrap="square" anchor="t" lIns="0" rIns="0" tIns="0" bIns="0">
+            <a:spAutoFit/>
+          </a:bodyPr>
+          <a:lstStyle/>
+          <a:p>
+            <a:pPr algn="l">
+              <a:lnSpc>
+                <a:spcPct val="120000"/>
+              </a:lnSpc>
+              <a:spcAft>
+                <a:spcPts val="400"/>
+              </a:spcAft>
+            </a:pPr>
+            <a:r>
+              <a:rPr sz="1050" b="0">
                 <a:solidFill>
                   <a:srgbClr val="667085"/>
                 </a:solidFill>
                 <a:latin typeface="맑은 고딕"/>
               </a:rPr>
-              <a:t>10분 확률(앞섬/밀림) × 실제 결과(승/패) = 우세승·역전승·역전패·열세패. 같은 패배라도 처방이 다르다.</a:t>
-            </a:r>
-          </a:p>
-        </p:txBody>
-      </p:sp>
-      <p:sp>
-        <p:nvSpPr>
-          <p:cNvPr id="12" name="TextBox 11"/>
-          <p:cNvSpPr txBox="1"/>
-          <p:nvPr/>
-        </p:nvSpPr>
-        <p:spPr>
-          <a:xfrm>
-            <a:off x="7375846" y="2466000"/>
-            <a:ext cx="4024273" cy="198000"/>
+              <a:t>단일 홀드아웃</a:t>
+            </a:r>
+          </a:p>
+        </p:txBody>
+      </p:sp>
+      <p:sp>
+        <p:nvSpPr>
+          <p:cNvPr id="19" name="TextBox 18"/>
+          <p:cNvSpPr txBox="1"/>
+          <p:nvPr/>
+        </p:nvSpPr>
+        <p:spPr>
+          <a:xfrm>
+            <a:off x="8387999" y="3114000"/>
+            <a:ext cx="1800000" cy="251999"/>
           </a:xfrm>
           <a:prstGeom prst="rect">
             <a:avLst/>
@@ -15014,63 +16521,149 @@
                 </a:solidFill>
                 <a:latin typeface="맑은 고딕"/>
               </a:rPr>
-              <a:t>코칭</a:t>
-            </a:r>
-          </a:p>
-        </p:txBody>
-      </p:sp>
-      <p:sp>
-        <p:nvSpPr>
-          <p:cNvPr id="13" name="TextBox 12"/>
-          <p:cNvSpPr txBox="1"/>
-          <p:nvPr/>
-        </p:nvSpPr>
-        <p:spPr>
-          <a:xfrm>
-            <a:off x="7375846" y="2664000"/>
-            <a:ext cx="4024273" cy="468000"/>
-          </a:xfrm>
-          <a:prstGeom prst="rect">
-            <a:avLst/>
-          </a:prstGeom>
-          <a:noFill/>
-        </p:spPr>
-        <p:txBody>
-          <a:bodyPr wrap="square" anchor="t" lIns="0" rIns="0" tIns="0" bIns="0">
-            <a:spAutoFit/>
-          </a:bodyPr>
-          <a:lstStyle/>
-          <a:p>
-            <a:pPr algn="l">
-              <a:lnSpc>
-                <a:spcPct val="136000"/>
-              </a:lnSpc>
-              <a:spcAft>
-                <a:spcPts val="400"/>
-              </a:spcAft>
-            </a:pPr>
-            <a:r>
-              <a:rPr sz="1019" b="0">
+              <a:t>0.7394</a:t>
+            </a:r>
+          </a:p>
+        </p:txBody>
+      </p:sp>
+      <p:sp>
+        <p:nvSpPr>
+          <p:cNvPr id="20" name="TextBox 19"/>
+          <p:cNvSpPr txBox="1"/>
+          <p:nvPr/>
+        </p:nvSpPr>
+        <p:spPr>
+          <a:xfrm>
+            <a:off x="10224000" y="3114000"/>
+            <a:ext cx="1176119" cy="251999"/>
+          </a:xfrm>
+          <a:prstGeom prst="rect">
+            <a:avLst/>
+          </a:prstGeom>
+          <a:noFill/>
+        </p:spPr>
+        <p:txBody>
+          <a:bodyPr wrap="square" anchor="t" lIns="0" rIns="0" tIns="0" bIns="0">
+            <a:spAutoFit/>
+          </a:bodyPr>
+          <a:lstStyle/>
+          <a:p>
+            <a:pPr algn="l">
+              <a:lnSpc>
+                <a:spcPct val="120000"/>
+              </a:lnSpc>
+              <a:spcAft>
+                <a:spcPts val="400"/>
+              </a:spcAft>
+            </a:pPr>
+            <a:r>
+              <a:rPr sz="950" b="0">
+                <a:solidFill>
+                  <a:srgbClr val="98A2B3"/>
+                </a:solidFill>
+                <a:latin typeface="맑은 고딕"/>
+              </a:rPr>
+              <a:t>시드 42 · 찍기 0.5010</a:t>
+            </a:r>
+          </a:p>
+        </p:txBody>
+      </p:sp>
+      <p:sp>
+        <p:nvSpPr>
+          <p:cNvPr id="21" name="Rectangle 20"/>
+          <p:cNvSpPr/>
+          <p:nvPr/>
+        </p:nvSpPr>
+        <p:spPr>
+          <a:xfrm>
+            <a:off x="6875999" y="3337200"/>
+            <a:ext cx="4524120" cy="10800"/>
+          </a:xfrm>
+          <a:prstGeom prst="rect">
+            <a:avLst/>
+          </a:prstGeom>
+          <a:solidFill>
+            <a:srgbClr val="E4E8EF"/>
+          </a:solidFill>
+          <a:ln>
+            <a:noFill/>
+          </a:ln>
+          <a:effectLst/>
+        </p:spPr>
+        <p:style>
+          <a:lnRef idx="1">
+            <a:schemeClr val="accent1"/>
+          </a:lnRef>
+          <a:fillRef idx="3">
+            <a:schemeClr val="accent1"/>
+          </a:fillRef>
+          <a:effectRef idx="2">
+            <a:schemeClr val="accent1"/>
+          </a:effectRef>
+          <a:fontRef idx="minor">
+            <a:schemeClr val="lt1"/>
+          </a:fontRef>
+        </p:style>
+        <p:txBody>
+          <a:bodyPr rtlCol="0" anchor="ctr"/>
+          <a:lstStyle/>
+          <a:p>
+            <a:pPr algn="ctr"/>
+          </a:p>
+        </p:txBody>
+      </p:sp>
+      <p:sp>
+        <p:nvSpPr>
+          <p:cNvPr id="22" name="TextBox 21"/>
+          <p:cNvSpPr txBox="1"/>
+          <p:nvPr/>
+        </p:nvSpPr>
+        <p:spPr>
+          <a:xfrm>
+            <a:off x="6875999" y="3387600"/>
+            <a:ext cx="1512000" cy="251999"/>
+          </a:xfrm>
+          <a:prstGeom prst="rect">
+            <a:avLst/>
+          </a:prstGeom>
+          <a:noFill/>
+        </p:spPr>
+        <p:txBody>
+          <a:bodyPr wrap="square" anchor="t" lIns="0" rIns="0" tIns="0" bIns="0">
+            <a:spAutoFit/>
+          </a:bodyPr>
+          <a:lstStyle/>
+          <a:p>
+            <a:pPr algn="l">
+              <a:lnSpc>
+                <a:spcPct val="120000"/>
+              </a:lnSpc>
+              <a:spcAft>
+                <a:spcPts val="400"/>
+              </a:spcAft>
+            </a:pPr>
+            <a:r>
+              <a:rPr sz="1050" b="0">
                 <a:solidFill>
                   <a:srgbClr val="667085"/>
                 </a:solidFill>
                 <a:latin typeface="맑은 고딕"/>
               </a:rPr>
-              <a:t>"드래곤 하나 더였다면" — 반사실 계산. 관찰 기록이지 인과 증명이 아님을 화면에 명시.</a:t>
-            </a:r>
-          </a:p>
-        </p:txBody>
-      </p:sp>
-      <p:sp>
-        <p:nvSpPr>
-          <p:cNvPr id="14" name="TextBox 13"/>
-          <p:cNvSpPr txBox="1"/>
-          <p:nvPr/>
-        </p:nvSpPr>
-        <p:spPr>
-          <a:xfrm>
-            <a:off x="7375846" y="3240000"/>
-            <a:ext cx="4024273" cy="198000"/>
+              <a:t>AUC</a:t>
+            </a:r>
+          </a:p>
+        </p:txBody>
+      </p:sp>
+      <p:sp>
+        <p:nvSpPr>
+          <p:cNvPr id="23" name="TextBox 22"/>
+          <p:cNvSpPr txBox="1"/>
+          <p:nvPr/>
+        </p:nvSpPr>
+        <p:spPr>
+          <a:xfrm>
+            <a:off x="8387999" y="3387600"/>
+            <a:ext cx="1800000" cy="251999"/>
           </a:xfrm>
           <a:prstGeom prst="rect">
             <a:avLst/>
@@ -15098,63 +16691,149 @@
                 </a:solidFill>
                 <a:latin typeface="맑은 고딕"/>
               </a:rPr>
-              <a:t>플레이 성향 레이더</a:t>
-            </a:r>
-          </a:p>
-        </p:txBody>
-      </p:sp>
-      <p:sp>
-        <p:nvSpPr>
-          <p:cNvPr id="15" name="TextBox 14"/>
-          <p:cNvSpPr txBox="1"/>
-          <p:nvPr/>
-        </p:nvSpPr>
-        <p:spPr>
-          <a:xfrm>
-            <a:off x="7375846" y="3438000"/>
-            <a:ext cx="4024273" cy="468000"/>
-          </a:xfrm>
-          <a:prstGeom prst="rect">
-            <a:avLst/>
-          </a:prstGeom>
-          <a:noFill/>
-        </p:spPr>
-        <p:txBody>
-          <a:bodyPr wrap="square" anchor="t" lIns="0" rIns="0" tIns="0" bIns="0">
-            <a:spAutoFit/>
-          </a:bodyPr>
-          <a:lstStyle/>
-          <a:p>
-            <a:pPr algn="l">
-              <a:lnSpc>
-                <a:spcPct val="136000"/>
-              </a:lnSpc>
-              <a:spcAft>
-                <a:spcPts val="400"/>
-              </a:spcAft>
-            </a:pPr>
-            <a:r>
-              <a:rPr sz="1019" b="0">
+              <a:t>0.8150</a:t>
+            </a:r>
+          </a:p>
+        </p:txBody>
+      </p:sp>
+      <p:sp>
+        <p:nvSpPr>
+          <p:cNvPr id="24" name="TextBox 23"/>
+          <p:cNvSpPr txBox="1"/>
+          <p:nvPr/>
+        </p:nvSpPr>
+        <p:spPr>
+          <a:xfrm>
+            <a:off x="10224000" y="3387600"/>
+            <a:ext cx="1176119" cy="251999"/>
+          </a:xfrm>
+          <a:prstGeom prst="rect">
+            <a:avLst/>
+          </a:prstGeom>
+          <a:noFill/>
+        </p:spPr>
+        <p:txBody>
+          <a:bodyPr wrap="square" anchor="t" lIns="0" rIns="0" tIns="0" bIns="0">
+            <a:spAutoFit/>
+          </a:bodyPr>
+          <a:lstStyle/>
+          <a:p>
+            <a:pPr algn="l">
+              <a:lnSpc>
+                <a:spcPct val="120000"/>
+              </a:lnSpc>
+              <a:spcAft>
+                <a:spcPts val="400"/>
+              </a:spcAft>
+            </a:pPr>
+            <a:r>
+              <a:rPr sz="950" b="0">
+                <a:solidFill>
+                  <a:srgbClr val="98A2B3"/>
+                </a:solidFill>
+                <a:latin typeface="맑은 고딕"/>
+              </a:rPr>
+              <a:t>순위 능력</a:t>
+            </a:r>
+          </a:p>
+        </p:txBody>
+      </p:sp>
+      <p:sp>
+        <p:nvSpPr>
+          <p:cNvPr id="25" name="Rectangle 24"/>
+          <p:cNvSpPr/>
+          <p:nvPr/>
+        </p:nvSpPr>
+        <p:spPr>
+          <a:xfrm>
+            <a:off x="6875999" y="3610800"/>
+            <a:ext cx="4524120" cy="10800"/>
+          </a:xfrm>
+          <a:prstGeom prst="rect">
+            <a:avLst/>
+          </a:prstGeom>
+          <a:solidFill>
+            <a:srgbClr val="E4E8EF"/>
+          </a:solidFill>
+          <a:ln>
+            <a:noFill/>
+          </a:ln>
+          <a:effectLst/>
+        </p:spPr>
+        <p:style>
+          <a:lnRef idx="1">
+            <a:schemeClr val="accent1"/>
+          </a:lnRef>
+          <a:fillRef idx="3">
+            <a:schemeClr val="accent1"/>
+          </a:fillRef>
+          <a:effectRef idx="2">
+            <a:schemeClr val="accent1"/>
+          </a:effectRef>
+          <a:fontRef idx="minor">
+            <a:schemeClr val="lt1"/>
+          </a:fontRef>
+        </p:style>
+        <p:txBody>
+          <a:bodyPr rtlCol="0" anchor="ctr"/>
+          <a:lstStyle/>
+          <a:p>
+            <a:pPr algn="ctr"/>
+          </a:p>
+        </p:txBody>
+      </p:sp>
+      <p:sp>
+        <p:nvSpPr>
+          <p:cNvPr id="26" name="TextBox 25"/>
+          <p:cNvSpPr txBox="1"/>
+          <p:nvPr/>
+        </p:nvSpPr>
+        <p:spPr>
+          <a:xfrm>
+            <a:off x="6875999" y="3661200"/>
+            <a:ext cx="1512000" cy="251999"/>
+          </a:xfrm>
+          <a:prstGeom prst="rect">
+            <a:avLst/>
+          </a:prstGeom>
+          <a:noFill/>
+        </p:spPr>
+        <p:txBody>
+          <a:bodyPr wrap="square" anchor="t" lIns="0" rIns="0" tIns="0" bIns="0">
+            <a:spAutoFit/>
+          </a:bodyPr>
+          <a:lstStyle/>
+          <a:p>
+            <a:pPr algn="l">
+              <a:lnSpc>
+                <a:spcPct val="120000"/>
+              </a:lnSpc>
+              <a:spcAft>
+                <a:spcPts val="400"/>
+              </a:spcAft>
+            </a:pPr>
+            <a:r>
+              <a:rPr sz="1050" b="0">
                 <a:solidFill>
                   <a:srgbClr val="667085"/>
                 </a:solidFill>
                 <a:latin typeface="맑은 고딕"/>
               </a:rPr>
-              <a:t>다섯 축 백분위(교전·라인·정글·오브젝트·시야). 축끼리 상관 최대 0.13 이 되도록 데이터로 선정.</a:t>
-            </a:r>
-          </a:p>
-        </p:txBody>
-      </p:sp>
-      <p:sp>
-        <p:nvSpPr>
-          <p:cNvPr id="16" name="TextBox 15"/>
-          <p:cNvSpPr txBox="1"/>
-          <p:nvPr/>
-        </p:nvSpPr>
-        <p:spPr>
-          <a:xfrm>
-            <a:off x="7375846" y="4014000"/>
-            <a:ext cx="4024273" cy="198000"/>
+              <a:t>F1 / Brier</a:t>
+            </a:r>
+          </a:p>
+        </p:txBody>
+      </p:sp>
+      <p:sp>
+        <p:nvSpPr>
+          <p:cNvPr id="27" name="TextBox 26"/>
+          <p:cNvSpPr txBox="1"/>
+          <p:nvPr/>
+        </p:nvSpPr>
+        <p:spPr>
+          <a:xfrm>
+            <a:off x="8387999" y="3661200"/>
+            <a:ext cx="1800000" cy="251999"/>
           </a:xfrm>
           <a:prstGeom prst="rect">
             <a:avLst/>
@@ -15182,63 +16861,149 @@
                 </a:solidFill>
                 <a:latin typeface="맑은 고딕"/>
               </a:rPr>
-              <a:t>라인 기준선</a:t>
-            </a:r>
-          </a:p>
-        </p:txBody>
-      </p:sp>
-      <p:sp>
-        <p:nvSpPr>
-          <p:cNvPr id="17" name="TextBox 16"/>
-          <p:cNvSpPr txBox="1"/>
-          <p:nvPr/>
-        </p:nvSpPr>
-        <p:spPr>
-          <a:xfrm>
-            <a:off x="7375846" y="4212000"/>
-            <a:ext cx="4024273" cy="468000"/>
-          </a:xfrm>
-          <a:prstGeom prst="rect">
-            <a:avLst/>
-          </a:prstGeom>
-          <a:noFill/>
-        </p:spPr>
-        <p:txBody>
-          <a:bodyPr wrap="square" anchor="t" lIns="0" rIns="0" tIns="0" bIns="0">
-            <a:spAutoFit/>
-          </a:bodyPr>
-          <a:lstStyle/>
-          <a:p>
-            <a:pPr algn="l">
-              <a:lnSpc>
-                <a:spcPct val="136000"/>
-              </a:lnSpc>
-              <a:spcAft>
-                <a:spcPts val="400"/>
-              </a:spcAft>
-            </a:pPr>
-            <a:r>
-              <a:rPr sz="1019" b="0">
+              <a:t>0.7352 / 0.1756</a:t>
+            </a:r>
+          </a:p>
+        </p:txBody>
+      </p:sp>
+      <p:sp>
+        <p:nvSpPr>
+          <p:cNvPr id="28" name="TextBox 27"/>
+          <p:cNvSpPr txBox="1"/>
+          <p:nvPr/>
+        </p:nvSpPr>
+        <p:spPr>
+          <a:xfrm>
+            <a:off x="10224000" y="3661200"/>
+            <a:ext cx="1176119" cy="251999"/>
+          </a:xfrm>
+          <a:prstGeom prst="rect">
+            <a:avLst/>
+          </a:prstGeom>
+          <a:noFill/>
+        </p:spPr>
+        <p:txBody>
+          <a:bodyPr wrap="square" anchor="t" lIns="0" rIns="0" tIns="0" bIns="0">
+            <a:spAutoFit/>
+          </a:bodyPr>
+          <a:lstStyle/>
+          <a:p>
+            <a:pPr algn="l">
+              <a:lnSpc>
+                <a:spcPct val="120000"/>
+              </a:lnSpc>
+              <a:spcAft>
+                <a:spcPts val="400"/>
+              </a:spcAft>
+            </a:pPr>
+            <a:r>
+              <a:rPr sz="950" b="0">
+                <a:solidFill>
+                  <a:srgbClr val="98A2B3"/>
+                </a:solidFill>
+                <a:latin typeface="맑은 고딕"/>
+              </a:rPr>
+              <a:t>쏠림 · 확률 정확도</a:t>
+            </a:r>
+          </a:p>
+        </p:txBody>
+      </p:sp>
+      <p:sp>
+        <p:nvSpPr>
+          <p:cNvPr id="29" name="Rectangle 28"/>
+          <p:cNvSpPr/>
+          <p:nvPr/>
+        </p:nvSpPr>
+        <p:spPr>
+          <a:xfrm>
+            <a:off x="6875999" y="3884399"/>
+            <a:ext cx="4524120" cy="10800"/>
+          </a:xfrm>
+          <a:prstGeom prst="rect">
+            <a:avLst/>
+          </a:prstGeom>
+          <a:solidFill>
+            <a:srgbClr val="E4E8EF"/>
+          </a:solidFill>
+          <a:ln>
+            <a:noFill/>
+          </a:ln>
+          <a:effectLst/>
+        </p:spPr>
+        <p:style>
+          <a:lnRef idx="1">
+            <a:schemeClr val="accent1"/>
+          </a:lnRef>
+          <a:fillRef idx="3">
+            <a:schemeClr val="accent1"/>
+          </a:fillRef>
+          <a:effectRef idx="2">
+            <a:schemeClr val="accent1"/>
+          </a:effectRef>
+          <a:fontRef idx="minor">
+            <a:schemeClr val="lt1"/>
+          </a:fontRef>
+        </p:style>
+        <p:txBody>
+          <a:bodyPr rtlCol="0" anchor="ctr"/>
+          <a:lstStyle/>
+          <a:p>
+            <a:pPr algn="ctr"/>
+          </a:p>
+        </p:txBody>
+      </p:sp>
+      <p:sp>
+        <p:nvSpPr>
+          <p:cNvPr id="30" name="TextBox 29"/>
+          <p:cNvSpPr txBox="1"/>
+          <p:nvPr/>
+        </p:nvSpPr>
+        <p:spPr>
+          <a:xfrm>
+            <a:off x="6875999" y="3934800"/>
+            <a:ext cx="1512000" cy="251999"/>
+          </a:xfrm>
+          <a:prstGeom prst="rect">
+            <a:avLst/>
+          </a:prstGeom>
+          <a:noFill/>
+        </p:spPr>
+        <p:txBody>
+          <a:bodyPr wrap="square" anchor="t" lIns="0" rIns="0" tIns="0" bIns="0">
+            <a:spAutoFit/>
+          </a:bodyPr>
+          <a:lstStyle/>
+          <a:p>
+            <a:pPr algn="l">
+              <a:lnSpc>
+                <a:spcPct val="120000"/>
+              </a:lnSpc>
+              <a:spcAft>
+                <a:spcPts val="400"/>
+              </a:spcAft>
+            </a:pPr>
+            <a:r>
+              <a:rPr sz="1050" b="0">
                 <a:solidFill>
                   <a:srgbClr val="667085"/>
                 </a:solidFill>
                 <a:latin typeface="맑은 고딕"/>
               </a:rPr>
-              <a:t>같은 판의 라인 상대 = 같은 티어 표본. "내 티어가 거품인가"를 별도 수집 없이 잰다.</a:t>
-            </a:r>
-          </a:p>
-        </p:txBody>
-      </p:sp>
-      <p:sp>
-        <p:nvSpPr>
-          <p:cNvPr id="18" name="TextBox 17"/>
-          <p:cNvSpPr txBox="1"/>
-          <p:nvPr/>
-        </p:nvSpPr>
-        <p:spPr>
-          <a:xfrm>
-            <a:off x="7375846" y="4788000"/>
-            <a:ext cx="4024273" cy="198000"/>
+              <a:t>교차검증</a:t>
+            </a:r>
+          </a:p>
+        </p:txBody>
+      </p:sp>
+      <p:sp>
+        <p:nvSpPr>
+          <p:cNvPr id="31" name="TextBox 30"/>
+          <p:cNvSpPr txBox="1"/>
+          <p:nvPr/>
+        </p:nvSpPr>
+        <p:spPr>
+          <a:xfrm>
+            <a:off x="8387999" y="3934800"/>
+            <a:ext cx="1800000" cy="251999"/>
           </a:xfrm>
           <a:prstGeom prst="rect">
             <a:avLst/>
@@ -15266,49 +17031,144 @@
                 </a:solidFill>
                 <a:latin typeface="맑은 고딕"/>
               </a:rPr>
-              <a:t>운영</a:t>
-            </a:r>
-          </a:p>
-        </p:txBody>
-      </p:sp>
-      <p:sp>
-        <p:nvSpPr>
-          <p:cNvPr id="19" name="TextBox 18"/>
-          <p:cNvSpPr txBox="1"/>
-          <p:nvPr/>
-        </p:nvSpPr>
-        <p:spPr>
-          <a:xfrm>
-            <a:off x="7375846" y="4986000"/>
-            <a:ext cx="4024273" cy="468000"/>
-          </a:xfrm>
-          <a:prstGeom prst="rect">
-            <a:avLst/>
-          </a:prstGeom>
-          <a:noFill/>
-        </p:spPr>
-        <p:txBody>
-          <a:bodyPr wrap="square" anchor="t" lIns="0" rIns="0" tIns="0" bIns="0">
-            <a:spAutoFit/>
-          </a:bodyPr>
-          <a:lstStyle/>
-          <a:p>
-            <a:pPr algn="l">
-              <a:lnSpc>
-                <a:spcPct val="136000"/>
-              </a:lnSpc>
-              <a:spcAft>
-                <a:spcPts val="400"/>
-              </a:spcAft>
-            </a:pPr>
-            <a:r>
-              <a:rPr sz="1019" b="0">
+              <a:t>0.7315 ± 0.0153</a:t>
+            </a:r>
+          </a:p>
+        </p:txBody>
+      </p:sp>
+      <p:sp>
+        <p:nvSpPr>
+          <p:cNvPr id="32" name="TextBox 31"/>
+          <p:cNvSpPr txBox="1"/>
+          <p:nvPr/>
+        </p:nvSpPr>
+        <p:spPr>
+          <a:xfrm>
+            <a:off x="10224000" y="3934800"/>
+            <a:ext cx="1176119" cy="251999"/>
+          </a:xfrm>
+          <a:prstGeom prst="rect">
+            <a:avLst/>
+          </a:prstGeom>
+          <a:noFill/>
+        </p:spPr>
+        <p:txBody>
+          <a:bodyPr wrap="square" anchor="t" lIns="0" rIns="0" tIns="0" bIns="0">
+            <a:spAutoFit/>
+          </a:bodyPr>
+          <a:lstStyle/>
+          <a:p>
+            <a:pPr algn="l">
+              <a:lnSpc>
+                <a:spcPct val="120000"/>
+              </a:lnSpc>
+              <a:spcAft>
+                <a:spcPts val="400"/>
+              </a:spcAft>
+            </a:pPr>
+            <a:r>
+              <a:rPr sz="950" b="0">
+                <a:solidFill>
+                  <a:srgbClr val="98A2B3"/>
+                </a:solidFill>
+                <a:latin typeface="맑은 고딕"/>
+              </a:rPr>
+              <a:t>5-fold · 격차 +0.0022</a:t>
+            </a:r>
+          </a:p>
+        </p:txBody>
+      </p:sp>
+      <p:sp>
+        <p:nvSpPr>
+          <p:cNvPr id="33" name="Rectangle 32"/>
+          <p:cNvSpPr/>
+          <p:nvPr/>
+        </p:nvSpPr>
+        <p:spPr>
+          <a:xfrm>
+            <a:off x="6875999" y="4157999"/>
+            <a:ext cx="4524120" cy="10800"/>
+          </a:xfrm>
+          <a:prstGeom prst="rect">
+            <a:avLst/>
+          </a:prstGeom>
+          <a:solidFill>
+            <a:srgbClr val="E4E8EF"/>
+          </a:solidFill>
+          <a:ln>
+            <a:noFill/>
+          </a:ln>
+          <a:effectLst/>
+        </p:spPr>
+        <p:style>
+          <a:lnRef idx="1">
+            <a:schemeClr val="accent1"/>
+          </a:lnRef>
+          <a:fillRef idx="3">
+            <a:schemeClr val="accent1"/>
+          </a:fillRef>
+          <a:effectRef idx="2">
+            <a:schemeClr val="accent1"/>
+          </a:effectRef>
+          <a:fontRef idx="minor">
+            <a:schemeClr val="lt1"/>
+          </a:fontRef>
+        </p:style>
+        <p:txBody>
+          <a:bodyPr rtlCol="0" anchor="ctr"/>
+          <a:lstStyle/>
+          <a:p>
+            <a:pPr algn="ctr"/>
+          </a:p>
+        </p:txBody>
+      </p:sp>
+      <p:sp>
+        <p:nvSpPr>
+          <p:cNvPr id="34" name="TextBox 33"/>
+          <p:cNvSpPr txBox="1"/>
+          <p:nvPr/>
+        </p:nvSpPr>
+        <p:spPr>
+          <a:xfrm>
+            <a:off x="6875999" y="4338000"/>
+            <a:ext cx="4524120" cy="576000"/>
+          </a:xfrm>
+          <a:prstGeom prst="rect">
+            <a:avLst/>
+          </a:prstGeom>
+          <a:noFill/>
+        </p:spPr>
+        <p:txBody>
+          <a:bodyPr wrap="square" anchor="t" lIns="0" rIns="0" tIns="0" bIns="0">
+            <a:spAutoFit/>
+          </a:bodyPr>
+          <a:lstStyle/>
+          <a:p>
+            <a:pPr algn="l">
+              <a:lnSpc>
+                <a:spcPct val="138000"/>
+              </a:lnSpc>
+              <a:spcAft>
+                <a:spcPts val="400"/>
+              </a:spcAft>
+            </a:pPr>
+            <a:r>
+              <a:rPr sz="1050" b="1">
+                <a:solidFill>
+                  <a:srgbClr val="1A202C"/>
+                </a:solidFill>
+                <a:latin typeface="맑은 고딕"/>
+              </a:rPr>
+              <a:t>일반화 — </a:t>
+            </a:r>
+            <a:r>
+              <a:rPr sz="1050" b="0">
                 <a:solidFill>
                   <a:srgbClr val="667085"/>
                 </a:solidFill>
                 <a:latin typeface="맑은 고딕"/>
               </a:rPr>
-              <a:t>Riot API 예산 100/120초 — 수집기는 30만 쓰고 양보. 5분 캐시로 동시 접속 시 외부 호출 0.</a:t>
+              <a:t>2026년 아이언~다이아 1,399판을 직접 수집해 채점: 저티어 0.685 vs 고티어 0.707, p=0.407. "차이가 없다"가 아니라 "큰 차이는 확인되지 않았다"까지만 적었다(티어당 150~312판).</a:t>
             </a:r>
           </a:p>
         </p:txBody>

--- a/LOLEX_포트폴리오.pptx
+++ b/LOLEX_포트폴리오.pptx
@@ -16073,26 +16073,26 @@
         </p:nvSpPr>
         <p:spPr>
           <a:xfrm>
-            <a:off x="792000" y="5229239"/>
-            <a:ext cx="5616000" cy="216000"/>
-          </a:xfrm>
-          <a:prstGeom prst="rect">
-            <a:avLst/>
-          </a:prstGeom>
-          <a:noFill/>
-        </p:spPr>
-        <p:txBody>
-          <a:bodyPr wrap="square" anchor="t" lIns="0" rIns="0" tIns="0" bIns="0">
-            <a:spAutoFit/>
-          </a:bodyPr>
-          <a:lstStyle/>
-          <a:p>
-            <a:pPr algn="l">
-              <a:lnSpc>
-                <a:spcPct val="120000"/>
-              </a:lnSpc>
-              <a:spcAft>
-                <a:spcPts val="400"/>
+            <a:off x="792000" y="5211239"/>
+            <a:ext cx="5616000" cy="432000"/>
+          </a:xfrm>
+          <a:prstGeom prst="rect">
+            <a:avLst/>
+          </a:prstGeom>
+          <a:noFill/>
+        </p:spPr>
+        <p:txBody>
+          <a:bodyPr wrap="square" anchor="t" lIns="0" rIns="0" tIns="0" bIns="0">
+            <a:spAutoFit/>
+          </a:bodyPr>
+          <a:lstStyle/>
+          <a:p>
+            <a:pPr algn="l">
+              <a:lnSpc>
+                <a:spcPct val="130000"/>
+              </a:lnSpc>
+              <a:spcAft>
+                <a:spcPts val="200"/>
               </a:spcAft>
             </a:pPr>
             <a:r>
@@ -16103,6 +16103,25 @@
                 <a:latin typeface="맑은 고딕"/>
               </a:rPr>
               <a:t>후보 8종 교차검증 — 1위와 2위가 0.003 차이, 점수로는 못 고른다</a:t>
+            </a:r>
+          </a:p>
+          <a:p>
+            <a:pPr algn="l">
+              <a:lnSpc>
+                <a:spcPct val="130000"/>
+              </a:lnSpc>
+              <a:spcAft>
+                <a:spcPts val="200"/>
+              </a:spcAft>
+            </a:pPr>
+            <a:r>
+              <a:rPr sz="950" b="0">
+                <a:solidFill>
+                  <a:srgbClr val="98A2B3"/>
+                </a:solidFill>
+                <a:latin typeface="맑은 고딕"/>
+              </a:rPr>
+              <a:t>찍기 기준선은 재는 자리마다 다르다 — 그래프 0.5009 는 교차검증, 오른쪽 표 0.5010 은 홀드아웃</a:t>
             </a:r>
           </a:p>
         </p:txBody>
